--- a/课件/C1/C1-A-04/C1-A-04.pptx
+++ b/课件/C1/C1-A-04/C1-A-04.pptx
@@ -1,32 +1,32 @@
 
 <file path=ppt/presentation.xml><?xml version="1.0" encoding="utf-8"?>
-<p:presentation xmlns:a="http://schemas.openxmlformats.org/drawingml/2006/main" xmlns:r="http://schemas.openxmlformats.org/officeDocument/2006/relationships" xmlns:p="http://schemas.openxmlformats.org/presentationml/2006/main" autoCompressPictures="0">
+<p:presentation xmlns:a="http://schemas.openxmlformats.org/drawingml/2006/main" xmlns:r="http://schemas.openxmlformats.org/officeDocument/2006/relationships" xmlns:p="http://schemas.openxmlformats.org/presentationml/2006/main" saveSubsetFonts="1" autoCompressPictures="0">
   <p:sldMasterIdLst>
     <p:sldMasterId id="2147483648" r:id="rId1"/>
   </p:sldMasterIdLst>
+  <p:sldIdLst>
+    <p:sldId id="256" r:id="rId2"/>
+    <p:sldId id="257" r:id="rId3"/>
+    <p:sldId id="258" r:id="rId4"/>
+    <p:sldId id="259" r:id="rId5"/>
+    <p:sldId id="260" r:id="rId6"/>
+    <p:sldId id="261" r:id="rId7"/>
+    <p:sldId id="262" r:id="rId8"/>
+    <p:sldId id="263" r:id="rId9"/>
+    <p:sldId id="264" r:id="rId10"/>
+    <p:sldId id="265" r:id="rId11"/>
+    <p:sldId id="266" r:id="rId12"/>
+    <p:sldId id="267" r:id="rId13"/>
+    <p:sldId id="268" r:id="rId14"/>
+    <p:sldId id="269" r:id="rId15"/>
+    <p:sldId id="270" r:id="rId16"/>
+    <p:sldId id="271" r:id="rId17"/>
+  </p:sldIdLst>
   <p:notesMasterIdLst>
-    <p:notesMasterId r:id="rId4"/>
+    <p:notesMasterId r:id="rId18"/>
   </p:notesMasterIdLst>
-  <p:sldIdLst>
-    <p:sldId id="256" r:id="rId3"/>
-    <p:sldId id="257" r:id="rId5"/>
-    <p:sldId id="258" r:id="rId6"/>
-    <p:sldId id="259" r:id="rId7"/>
-    <p:sldId id="260" r:id="rId8"/>
-    <p:sldId id="261" r:id="rId9"/>
-    <p:sldId id="262" r:id="rId10"/>
-    <p:sldId id="263" r:id="rId11"/>
-    <p:sldId id="264" r:id="rId12"/>
-    <p:sldId id="265" r:id="rId13"/>
-    <p:sldId id="266" r:id="rId14"/>
-    <p:sldId id="267" r:id="rId15"/>
-    <p:sldId id="268" r:id="rId16"/>
-    <p:sldId id="269" r:id="rId17"/>
-    <p:sldId id="270" r:id="rId18"/>
-    <p:sldId id="271" r:id="rId19"/>
-  </p:sldIdLst>
-  <p:sldSz cx="12191365" cy="6858000"/>
-  <p:notesSz cx="6858000" cy="12191365"/>
+  <p:sldSz cx="12191695" cy="6858000"/>
+  <p:notesSz cx="6858000" cy="12191695"/>
   <p:defaultTextStyle>
     <a:lvl1pPr marL="0" algn="l" defTabSz="914400" rtl="0" eaLnBrk="1" latinLnBrk="0" hangingPunct="1">
       <a:defRPr sz="1800" kern="1200">
@@ -204,6 +204,7 @@
           <a:p>
             <a:fld id="{5282F153-3F37-0F45-9E97-73ACFA13230C}" type="datetimeFigureOut">
               <a:rPr lang="en-US"/>
+              <a:t>7/23/19</a:t>
             </a:fld>
             <a:endParaRPr lang="en-US"/>
           </a:p>
@@ -270,7 +271,6 @@
               <a:rPr lang="en-US"/>
               <a:t>Click to edit Master text styles</a:t>
             </a:r>
-            <a:endParaRPr lang="en-US"/>
           </a:p>
           <a:p>
             <a:pPr lvl="1"/>
@@ -278,7 +278,6 @@
               <a:rPr lang="en-US"/>
               <a:t>Second level</a:t>
             </a:r>
-            <a:endParaRPr lang="en-US"/>
           </a:p>
           <a:p>
             <a:pPr lvl="2"/>
@@ -286,7 +285,6 @@
               <a:rPr lang="en-US"/>
               <a:t>Third level</a:t>
             </a:r>
-            <a:endParaRPr lang="en-US"/>
           </a:p>
           <a:p>
             <a:pPr lvl="3"/>
@@ -294,7 +292,6 @@
               <a:rPr lang="en-US"/>
               <a:t>Fourth level</a:t>
             </a:r>
-            <a:endParaRPr lang="en-US"/>
           </a:p>
           <a:p>
             <a:pPr lvl="4"/>
@@ -302,7 +299,6 @@
               <a:rPr lang="en-US"/>
               <a:t>Fifth level</a:t>
             </a:r>
-            <a:endParaRPr lang="en-US"/>
           </a:p>
         </p:txBody>
       </p:sp>
@@ -366,12 +362,18 @@
           <a:p>
             <a:fld id="{CE5E9CC1-C706-0F49-92D6-E571CC5EEA8F}" type="slidenum">
               <a:rPr lang="en-US"/>
+              <a:t>‹#›</a:t>
             </a:fld>
             <a:endParaRPr lang="en-US"/>
           </a:p>
         </p:txBody>
       </p:sp>
     </p:spTree>
+    <p:extLst>
+      <p:ext uri="{BB962C8B-B14F-4D97-AF65-F5344CB8AC3E}">
+        <p14:creationId xmlns:p14="http://schemas.microsoft.com/office/powerpoint/2010/main" val="1024086991"/>
+      </p:ext>
+    </p:extLst>
   </p:cSld>
   <p:clrMap bg1="lt1" tx1="dk1" bg2="lt2" tx2="dk2" accent1="accent1" accent2="accent2" accent3="accent3" accent4="accent4" accent5="accent5" accent6="accent6" hlink="hlink" folHlink="folHlink"/>
   <p:notesStyle>
@@ -513,6 +515,10 @@
           <a:bodyPr/>
           <a:lstStyle/>
           <a:p>
+            <a:r>
+              <a:rPr lang="en-US" dirty="0"/>
+              <a:t/>
+            </a:r>
             <a:endParaRPr lang="en-US" dirty="0"/>
           </a:p>
         </p:txBody>
@@ -534,12 +540,18 @@
           <a:p>
             <a:fld id="{F7021451-1387-4CA6-816F-3879F97B5CBC}" type="slidenum">
               <a:rPr lang="en-US"/>
+              <a:t>1</a:t>
             </a:fld>
             <a:endParaRPr lang="en-US"/>
           </a:p>
         </p:txBody>
       </p:sp>
     </p:spTree>
+    <p:extLst>
+      <p:ext uri="{BB962C8B-B14F-4D97-AF65-F5344CB8AC3E}">
+        <p14:creationId xmlns:p14="http://schemas.microsoft.com/office/powerpoint/2010/main" val="1024086991"/>
+      </p:ext>
+    </p:extLst>
   </p:cSld>
   <p:clrMapOvr>
     <a:masterClrMapping/>
@@ -591,6 +603,10 @@
           <a:bodyPr/>
           <a:lstStyle/>
           <a:p>
+            <a:r>
+              <a:rPr lang="en-US" dirty="0"/>
+              <a:t/>
+            </a:r>
             <a:endParaRPr lang="en-US" dirty="0"/>
           </a:p>
         </p:txBody>
@@ -612,12 +628,18 @@
           <a:p>
             <a:fld id="{F7021451-1387-4CA6-816F-3879F97B5CBC}" type="slidenum">
               <a:rPr lang="en-US"/>
+              <a:t>10</a:t>
             </a:fld>
             <a:endParaRPr lang="en-US"/>
           </a:p>
         </p:txBody>
       </p:sp>
     </p:spTree>
+    <p:extLst>
+      <p:ext uri="{BB962C8B-B14F-4D97-AF65-F5344CB8AC3E}">
+        <p14:creationId xmlns:p14="http://schemas.microsoft.com/office/powerpoint/2010/main" val="1024086991"/>
+      </p:ext>
+    </p:extLst>
   </p:cSld>
   <p:clrMapOvr>
     <a:masterClrMapping/>
@@ -669,6 +691,10 @@
           <a:bodyPr/>
           <a:lstStyle/>
           <a:p>
+            <a:r>
+              <a:rPr lang="en-US" dirty="0"/>
+              <a:t/>
+            </a:r>
             <a:endParaRPr lang="en-US" dirty="0"/>
           </a:p>
         </p:txBody>
@@ -690,12 +716,18 @@
           <a:p>
             <a:fld id="{F7021451-1387-4CA6-816F-3879F97B5CBC}" type="slidenum">
               <a:rPr lang="en-US"/>
+              <a:t>11</a:t>
             </a:fld>
             <a:endParaRPr lang="en-US"/>
           </a:p>
         </p:txBody>
       </p:sp>
     </p:spTree>
+    <p:extLst>
+      <p:ext uri="{BB962C8B-B14F-4D97-AF65-F5344CB8AC3E}">
+        <p14:creationId xmlns:p14="http://schemas.microsoft.com/office/powerpoint/2010/main" val="1024086991"/>
+      </p:ext>
+    </p:extLst>
   </p:cSld>
   <p:clrMapOvr>
     <a:masterClrMapping/>
@@ -747,6 +779,10 @@
           <a:bodyPr/>
           <a:lstStyle/>
           <a:p>
+            <a:r>
+              <a:rPr lang="en-US" dirty="0"/>
+              <a:t/>
+            </a:r>
             <a:endParaRPr lang="en-US" dirty="0"/>
           </a:p>
         </p:txBody>
@@ -768,12 +804,18 @@
           <a:p>
             <a:fld id="{F7021451-1387-4CA6-816F-3879F97B5CBC}" type="slidenum">
               <a:rPr lang="en-US"/>
+              <a:t>12</a:t>
             </a:fld>
             <a:endParaRPr lang="en-US"/>
           </a:p>
         </p:txBody>
       </p:sp>
     </p:spTree>
+    <p:extLst>
+      <p:ext uri="{BB962C8B-B14F-4D97-AF65-F5344CB8AC3E}">
+        <p14:creationId xmlns:p14="http://schemas.microsoft.com/office/powerpoint/2010/main" val="1024086991"/>
+      </p:ext>
+    </p:extLst>
   </p:cSld>
   <p:clrMapOvr>
     <a:masterClrMapping/>
@@ -825,6 +867,10 @@
           <a:bodyPr/>
           <a:lstStyle/>
           <a:p>
+            <a:r>
+              <a:rPr lang="en-US" dirty="0"/>
+              <a:t/>
+            </a:r>
             <a:endParaRPr lang="en-US" dirty="0"/>
           </a:p>
         </p:txBody>
@@ -846,12 +892,18 @@
           <a:p>
             <a:fld id="{F7021451-1387-4CA6-816F-3879F97B5CBC}" type="slidenum">
               <a:rPr lang="en-US"/>
+              <a:t>13</a:t>
             </a:fld>
             <a:endParaRPr lang="en-US"/>
           </a:p>
         </p:txBody>
       </p:sp>
     </p:spTree>
+    <p:extLst>
+      <p:ext uri="{BB962C8B-B14F-4D97-AF65-F5344CB8AC3E}">
+        <p14:creationId xmlns:p14="http://schemas.microsoft.com/office/powerpoint/2010/main" val="1024086991"/>
+      </p:ext>
+    </p:extLst>
   </p:cSld>
   <p:clrMapOvr>
     <a:masterClrMapping/>
@@ -903,6 +955,10 @@
           <a:bodyPr/>
           <a:lstStyle/>
           <a:p>
+            <a:r>
+              <a:rPr lang="en-US" dirty="0"/>
+              <a:t/>
+            </a:r>
             <a:endParaRPr lang="en-US" dirty="0"/>
           </a:p>
         </p:txBody>
@@ -924,12 +980,18 @@
           <a:p>
             <a:fld id="{F7021451-1387-4CA6-816F-3879F97B5CBC}" type="slidenum">
               <a:rPr lang="en-US"/>
+              <a:t>14</a:t>
             </a:fld>
             <a:endParaRPr lang="en-US"/>
           </a:p>
         </p:txBody>
       </p:sp>
     </p:spTree>
+    <p:extLst>
+      <p:ext uri="{BB962C8B-B14F-4D97-AF65-F5344CB8AC3E}">
+        <p14:creationId xmlns:p14="http://schemas.microsoft.com/office/powerpoint/2010/main" val="1024086991"/>
+      </p:ext>
+    </p:extLst>
   </p:cSld>
   <p:clrMapOvr>
     <a:masterClrMapping/>
@@ -981,6 +1043,10 @@
           <a:bodyPr/>
           <a:lstStyle/>
           <a:p>
+            <a:r>
+              <a:rPr lang="en-US" dirty="0"/>
+              <a:t/>
+            </a:r>
             <a:endParaRPr lang="en-US" dirty="0"/>
           </a:p>
         </p:txBody>
@@ -1002,12 +1068,18 @@
           <a:p>
             <a:fld id="{F7021451-1387-4CA6-816F-3879F97B5CBC}" type="slidenum">
               <a:rPr lang="en-US"/>
+              <a:t>15</a:t>
             </a:fld>
             <a:endParaRPr lang="en-US"/>
           </a:p>
         </p:txBody>
       </p:sp>
     </p:spTree>
+    <p:extLst>
+      <p:ext uri="{BB962C8B-B14F-4D97-AF65-F5344CB8AC3E}">
+        <p14:creationId xmlns:p14="http://schemas.microsoft.com/office/powerpoint/2010/main" val="1024086991"/>
+      </p:ext>
+    </p:extLst>
   </p:cSld>
   <p:clrMapOvr>
     <a:masterClrMapping/>
@@ -1059,6 +1131,10 @@
           <a:bodyPr/>
           <a:lstStyle/>
           <a:p>
+            <a:r>
+              <a:rPr lang="en-US" dirty="0"/>
+              <a:t/>
+            </a:r>
             <a:endParaRPr lang="en-US" dirty="0"/>
           </a:p>
         </p:txBody>
@@ -1080,12 +1156,18 @@
           <a:p>
             <a:fld id="{F7021451-1387-4CA6-816F-3879F97B5CBC}" type="slidenum">
               <a:rPr lang="en-US"/>
+              <a:t>16</a:t>
             </a:fld>
             <a:endParaRPr lang="en-US"/>
           </a:p>
         </p:txBody>
       </p:sp>
     </p:spTree>
+    <p:extLst>
+      <p:ext uri="{BB962C8B-B14F-4D97-AF65-F5344CB8AC3E}">
+        <p14:creationId xmlns:p14="http://schemas.microsoft.com/office/powerpoint/2010/main" val="1024086991"/>
+      </p:ext>
+    </p:extLst>
   </p:cSld>
   <p:clrMapOvr>
     <a:masterClrMapping/>
@@ -1137,6 +1219,10 @@
           <a:bodyPr/>
           <a:lstStyle/>
           <a:p>
+            <a:r>
+              <a:rPr lang="en-US" dirty="0"/>
+              <a:t/>
+            </a:r>
             <a:endParaRPr lang="en-US" dirty="0"/>
           </a:p>
         </p:txBody>
@@ -1158,12 +1244,18 @@
           <a:p>
             <a:fld id="{F7021451-1387-4CA6-816F-3879F97B5CBC}" type="slidenum">
               <a:rPr lang="en-US"/>
+              <a:t>2</a:t>
             </a:fld>
             <a:endParaRPr lang="en-US"/>
           </a:p>
         </p:txBody>
       </p:sp>
     </p:spTree>
+    <p:extLst>
+      <p:ext uri="{BB962C8B-B14F-4D97-AF65-F5344CB8AC3E}">
+        <p14:creationId xmlns:p14="http://schemas.microsoft.com/office/powerpoint/2010/main" val="1024086991"/>
+      </p:ext>
+    </p:extLst>
   </p:cSld>
   <p:clrMapOvr>
     <a:masterClrMapping/>
@@ -1215,6 +1307,10 @@
           <a:bodyPr/>
           <a:lstStyle/>
           <a:p>
+            <a:r>
+              <a:rPr lang="en-US" dirty="0"/>
+              <a:t/>
+            </a:r>
             <a:endParaRPr lang="en-US" dirty="0"/>
           </a:p>
         </p:txBody>
@@ -1236,12 +1332,18 @@
           <a:p>
             <a:fld id="{F7021451-1387-4CA6-816F-3879F97B5CBC}" type="slidenum">
               <a:rPr lang="en-US"/>
+              <a:t>3</a:t>
             </a:fld>
             <a:endParaRPr lang="en-US"/>
           </a:p>
         </p:txBody>
       </p:sp>
     </p:spTree>
+    <p:extLst>
+      <p:ext uri="{BB962C8B-B14F-4D97-AF65-F5344CB8AC3E}">
+        <p14:creationId xmlns:p14="http://schemas.microsoft.com/office/powerpoint/2010/main" val="1024086991"/>
+      </p:ext>
+    </p:extLst>
   </p:cSld>
   <p:clrMapOvr>
     <a:masterClrMapping/>
@@ -1293,6 +1395,10 @@
           <a:bodyPr/>
           <a:lstStyle/>
           <a:p>
+            <a:r>
+              <a:rPr lang="en-US" dirty="0"/>
+              <a:t/>
+            </a:r>
             <a:endParaRPr lang="en-US" dirty="0"/>
           </a:p>
         </p:txBody>
@@ -1314,12 +1420,18 @@
           <a:p>
             <a:fld id="{F7021451-1387-4CA6-816F-3879F97B5CBC}" type="slidenum">
               <a:rPr lang="en-US"/>
+              <a:t>4</a:t>
             </a:fld>
             <a:endParaRPr lang="en-US"/>
           </a:p>
         </p:txBody>
       </p:sp>
     </p:spTree>
+    <p:extLst>
+      <p:ext uri="{BB962C8B-B14F-4D97-AF65-F5344CB8AC3E}">
+        <p14:creationId xmlns:p14="http://schemas.microsoft.com/office/powerpoint/2010/main" val="1024086991"/>
+      </p:ext>
+    </p:extLst>
   </p:cSld>
   <p:clrMapOvr>
     <a:masterClrMapping/>
@@ -1371,6 +1483,10 @@
           <a:bodyPr/>
           <a:lstStyle/>
           <a:p>
+            <a:r>
+              <a:rPr lang="en-US" dirty="0"/>
+              <a:t/>
+            </a:r>
             <a:endParaRPr lang="en-US" dirty="0"/>
           </a:p>
         </p:txBody>
@@ -1392,12 +1508,18 @@
           <a:p>
             <a:fld id="{F7021451-1387-4CA6-816F-3879F97B5CBC}" type="slidenum">
               <a:rPr lang="en-US"/>
+              <a:t>5</a:t>
             </a:fld>
             <a:endParaRPr lang="en-US"/>
           </a:p>
         </p:txBody>
       </p:sp>
     </p:spTree>
+    <p:extLst>
+      <p:ext uri="{BB962C8B-B14F-4D97-AF65-F5344CB8AC3E}">
+        <p14:creationId xmlns:p14="http://schemas.microsoft.com/office/powerpoint/2010/main" val="1024086991"/>
+      </p:ext>
+    </p:extLst>
   </p:cSld>
   <p:clrMapOvr>
     <a:masterClrMapping/>
@@ -1449,6 +1571,10 @@
           <a:bodyPr/>
           <a:lstStyle/>
           <a:p>
+            <a:r>
+              <a:rPr lang="en-US" dirty="0"/>
+              <a:t/>
+            </a:r>
             <a:endParaRPr lang="en-US" dirty="0"/>
           </a:p>
         </p:txBody>
@@ -1470,12 +1596,18 @@
           <a:p>
             <a:fld id="{F7021451-1387-4CA6-816F-3879F97B5CBC}" type="slidenum">
               <a:rPr lang="en-US"/>
+              <a:t>6</a:t>
             </a:fld>
             <a:endParaRPr lang="en-US"/>
           </a:p>
         </p:txBody>
       </p:sp>
     </p:spTree>
+    <p:extLst>
+      <p:ext uri="{BB962C8B-B14F-4D97-AF65-F5344CB8AC3E}">
+        <p14:creationId xmlns:p14="http://schemas.microsoft.com/office/powerpoint/2010/main" val="1024086991"/>
+      </p:ext>
+    </p:extLst>
   </p:cSld>
   <p:clrMapOvr>
     <a:masterClrMapping/>
@@ -1527,6 +1659,10 @@
           <a:bodyPr/>
           <a:lstStyle/>
           <a:p>
+            <a:r>
+              <a:rPr lang="en-US" dirty="0"/>
+              <a:t/>
+            </a:r>
             <a:endParaRPr lang="en-US" dirty="0"/>
           </a:p>
         </p:txBody>
@@ -1548,12 +1684,18 @@
           <a:p>
             <a:fld id="{F7021451-1387-4CA6-816F-3879F97B5CBC}" type="slidenum">
               <a:rPr lang="en-US"/>
+              <a:t>7</a:t>
             </a:fld>
             <a:endParaRPr lang="en-US"/>
           </a:p>
         </p:txBody>
       </p:sp>
     </p:spTree>
+    <p:extLst>
+      <p:ext uri="{BB962C8B-B14F-4D97-AF65-F5344CB8AC3E}">
+        <p14:creationId xmlns:p14="http://schemas.microsoft.com/office/powerpoint/2010/main" val="1024086991"/>
+      </p:ext>
+    </p:extLst>
   </p:cSld>
   <p:clrMapOvr>
     <a:masterClrMapping/>
@@ -1605,6 +1747,10 @@
           <a:bodyPr/>
           <a:lstStyle/>
           <a:p>
+            <a:r>
+              <a:rPr lang="en-US" dirty="0"/>
+              <a:t/>
+            </a:r>
             <a:endParaRPr lang="en-US" dirty="0"/>
           </a:p>
         </p:txBody>
@@ -1626,12 +1772,18 @@
           <a:p>
             <a:fld id="{F7021451-1387-4CA6-816F-3879F97B5CBC}" type="slidenum">
               <a:rPr lang="en-US"/>
+              <a:t>8</a:t>
             </a:fld>
             <a:endParaRPr lang="en-US"/>
           </a:p>
         </p:txBody>
       </p:sp>
     </p:spTree>
+    <p:extLst>
+      <p:ext uri="{BB962C8B-B14F-4D97-AF65-F5344CB8AC3E}">
+        <p14:creationId xmlns:p14="http://schemas.microsoft.com/office/powerpoint/2010/main" val="1024086991"/>
+      </p:ext>
+    </p:extLst>
   </p:cSld>
   <p:clrMapOvr>
     <a:masterClrMapping/>
@@ -1683,6 +1835,10 @@
           <a:bodyPr/>
           <a:lstStyle/>
           <a:p>
+            <a:r>
+              <a:rPr lang="en-US" dirty="0"/>
+              <a:t/>
+            </a:r>
             <a:endParaRPr lang="en-US" dirty="0"/>
           </a:p>
         </p:txBody>
@@ -1704,12 +1860,18 @@
           <a:p>
             <a:fld id="{F7021451-1387-4CA6-816F-3879F97B5CBC}" type="slidenum">
               <a:rPr lang="en-US"/>
+              <a:t>9</a:t>
             </a:fld>
             <a:endParaRPr lang="en-US"/>
           </a:p>
         </p:txBody>
       </p:sp>
     </p:spTree>
+    <p:extLst>
+      <p:ext uri="{BB962C8B-B14F-4D97-AF65-F5344CB8AC3E}">
+        <p14:creationId xmlns:p14="http://schemas.microsoft.com/office/powerpoint/2010/main" val="1024086991"/>
+      </p:ext>
+    </p:extLst>
   </p:cSld>
   <p:clrMapOvr>
     <a:masterClrMapping/>
@@ -1750,11 +1912,6 @@
 <file path=ppt/slideMasters/slideMaster1.xml><?xml version="1.0" encoding="utf-8"?>
 <p:sldMaster xmlns:a="http://schemas.openxmlformats.org/drawingml/2006/main" xmlns:r="http://schemas.openxmlformats.org/officeDocument/2006/relationships" xmlns:p="http://schemas.openxmlformats.org/presentationml/2006/main">
   <p:cSld>
-    <p:bg>
-      <p:bgRef idx="1001">
-        <a:schemeClr val="bg1"/>
-      </p:bgRef>
-    </p:bg>
     <p:spTree>
       <p:nvGrpSpPr>
         <p:cNvPr id="1" name=""/>
@@ -1798,7 +1955,7 @@
         <a:spcBef>
           <a:spcPct val="20000"/>
         </a:spcBef>
-        <a:buFont typeface="Arial" panose="020B0604020202020204" pitchFamily="34" charset="0"/>
+        <a:buFont typeface="Arial" pitchFamily="34" charset="0"/>
         <a:buChar char="•"/>
         <a:defRPr sz="3200" kern="1200">
           <a:solidFill>
@@ -1813,7 +1970,7 @@
         <a:spcBef>
           <a:spcPct val="20000"/>
         </a:spcBef>
-        <a:buFont typeface="Arial" panose="020B0604020202020204" pitchFamily="34" charset="0"/>
+        <a:buFont typeface="Arial" pitchFamily="34" charset="0"/>
         <a:buChar char="–"/>
         <a:defRPr sz="2800" kern="1200">
           <a:solidFill>
@@ -1828,7 +1985,7 @@
         <a:spcBef>
           <a:spcPct val="20000"/>
         </a:spcBef>
-        <a:buFont typeface="Arial" panose="020B0604020202020204" pitchFamily="34" charset="0"/>
+        <a:buFont typeface="Arial" pitchFamily="34" charset="0"/>
         <a:buChar char="•"/>
         <a:defRPr sz="2400" kern="1200">
           <a:solidFill>
@@ -1843,7 +2000,7 @@
         <a:spcBef>
           <a:spcPct val="20000"/>
         </a:spcBef>
-        <a:buFont typeface="Arial" panose="020B0604020202020204" pitchFamily="34" charset="0"/>
+        <a:buFont typeface="Arial" pitchFamily="34" charset="0"/>
         <a:buChar char="–"/>
         <a:defRPr sz="2000" kern="1200">
           <a:solidFill>
@@ -1858,7 +2015,7 @@
         <a:spcBef>
           <a:spcPct val="20000"/>
         </a:spcBef>
-        <a:buFont typeface="Arial" panose="020B0604020202020204" pitchFamily="34" charset="0"/>
+        <a:buFont typeface="Arial" pitchFamily="34" charset="0"/>
         <a:buChar char="»"/>
         <a:defRPr sz="2000" kern="1200">
           <a:solidFill>
@@ -1873,7 +2030,7 @@
         <a:spcBef>
           <a:spcPct val="20000"/>
         </a:spcBef>
-        <a:buFont typeface="Arial" panose="020B0604020202020204" pitchFamily="34" charset="0"/>
+        <a:buFont typeface="Arial" pitchFamily="34" charset="0"/>
         <a:buChar char="•"/>
         <a:defRPr sz="2000" kern="1200">
           <a:solidFill>
@@ -1888,7 +2045,7 @@
         <a:spcBef>
           <a:spcPct val="20000"/>
         </a:spcBef>
-        <a:buFont typeface="Arial" panose="020B0604020202020204" pitchFamily="34" charset="0"/>
+        <a:buFont typeface="Arial" pitchFamily="34" charset="0"/>
         <a:buChar char="•"/>
         <a:defRPr sz="2000" kern="1200">
           <a:solidFill>
@@ -1903,7 +2060,7 @@
         <a:spcBef>
           <a:spcPct val="20000"/>
         </a:spcBef>
-        <a:buFont typeface="Arial" panose="020B0604020202020204" pitchFamily="34" charset="0"/>
+        <a:buFont typeface="Arial" pitchFamily="34" charset="0"/>
         <a:buChar char="•"/>
         <a:defRPr sz="2000" kern="1200">
           <a:solidFill>
@@ -1918,7 +2075,7 @@
         <a:spcBef>
           <a:spcPct val="20000"/>
         </a:spcBef>
-        <a:buFont typeface="Arial" panose="020B0604020202020204" pitchFamily="34" charset="0"/>
+        <a:buFont typeface="Arial" pitchFamily="34" charset="0"/>
         <a:buChar char="•"/>
         <a:defRPr sz="2000" kern="1200">
           <a:solidFill>
@@ -2031,7 +2188,7 @@
 
 <file path=ppt/slides/slide1.xml><?xml version="1.0" encoding="utf-8"?>
 <p:sld xmlns:a="http://schemas.openxmlformats.org/drawingml/2006/main" xmlns:r="http://schemas.openxmlformats.org/officeDocument/2006/relationships" xmlns:p="http://schemas.openxmlformats.org/presentationml/2006/main">
-  <p:cSld>
+  <p:cSld name="Slide 1">
     <p:bg>
       <p:bgPr>
         <a:blipFill dpi="0" rotWithShape="1">
@@ -2075,12 +2232,13 @@
             <a:avLst/>
           </a:prstGeom>
           <a:noFill/>
+          <a:ln/>
         </p:spPr>
         <p:txBody>
           <a:bodyPr wrap="square" rtlCol="0" anchor="ctr"/>
           <a:lstStyle/>
           <a:p>
-            <a:pPr marL="0" indent="0" algn="r">
+            <a:pPr algn="r" indent="0" marL="0">
               <a:buNone/>
             </a:pPr>
             <a:r>
@@ -2088,9 +2246,9 @@
                 <a:solidFill>
                   <a:srgbClr val="8A9099"/>
                 </a:solidFill>
-                <a:latin typeface="微软雅黑" panose="020B0503020204020204" pitchFamily="34" charset="-122"/>
-                <a:ea typeface="微软雅黑" panose="020B0503020204020204" pitchFamily="34" charset="-122"/>
-                <a:cs typeface="微软雅黑" panose="020B0503020204020204" pitchFamily="34" charset="-120"/>
+                <a:latin typeface="微软雅黑" pitchFamily="34" charset="0"/>
+                <a:ea typeface="微软雅黑" pitchFamily="34" charset="-122"/>
+                <a:cs typeface="微软雅黑" pitchFamily="34" charset="-120"/>
               </a:rPr>
               <a:t>1 / 16</a:t>
             </a:r>
@@ -2113,12 +2271,13 @@
             <a:avLst/>
           </a:prstGeom>
           <a:noFill/>
+          <a:ln/>
         </p:spPr>
         <p:txBody>
           <a:bodyPr wrap="square" rtlCol="0" anchor="ctr"/>
           <a:lstStyle/>
           <a:p>
-            <a:pPr marL="0" indent="0" algn="ctr">
+            <a:pPr algn="ctr" indent="0" marL="0">
               <a:buNone/>
             </a:pPr>
             <a:r>
@@ -2126,9 +2285,9 @@
                 <a:solidFill>
                   <a:srgbClr val="1F4E9C"/>
                 </a:solidFill>
-                <a:latin typeface="微软雅黑" panose="020B0503020204020204" pitchFamily="34" charset="-122"/>
-                <a:ea typeface="微软雅黑" panose="020B0503020204020204" pitchFamily="34" charset="-122"/>
-                <a:cs typeface="微软雅黑" panose="020B0503020204020204" pitchFamily="34" charset="-120"/>
+                <a:latin typeface="微软雅黑" pitchFamily="34" charset="0"/>
+                <a:ea typeface="微软雅黑" pitchFamily="34" charset="-122"/>
+                <a:cs typeface="微软雅黑" pitchFamily="34" charset="-120"/>
               </a:rPr>
               <a:t>重邮802 数据结构代码课程</a:t>
             </a:r>
@@ -2151,12 +2310,13 @@
             <a:avLst/>
           </a:prstGeom>
           <a:noFill/>
+          <a:ln/>
         </p:spPr>
         <p:txBody>
           <a:bodyPr wrap="square" rtlCol="0" anchor="ctr"/>
           <a:lstStyle/>
           <a:p>
-            <a:pPr marL="0" indent="0" algn="ctr">
+            <a:pPr algn="ctr" indent="0" marL="0">
               <a:buNone/>
             </a:pPr>
             <a:r>
@@ -2164,9 +2324,9 @@
                 <a:solidFill>
                   <a:srgbClr val="1F2329"/>
                 </a:solidFill>
-                <a:latin typeface="微软雅黑" panose="020B0503020204020204" pitchFamily="34" charset="-122"/>
-                <a:ea typeface="微软雅黑" panose="020B0503020204020204" pitchFamily="34" charset="-122"/>
-                <a:cs typeface="微软雅黑" panose="020B0503020204020204" pitchFamily="34" charset="-120"/>
+                <a:latin typeface="微软雅黑" pitchFamily="34" charset="0"/>
+                <a:ea typeface="微软雅黑" pitchFamily="34" charset="-122"/>
+                <a:cs typeface="微软雅黑" pitchFamily="34" charset="-120"/>
               </a:rPr>
               <a:t>C语言基础阶段</a:t>
             </a:r>
@@ -2189,12 +2349,13 @@
             <a:avLst/>
           </a:prstGeom>
           <a:noFill/>
+          <a:ln/>
         </p:spPr>
         <p:txBody>
           <a:bodyPr wrap="square" rtlCol="0" anchor="ctr"/>
           <a:lstStyle/>
           <a:p>
-            <a:pPr marL="0" indent="0" algn="ctr">
+            <a:pPr algn="ctr" indent="0" marL="0">
               <a:buNone/>
             </a:pPr>
             <a:r>
@@ -2202,9 +2363,9 @@
                 <a:solidFill>
                   <a:srgbClr val="1F2329"/>
                 </a:solidFill>
-                <a:latin typeface="微软雅黑" panose="020B0503020204020204" pitchFamily="34" charset="-122"/>
-                <a:ea typeface="微软雅黑" panose="020B0503020204020204" pitchFamily="34" charset="-122"/>
-                <a:cs typeface="微软雅黑" panose="020B0503020204020204" pitchFamily="34" charset="-120"/>
+                <a:latin typeface="微软雅黑" pitchFamily="34" charset="0"/>
+                <a:ea typeface="微软雅黑" pitchFamily="34" charset="-122"/>
+                <a:cs typeface="微软雅黑" pitchFamily="34" charset="-120"/>
               </a:rPr>
               <a:t>第4节 分支与循环</a:t>
             </a:r>
@@ -2227,12 +2388,13 @@
             <a:avLst/>
           </a:prstGeom>
           <a:noFill/>
+          <a:ln/>
         </p:spPr>
         <p:txBody>
           <a:bodyPr wrap="square" rtlCol="0" anchor="ctr"/>
           <a:lstStyle/>
           <a:p>
-            <a:pPr marL="0" indent="0" algn="ctr">
+            <a:pPr algn="ctr" indent="0" marL="0">
               <a:buNone/>
             </a:pPr>
             <a:r>
@@ -2240,9 +2402,9 @@
                 <a:solidFill>
                   <a:srgbClr val="8A9099"/>
                 </a:solidFill>
-                <a:latin typeface="微软雅黑" panose="020B0503020204020204" pitchFamily="34" charset="-122"/>
-                <a:ea typeface="微软雅黑" panose="020B0503020204020204" pitchFamily="34" charset="-122"/>
-                <a:cs typeface="微软雅黑" panose="020B0503020204020204" pitchFamily="34" charset="-120"/>
+                <a:latin typeface="微软雅黑" pitchFamily="34" charset="0"/>
+                <a:ea typeface="微软雅黑" pitchFamily="34" charset="-122"/>
+                <a:cs typeface="微软雅黑" pitchFamily="34" charset="-120"/>
               </a:rPr>
               <a:t>阶段：基础 ｜ 主讲：牙膏学长 ｜ 预计40分钟 ｜ 资料答疑：伴梦研途QQ群</a:t>
             </a:r>
@@ -2260,7 +2422,7 @@
 
 <file path=ppt/slides/slide10.xml><?xml version="1.0" encoding="utf-8"?>
 <p:sld xmlns:a="http://schemas.openxmlformats.org/drawingml/2006/main" xmlns:r="http://schemas.openxmlformats.org/officeDocument/2006/relationships" xmlns:p="http://schemas.openxmlformats.org/presentationml/2006/main">
-  <p:cSld>
+  <p:cSld name="Slide 10">
     <p:bg>
       <p:bgPr>
         <a:blipFill dpi="0" rotWithShape="1">
@@ -2304,12 +2466,13 @@
             <a:avLst/>
           </a:prstGeom>
           <a:noFill/>
+          <a:ln/>
         </p:spPr>
         <p:txBody>
           <a:bodyPr wrap="square" rtlCol="0" anchor="ctr"/>
           <a:lstStyle/>
           <a:p>
-            <a:pPr marL="0" indent="0" algn="r">
+            <a:pPr algn="r" indent="0" marL="0">
               <a:buNone/>
             </a:pPr>
             <a:r>
@@ -2317,9 +2480,9 @@
                 <a:solidFill>
                   <a:srgbClr val="8A9099"/>
                 </a:solidFill>
-                <a:latin typeface="微软雅黑" panose="020B0503020204020204" pitchFamily="34" charset="-122"/>
-                <a:ea typeface="微软雅黑" panose="020B0503020204020204" pitchFamily="34" charset="-122"/>
-                <a:cs typeface="微软雅黑" panose="020B0503020204020204" pitchFamily="34" charset="-120"/>
+                <a:latin typeface="微软雅黑" pitchFamily="34" charset="0"/>
+                <a:ea typeface="微软雅黑" pitchFamily="34" charset="-122"/>
+                <a:cs typeface="微软雅黑" pitchFamily="34" charset="-120"/>
               </a:rPr>
               <a:t>10 / 16</a:t>
             </a:r>
@@ -2342,12 +2505,13 @@
             <a:avLst/>
           </a:prstGeom>
           <a:noFill/>
+          <a:ln/>
         </p:spPr>
         <p:txBody>
           <a:bodyPr wrap="square" rtlCol="0" anchor="ctr"/>
           <a:lstStyle/>
           <a:p>
-            <a:pPr marL="0" indent="0" algn="l">
+            <a:pPr algn="l" indent="0" marL="0">
               <a:buNone/>
             </a:pPr>
             <a:r>
@@ -2355,9 +2519,9 @@
                 <a:solidFill>
                   <a:srgbClr val="1F4E9C"/>
                 </a:solidFill>
-                <a:latin typeface="微软雅黑" panose="020B0503020204020204" pitchFamily="34" charset="-122"/>
-                <a:ea typeface="微软雅黑" panose="020B0503020204020204" pitchFamily="34" charset="-122"/>
-                <a:cs typeface="微软雅黑" panose="020B0503020204020204" pitchFamily="34" charset="-120"/>
+                <a:latin typeface="微软雅黑" pitchFamily="34" charset="0"/>
+                <a:ea typeface="微软雅黑" pitchFamily="34" charset="-122"/>
+                <a:cs typeface="微软雅黑" pitchFamily="34" charset="-120"/>
               </a:rPr>
               <a:t>循环：for</a:t>
             </a:r>
@@ -2380,12 +2544,13 @@
             <a:avLst/>
           </a:prstGeom>
           <a:noFill/>
+          <a:ln/>
         </p:spPr>
         <p:txBody>
           <a:bodyPr wrap="square" rtlCol="0" anchor="ctr"/>
           <a:lstStyle/>
           <a:p>
-            <a:pPr marL="0" indent="0" algn="l">
+            <a:pPr algn="l" indent="0" marL="0">
               <a:buNone/>
             </a:pPr>
             <a:r>
@@ -2393,9 +2558,9 @@
                 <a:solidFill>
                   <a:srgbClr val="1F2329"/>
                 </a:solidFill>
-                <a:latin typeface="微软雅黑" panose="020B0503020204020204" pitchFamily="34" charset="-122"/>
-                <a:ea typeface="微软雅黑" panose="020B0503020204020204" pitchFamily="34" charset="-122"/>
-                <a:cs typeface="微软雅黑" panose="020B0503020204020204" pitchFamily="34" charset="-120"/>
+                <a:latin typeface="微软雅黑" pitchFamily="34" charset="0"/>
+                <a:ea typeface="微软雅黑" pitchFamily="34" charset="-122"/>
+                <a:cs typeface="微软雅黑" pitchFamily="34" charset="-120"/>
               </a:rPr>
               <a:t>for：三要素写在一行</a:t>
             </a:r>
@@ -2443,12 +2608,13 @@
             <a:avLst/>
           </a:prstGeom>
           <a:noFill/>
+          <a:ln/>
         </p:spPr>
         <p:txBody>
           <a:bodyPr wrap="square" rtlCol="0" anchor="t"/>
           <a:lstStyle/>
           <a:p>
-            <a:pPr marL="0" indent="0" algn="l">
+            <a:pPr algn="l" indent="0" marL="0">
               <a:lnSpc>
                 <a:spcPct val="125000"/>
               </a:lnSpc>
@@ -2459,9 +2625,9 @@
                 <a:solidFill>
                   <a:srgbClr val="1F2329"/>
                 </a:solidFill>
-                <a:latin typeface="Consolas" panose="020B0609020204030204" pitchFamily="34" charset="0"/>
-                <a:ea typeface="Consolas" panose="020B0609020204030204" pitchFamily="34" charset="-122"/>
-                <a:cs typeface="Consolas" panose="020B0609020204030204" pitchFamily="34" charset="-120"/>
+                <a:latin typeface="Consolas" pitchFamily="34" charset="0"/>
+                <a:ea typeface="Consolas" pitchFamily="34" charset="-122"/>
+                <a:cs typeface="Consolas" pitchFamily="34" charset="-120"/>
               </a:rPr>
               <a:t>for(int i = 1; i &lt;= 100; i++){
     printf("%d ", i);
@@ -2487,12 +2653,13 @@
             <a:avLst/>
           </a:prstGeom>
           <a:noFill/>
+          <a:ln/>
         </p:spPr>
         <p:txBody>
           <a:bodyPr wrap="square" rtlCol="0" anchor="t"/>
           <a:lstStyle/>
           <a:p>
-            <a:pPr marL="0" indent="0" algn="l">
+            <a:pPr algn="l" indent="0" marL="0">
               <a:lnSpc>
                 <a:spcPct val="115000"/>
               </a:lnSpc>
@@ -2503,12 +2670,18 @@
                 <a:solidFill>
                   <a:srgbClr val="1F4E9C"/>
                 </a:solidFill>
-                <a:latin typeface="微软雅黑" panose="020B0503020204020204" pitchFamily="34" charset="-122"/>
-                <a:ea typeface="微软雅黑" panose="020B0503020204020204" pitchFamily="34" charset="-122"/>
-                <a:cs typeface="微软雅黑" panose="020B0503020204020204" pitchFamily="34" charset="-120"/>
+                <a:latin typeface="微软雅黑" pitchFamily="34" charset="0"/>
+                <a:ea typeface="微软雅黑" pitchFamily="34" charset="-122"/>
+                <a:cs typeface="微软雅黑" pitchFamily="34" charset="-120"/>
               </a:rPr>
               <a:t>•  </a:t>
             </a:r>
+            <a:pPr algn="l" indent="0" marL="0">
+              <a:lnSpc>
+                <a:spcPct val="115000"/>
+              </a:lnSpc>
+              <a:buNone/>
+            </a:pPr>
             <a:r>
               <a:rPr lang="en-US" sz="1800" dirty="0">
                 <a:solidFill>
@@ -2517,6 +2690,12 @@
               </a:rPr>
               <a:t>for把</a:t>
             </a:r>
+            <a:pPr algn="l" indent="0" marL="0">
+              <a:lnSpc>
+                <a:spcPct val="115000"/>
+              </a:lnSpc>
+              <a:buNone/>
+            </a:pPr>
             <a:r>
               <a:rPr lang="en-US" sz="1800" b="1" dirty="0">
                 <a:solidFill>
@@ -2525,6 +2704,12 @@
               </a:rPr>
               <a:t>初始化、条件、更新</a:t>
             </a:r>
+            <a:pPr algn="l" indent="0" marL="0">
+              <a:lnSpc>
+                <a:spcPct val="115000"/>
+              </a:lnSpc>
+              <a:buNone/>
+            </a:pPr>
             <a:r>
               <a:rPr lang="en-US" sz="1800" dirty="0">
                 <a:solidFill>
@@ -2552,12 +2737,13 @@
             <a:avLst/>
           </a:prstGeom>
           <a:noFill/>
+          <a:ln/>
         </p:spPr>
         <p:txBody>
           <a:bodyPr wrap="square" rtlCol="0" anchor="t"/>
           <a:lstStyle/>
           <a:p>
-            <a:pPr marL="0" indent="0" algn="l">
+            <a:pPr algn="l" indent="0" marL="0">
               <a:lnSpc>
                 <a:spcPct val="115000"/>
               </a:lnSpc>
@@ -2568,12 +2754,18 @@
                 <a:solidFill>
                   <a:srgbClr val="1F4E9C"/>
                 </a:solidFill>
-                <a:latin typeface="微软雅黑" panose="020B0503020204020204" pitchFamily="34" charset="-122"/>
-                <a:ea typeface="微软雅黑" panose="020B0503020204020204" pitchFamily="34" charset="-122"/>
-                <a:cs typeface="微软雅黑" panose="020B0503020204020204" pitchFamily="34" charset="-120"/>
+                <a:latin typeface="微软雅黑" pitchFamily="34" charset="0"/>
+                <a:ea typeface="微软雅黑" pitchFamily="34" charset="-122"/>
+                <a:cs typeface="微软雅黑" pitchFamily="34" charset="-120"/>
               </a:rPr>
               <a:t>•  </a:t>
             </a:r>
+            <a:pPr algn="l" indent="0" marL="0">
+              <a:lnSpc>
+                <a:spcPct val="115000"/>
+              </a:lnSpc>
+              <a:buNone/>
+            </a:pPr>
             <a:r>
               <a:rPr lang="en-US" sz="1800" dirty="0">
                 <a:solidFill>
@@ -2601,12 +2793,13 @@
             <a:avLst/>
           </a:prstGeom>
           <a:noFill/>
+          <a:ln/>
         </p:spPr>
         <p:txBody>
           <a:bodyPr wrap="square" rtlCol="0" anchor="t"/>
           <a:lstStyle/>
           <a:p>
-            <a:pPr marL="0" indent="0" algn="l">
+            <a:pPr algn="l" indent="0" marL="0">
               <a:lnSpc>
                 <a:spcPct val="115000"/>
               </a:lnSpc>
@@ -2617,12 +2810,18 @@
                 <a:solidFill>
                   <a:srgbClr val="1F4E9C"/>
                 </a:solidFill>
-                <a:latin typeface="微软雅黑" panose="020B0503020204020204" pitchFamily="34" charset="-122"/>
-                <a:ea typeface="微软雅黑" panose="020B0503020204020204" pitchFamily="34" charset="-122"/>
-                <a:cs typeface="微软雅黑" panose="020B0503020204020204" pitchFamily="34" charset="-120"/>
+                <a:latin typeface="微软雅黑" pitchFamily="34" charset="0"/>
+                <a:ea typeface="微软雅黑" pitchFamily="34" charset="-122"/>
+                <a:cs typeface="微软雅黑" pitchFamily="34" charset="-120"/>
               </a:rPr>
               <a:t>•  </a:t>
             </a:r>
+            <a:pPr algn="l" indent="0" marL="0">
+              <a:lnSpc>
+                <a:spcPct val="115000"/>
+              </a:lnSpc>
+              <a:buNone/>
+            </a:pPr>
             <a:r>
               <a:rPr lang="en-US" sz="1800" dirty="0">
                 <a:solidFill>
@@ -2645,7 +2844,7 @@
 
 <file path=ppt/slides/slide11.xml><?xml version="1.0" encoding="utf-8"?>
 <p:sld xmlns:a="http://schemas.openxmlformats.org/drawingml/2006/main" xmlns:r="http://schemas.openxmlformats.org/officeDocument/2006/relationships" xmlns:p="http://schemas.openxmlformats.org/presentationml/2006/main">
-  <p:cSld>
+  <p:cSld name="Slide 11">
     <p:bg>
       <p:bgPr>
         <a:blipFill dpi="0" rotWithShape="1">
@@ -2689,12 +2888,13 @@
             <a:avLst/>
           </a:prstGeom>
           <a:noFill/>
+          <a:ln/>
         </p:spPr>
         <p:txBody>
           <a:bodyPr wrap="square" rtlCol="0" anchor="ctr"/>
           <a:lstStyle/>
           <a:p>
-            <a:pPr marL="0" indent="0" algn="r">
+            <a:pPr algn="r" indent="0" marL="0">
               <a:buNone/>
             </a:pPr>
             <a:r>
@@ -2702,9 +2902,9 @@
                 <a:solidFill>
                   <a:srgbClr val="8A9099"/>
                 </a:solidFill>
-                <a:latin typeface="微软雅黑" panose="020B0503020204020204" pitchFamily="34" charset="-122"/>
-                <a:ea typeface="微软雅黑" panose="020B0503020204020204" pitchFamily="34" charset="-122"/>
-                <a:cs typeface="微软雅黑" panose="020B0503020204020204" pitchFamily="34" charset="-120"/>
+                <a:latin typeface="微软雅黑" pitchFamily="34" charset="0"/>
+                <a:ea typeface="微软雅黑" pitchFamily="34" charset="-122"/>
+                <a:cs typeface="微软雅黑" pitchFamily="34" charset="-120"/>
               </a:rPr>
               <a:t>11 / 16</a:t>
             </a:r>
@@ -2727,12 +2927,13 @@
             <a:avLst/>
           </a:prstGeom>
           <a:noFill/>
+          <a:ln/>
         </p:spPr>
         <p:txBody>
           <a:bodyPr wrap="square" rtlCol="0" anchor="ctr"/>
           <a:lstStyle/>
           <a:p>
-            <a:pPr marL="0" indent="0" algn="l">
+            <a:pPr algn="l" indent="0" marL="0">
               <a:buNone/>
             </a:pPr>
             <a:r>
@@ -2740,9 +2941,9 @@
                 <a:solidFill>
                   <a:srgbClr val="1F4E9C"/>
                 </a:solidFill>
-                <a:latin typeface="微软雅黑" panose="020B0503020204020204" pitchFamily="34" charset="-122"/>
-                <a:ea typeface="微软雅黑" panose="020B0503020204020204" pitchFamily="34" charset="-122"/>
-                <a:cs typeface="微软雅黑" panose="020B0503020204020204" pitchFamily="34" charset="-120"/>
+                <a:latin typeface="微软雅黑" pitchFamily="34" charset="0"/>
+                <a:ea typeface="微软雅黑" pitchFamily="34" charset="-122"/>
+                <a:cs typeface="微软雅黑" pitchFamily="34" charset="-120"/>
               </a:rPr>
               <a:t>循环控制</a:t>
             </a:r>
@@ -2765,12 +2966,13 @@
             <a:avLst/>
           </a:prstGeom>
           <a:noFill/>
+          <a:ln/>
         </p:spPr>
         <p:txBody>
           <a:bodyPr wrap="square" rtlCol="0" anchor="ctr"/>
           <a:lstStyle/>
           <a:p>
-            <a:pPr marL="0" indent="0" algn="l">
+            <a:pPr algn="l" indent="0" marL="0">
               <a:buNone/>
             </a:pPr>
             <a:r>
@@ -2778,9 +2980,9 @@
                 <a:solidFill>
                   <a:srgbClr val="1F2329"/>
                 </a:solidFill>
-                <a:latin typeface="微软雅黑" panose="020B0503020204020204" pitchFamily="34" charset="-122"/>
-                <a:ea typeface="微软雅黑" panose="020B0503020204020204" pitchFamily="34" charset="-122"/>
-                <a:cs typeface="微软雅黑" panose="020B0503020204020204" pitchFamily="34" charset="-120"/>
+                <a:latin typeface="微软雅黑" pitchFamily="34" charset="0"/>
+                <a:ea typeface="微软雅黑" pitchFamily="34" charset="-122"/>
+                <a:cs typeface="微软雅黑" pitchFamily="34" charset="-120"/>
               </a:rPr>
               <a:t>break 与 continue</a:t>
             </a:r>
@@ -2828,12 +3030,13 @@
             <a:avLst/>
           </a:prstGeom>
           <a:noFill/>
+          <a:ln/>
         </p:spPr>
         <p:txBody>
           <a:bodyPr wrap="square" rtlCol="0" anchor="t"/>
           <a:lstStyle/>
           <a:p>
-            <a:pPr marL="0" indent="0" algn="l">
+            <a:pPr algn="l" indent="0" marL="0">
               <a:lnSpc>
                 <a:spcPct val="125000"/>
               </a:lnSpc>
@@ -2844,9 +3047,9 @@
                 <a:solidFill>
                   <a:srgbClr val="1F2329"/>
                 </a:solidFill>
-                <a:latin typeface="Consolas" panose="020B0609020204030204" pitchFamily="34" charset="0"/>
-                <a:ea typeface="Consolas" panose="020B0609020204030204" pitchFamily="34" charset="-122"/>
-                <a:cs typeface="Consolas" panose="020B0609020204030204" pitchFamily="34" charset="-120"/>
+                <a:latin typeface="Consolas" pitchFamily="34" charset="0"/>
+                <a:ea typeface="Consolas" pitchFamily="34" charset="-122"/>
+                <a:cs typeface="Consolas" pitchFamily="34" charset="-120"/>
               </a:rPr>
               <a:t>for(int i = 1; i &lt;= 10; i++){
     if(i == 5) break;       // 整个循环到此结束
@@ -2874,12 +3077,13 @@
             <a:avLst/>
           </a:prstGeom>
           <a:noFill/>
+          <a:ln/>
         </p:spPr>
         <p:txBody>
           <a:bodyPr wrap="square" rtlCol="0" anchor="t"/>
           <a:lstStyle/>
           <a:p>
-            <a:pPr marL="0" indent="0" algn="l">
+            <a:pPr algn="l" indent="0" marL="0">
               <a:lnSpc>
                 <a:spcPct val="115000"/>
               </a:lnSpc>
@@ -2890,12 +3094,18 @@
                 <a:solidFill>
                   <a:srgbClr val="1F4E9C"/>
                 </a:solidFill>
-                <a:latin typeface="微软雅黑" panose="020B0503020204020204" pitchFamily="34" charset="-122"/>
-                <a:ea typeface="微软雅黑" panose="020B0503020204020204" pitchFamily="34" charset="-122"/>
-                <a:cs typeface="微软雅黑" panose="020B0503020204020204" pitchFamily="34" charset="-120"/>
+                <a:latin typeface="微软雅黑" pitchFamily="34" charset="0"/>
+                <a:ea typeface="微软雅黑" pitchFamily="34" charset="-122"/>
+                <a:cs typeface="微软雅黑" pitchFamily="34" charset="-120"/>
               </a:rPr>
               <a:t>•  </a:t>
             </a:r>
+            <a:pPr algn="l" indent="0" marL="0">
+              <a:lnSpc>
+                <a:spcPct val="115000"/>
+              </a:lnSpc>
+              <a:buNone/>
+            </a:pPr>
             <a:r>
               <a:rPr lang="en-US" sz="1800" b="1" dirty="0">
                 <a:solidFill>
@@ -2904,6 +3114,12 @@
               </a:rPr>
               <a:t>break</a:t>
             </a:r>
+            <a:pPr algn="l" indent="0" marL="0">
+              <a:lnSpc>
+                <a:spcPct val="115000"/>
+              </a:lnSpc>
+              <a:buNone/>
+            </a:pPr>
             <a:r>
               <a:rPr lang="en-US" sz="1800" dirty="0">
                 <a:solidFill>
@@ -2931,12 +3147,13 @@
             <a:avLst/>
           </a:prstGeom>
           <a:noFill/>
+          <a:ln/>
         </p:spPr>
         <p:txBody>
           <a:bodyPr wrap="square" rtlCol="0" anchor="t"/>
           <a:lstStyle/>
           <a:p>
-            <a:pPr marL="0" indent="0" algn="l">
+            <a:pPr algn="l" indent="0" marL="0">
               <a:lnSpc>
                 <a:spcPct val="115000"/>
               </a:lnSpc>
@@ -2947,12 +3164,18 @@
                 <a:solidFill>
                   <a:srgbClr val="1F4E9C"/>
                 </a:solidFill>
-                <a:latin typeface="微软雅黑" panose="020B0503020204020204" pitchFamily="34" charset="-122"/>
-                <a:ea typeface="微软雅黑" panose="020B0503020204020204" pitchFamily="34" charset="-122"/>
-                <a:cs typeface="微软雅黑" panose="020B0503020204020204" pitchFamily="34" charset="-120"/>
+                <a:latin typeface="微软雅黑" pitchFamily="34" charset="0"/>
+                <a:ea typeface="微软雅黑" pitchFamily="34" charset="-122"/>
+                <a:cs typeface="微软雅黑" pitchFamily="34" charset="-120"/>
               </a:rPr>
               <a:t>•  </a:t>
             </a:r>
+            <a:pPr algn="l" indent="0" marL="0">
+              <a:lnSpc>
+                <a:spcPct val="115000"/>
+              </a:lnSpc>
+              <a:buNone/>
+            </a:pPr>
             <a:r>
               <a:rPr lang="en-US" sz="1800" b="1" dirty="0">
                 <a:solidFill>
@@ -2961,6 +3184,12 @@
               </a:rPr>
               <a:t>continue</a:t>
             </a:r>
+            <a:pPr algn="l" indent="0" marL="0">
+              <a:lnSpc>
+                <a:spcPct val="115000"/>
+              </a:lnSpc>
+              <a:buNone/>
+            </a:pPr>
             <a:r>
               <a:rPr lang="en-US" sz="1800" dirty="0">
                 <a:solidFill>
@@ -2988,12 +3217,13 @@
             <a:avLst/>
           </a:prstGeom>
           <a:noFill/>
+          <a:ln/>
         </p:spPr>
         <p:txBody>
           <a:bodyPr wrap="square" rtlCol="0" anchor="t"/>
           <a:lstStyle/>
           <a:p>
-            <a:pPr marL="0" indent="0" algn="l">
+            <a:pPr algn="l" indent="0" marL="0">
               <a:lnSpc>
                 <a:spcPct val="115000"/>
               </a:lnSpc>
@@ -3004,12 +3234,18 @@
                 <a:solidFill>
                   <a:srgbClr val="1F4E9C"/>
                 </a:solidFill>
-                <a:latin typeface="微软雅黑" panose="020B0503020204020204" pitchFamily="34" charset="-122"/>
-                <a:ea typeface="微软雅黑" panose="020B0503020204020204" pitchFamily="34" charset="-122"/>
-                <a:cs typeface="微软雅黑" panose="020B0503020204020204" pitchFamily="34" charset="-120"/>
+                <a:latin typeface="微软雅黑" pitchFamily="34" charset="0"/>
+                <a:ea typeface="微软雅黑" pitchFamily="34" charset="-122"/>
+                <a:cs typeface="微软雅黑" pitchFamily="34" charset="-120"/>
               </a:rPr>
               <a:t>•  </a:t>
             </a:r>
+            <a:pPr algn="l" indent="0" marL="0">
+              <a:lnSpc>
+                <a:spcPct val="115000"/>
+              </a:lnSpc>
+              <a:buNone/>
+            </a:pPr>
             <a:r>
               <a:rPr lang="en-US" sz="1800" dirty="0">
                 <a:solidFill>
@@ -3032,7 +3268,7 @@
 
 <file path=ppt/slides/slide12.xml><?xml version="1.0" encoding="utf-8"?>
 <p:sld xmlns:a="http://schemas.openxmlformats.org/drawingml/2006/main" xmlns:r="http://schemas.openxmlformats.org/officeDocument/2006/relationships" xmlns:p="http://schemas.openxmlformats.org/presentationml/2006/main">
-  <p:cSld>
+  <p:cSld name="Slide 12">
     <p:bg>
       <p:bgPr>
         <a:blipFill dpi="0" rotWithShape="1">
@@ -3076,12 +3312,13 @@
             <a:avLst/>
           </a:prstGeom>
           <a:noFill/>
+          <a:ln/>
         </p:spPr>
         <p:txBody>
           <a:bodyPr wrap="square" rtlCol="0" anchor="ctr"/>
           <a:lstStyle/>
           <a:p>
-            <a:pPr marL="0" indent="0" algn="r">
+            <a:pPr algn="r" indent="0" marL="0">
               <a:buNone/>
             </a:pPr>
             <a:r>
@@ -3089,9 +3326,9 @@
                 <a:solidFill>
                   <a:srgbClr val="8A9099"/>
                 </a:solidFill>
-                <a:latin typeface="微软雅黑" panose="020B0503020204020204" pitchFamily="34" charset="-122"/>
-                <a:ea typeface="微软雅黑" panose="020B0503020204020204" pitchFamily="34" charset="-122"/>
-                <a:cs typeface="微软雅黑" panose="020B0503020204020204" pitchFamily="34" charset="-120"/>
+                <a:latin typeface="微软雅黑" pitchFamily="34" charset="0"/>
+                <a:ea typeface="微软雅黑" pitchFamily="34" charset="-122"/>
+                <a:cs typeface="微软雅黑" pitchFamily="34" charset="-120"/>
               </a:rPr>
               <a:t>12 / 16</a:t>
             </a:r>
@@ -3114,12 +3351,13 @@
             <a:avLst/>
           </a:prstGeom>
           <a:noFill/>
+          <a:ln/>
         </p:spPr>
         <p:txBody>
           <a:bodyPr wrap="square" rtlCol="0" anchor="ctr"/>
           <a:lstStyle/>
           <a:p>
-            <a:pPr marL="0" indent="0" algn="l">
+            <a:pPr algn="l" indent="0" marL="0">
               <a:buNone/>
             </a:pPr>
             <a:r>
@@ -3127,9 +3365,9 @@
                 <a:solidFill>
                   <a:srgbClr val="1F4E9C"/>
                 </a:solidFill>
-                <a:latin typeface="微软雅黑" panose="020B0503020204020204" pitchFamily="34" charset="-122"/>
-                <a:ea typeface="微软雅黑" panose="020B0503020204020204" pitchFamily="34" charset="-122"/>
-                <a:cs typeface="微软雅黑" panose="020B0503020204020204" pitchFamily="34" charset="-120"/>
+                <a:latin typeface="微软雅黑" pitchFamily="34" charset="0"/>
+                <a:ea typeface="微软雅黑" pitchFamily="34" charset="-122"/>
+                <a:cs typeface="微软雅黑" pitchFamily="34" charset="-120"/>
               </a:rPr>
               <a:t>嵌套循环</a:t>
             </a:r>
@@ -3152,12 +3390,13 @@
             <a:avLst/>
           </a:prstGeom>
           <a:noFill/>
+          <a:ln/>
         </p:spPr>
         <p:txBody>
           <a:bodyPr wrap="square" rtlCol="0" anchor="ctr"/>
           <a:lstStyle/>
           <a:p>
-            <a:pPr marL="0" indent="0" algn="l">
+            <a:pPr algn="l" indent="0" marL="0">
               <a:buNone/>
             </a:pPr>
             <a:r>
@@ -3165,9 +3404,9 @@
                 <a:solidFill>
                   <a:srgbClr val="1F2329"/>
                 </a:solidFill>
-                <a:latin typeface="微软雅黑" panose="020B0503020204020204" pitchFamily="34" charset="-122"/>
-                <a:ea typeface="微软雅黑" panose="020B0503020204020204" pitchFamily="34" charset="-122"/>
-                <a:cs typeface="微软雅黑" panose="020B0503020204020204" pitchFamily="34" charset="-120"/>
+                <a:latin typeface="微软雅黑" pitchFamily="34" charset="0"/>
+                <a:ea typeface="微软雅黑" pitchFamily="34" charset="-122"/>
+                <a:cs typeface="微软雅黑" pitchFamily="34" charset="-120"/>
               </a:rPr>
               <a:t>循环里套循环，先知道有这回事</a:t>
             </a:r>
@@ -3215,12 +3454,13 @@
             <a:avLst/>
           </a:prstGeom>
           <a:noFill/>
+          <a:ln/>
         </p:spPr>
         <p:txBody>
           <a:bodyPr wrap="square" rtlCol="0" anchor="t"/>
           <a:lstStyle/>
           <a:p>
-            <a:pPr marL="0" indent="0" algn="l">
+            <a:pPr algn="l" indent="0" marL="0">
               <a:lnSpc>
                 <a:spcPct val="125000"/>
               </a:lnSpc>
@@ -3231,9 +3471,9 @@
                 <a:solidFill>
                   <a:srgbClr val="1F2329"/>
                 </a:solidFill>
-                <a:latin typeface="Consolas" panose="020B0609020204030204" pitchFamily="34" charset="0"/>
-                <a:ea typeface="Consolas" panose="020B0609020204030204" pitchFamily="34" charset="-122"/>
-                <a:cs typeface="Consolas" panose="020B0609020204030204" pitchFamily="34" charset="-120"/>
+                <a:latin typeface="Consolas" pitchFamily="34" charset="0"/>
+                <a:ea typeface="Consolas" pitchFamily="34" charset="-122"/>
+                <a:cs typeface="Consolas" pitchFamily="34" charset="-120"/>
               </a:rPr>
               <a:t>for(int i = 0; i &lt; n; i++){
     for(int j = 0; j &lt; n; j++){
@@ -3261,12 +3501,13 @@
             <a:avLst/>
           </a:prstGeom>
           <a:noFill/>
+          <a:ln/>
         </p:spPr>
         <p:txBody>
           <a:bodyPr wrap="square" rtlCol="0" anchor="t"/>
           <a:lstStyle/>
           <a:p>
-            <a:pPr marL="0" indent="0" algn="l">
+            <a:pPr algn="l" indent="0" marL="0">
               <a:lnSpc>
                 <a:spcPct val="115000"/>
               </a:lnSpc>
@@ -3277,12 +3518,18 @@
                 <a:solidFill>
                   <a:srgbClr val="1F4E9C"/>
                 </a:solidFill>
-                <a:latin typeface="微软雅黑" panose="020B0503020204020204" pitchFamily="34" charset="-122"/>
-                <a:ea typeface="微软雅黑" panose="020B0503020204020204" pitchFamily="34" charset="-122"/>
-                <a:cs typeface="微软雅黑" panose="020B0503020204020204" pitchFamily="34" charset="-120"/>
+                <a:latin typeface="微软雅黑" pitchFamily="34" charset="0"/>
+                <a:ea typeface="微软雅黑" pitchFamily="34" charset="-122"/>
+                <a:cs typeface="微软雅黑" pitchFamily="34" charset="-120"/>
               </a:rPr>
               <a:t>•  </a:t>
             </a:r>
+            <a:pPr algn="l" indent="0" marL="0">
+              <a:lnSpc>
+                <a:spcPct val="115000"/>
+              </a:lnSpc>
+              <a:buNone/>
+            </a:pPr>
             <a:r>
               <a:rPr lang="en-US" sz="1800" dirty="0">
                 <a:solidFill>
@@ -3310,12 +3557,13 @@
             <a:avLst/>
           </a:prstGeom>
           <a:noFill/>
+          <a:ln/>
         </p:spPr>
         <p:txBody>
           <a:bodyPr wrap="square" rtlCol="0" anchor="t"/>
           <a:lstStyle/>
           <a:p>
-            <a:pPr marL="0" indent="0" algn="l">
+            <a:pPr algn="l" indent="0" marL="0">
               <a:lnSpc>
                 <a:spcPct val="115000"/>
               </a:lnSpc>
@@ -3326,12 +3574,18 @@
                 <a:solidFill>
                   <a:srgbClr val="1F4E9C"/>
                 </a:solidFill>
-                <a:latin typeface="微软雅黑" panose="020B0503020204020204" pitchFamily="34" charset="-122"/>
-                <a:ea typeface="微软雅黑" panose="020B0503020204020204" pitchFamily="34" charset="-122"/>
-                <a:cs typeface="微软雅黑" panose="020B0503020204020204" pitchFamily="34" charset="-120"/>
+                <a:latin typeface="微软雅黑" pitchFamily="34" charset="0"/>
+                <a:ea typeface="微软雅黑" pitchFamily="34" charset="-122"/>
+                <a:cs typeface="微软雅黑" pitchFamily="34" charset="-120"/>
               </a:rPr>
               <a:t>•  </a:t>
             </a:r>
+            <a:pPr algn="l" indent="0" marL="0">
+              <a:lnSpc>
+                <a:spcPct val="115000"/>
+              </a:lnSpc>
+              <a:buNone/>
+            </a:pPr>
             <a:r>
               <a:rPr lang="en-US" sz="1800" dirty="0">
                 <a:solidFill>
@@ -3340,6 +3594,12 @@
               </a:rPr>
               <a:t>这节先知道有这回事，</a:t>
             </a:r>
+            <a:pPr algn="l" indent="0" marL="0">
+              <a:lnSpc>
+                <a:spcPct val="115000"/>
+              </a:lnSpc>
+              <a:buNone/>
+            </a:pPr>
             <a:r>
               <a:rPr lang="en-US" sz="1800" b="1" dirty="0">
                 <a:solidFill>
@@ -3367,12 +3627,13 @@
             <a:avLst/>
           </a:prstGeom>
           <a:noFill/>
+          <a:ln/>
         </p:spPr>
         <p:txBody>
           <a:bodyPr wrap="square" rtlCol="0" anchor="t"/>
           <a:lstStyle/>
           <a:p>
-            <a:pPr marL="0" indent="0" algn="l">
+            <a:pPr algn="l" indent="0" marL="0">
               <a:lnSpc>
                 <a:spcPct val="115000"/>
               </a:lnSpc>
@@ -3383,12 +3644,18 @@
                 <a:solidFill>
                   <a:srgbClr val="1F4E9C"/>
                 </a:solidFill>
-                <a:latin typeface="微软雅黑" panose="020B0503020204020204" pitchFamily="34" charset="-122"/>
-                <a:ea typeface="微软雅黑" panose="020B0503020204020204" pitchFamily="34" charset="-122"/>
-                <a:cs typeface="微软雅黑" panose="020B0503020204020204" pitchFamily="34" charset="-120"/>
+                <a:latin typeface="微软雅黑" pitchFamily="34" charset="0"/>
+                <a:ea typeface="微软雅黑" pitchFamily="34" charset="-122"/>
+                <a:cs typeface="微软雅黑" pitchFamily="34" charset="-120"/>
               </a:rPr>
               <a:t>•  </a:t>
             </a:r>
+            <a:pPr algn="l" indent="0" marL="0">
+              <a:lnSpc>
+                <a:spcPct val="115000"/>
+              </a:lnSpc>
+              <a:buNone/>
+            </a:pPr>
             <a:r>
               <a:rPr lang="en-US" sz="1800" dirty="0">
                 <a:solidFill>
@@ -3411,7 +3678,7 @@
 
 <file path=ppt/slides/slide13.xml><?xml version="1.0" encoding="utf-8"?>
 <p:sld xmlns:a="http://schemas.openxmlformats.org/drawingml/2006/main" xmlns:r="http://schemas.openxmlformats.org/officeDocument/2006/relationships" xmlns:p="http://schemas.openxmlformats.org/presentationml/2006/main">
-  <p:cSld>
+  <p:cSld name="Slide 13">
     <p:bg>
       <p:bgPr>
         <a:blipFill dpi="0" rotWithShape="1">
@@ -3455,12 +3722,13 @@
             <a:avLst/>
           </a:prstGeom>
           <a:noFill/>
+          <a:ln/>
         </p:spPr>
         <p:txBody>
           <a:bodyPr wrap="square" rtlCol="0" anchor="ctr"/>
           <a:lstStyle/>
           <a:p>
-            <a:pPr marL="0" indent="0" algn="r">
+            <a:pPr algn="r" indent="0" marL="0">
               <a:buNone/>
             </a:pPr>
             <a:r>
@@ -3468,9 +3736,9 @@
                 <a:solidFill>
                   <a:srgbClr val="8A9099"/>
                 </a:solidFill>
-                <a:latin typeface="微软雅黑" panose="020B0503020204020204" pitchFamily="34" charset="-122"/>
-                <a:ea typeface="微软雅黑" panose="020B0503020204020204" pitchFamily="34" charset="-122"/>
-                <a:cs typeface="微软雅黑" panose="020B0503020204020204" pitchFamily="34" charset="-120"/>
+                <a:latin typeface="微软雅黑" pitchFamily="34" charset="0"/>
+                <a:ea typeface="微软雅黑" pitchFamily="34" charset="-122"/>
+                <a:cs typeface="微软雅黑" pitchFamily="34" charset="-120"/>
               </a:rPr>
               <a:t>13 / 16</a:t>
             </a:r>
@@ -3493,12 +3761,13 @@
             <a:avLst/>
           </a:prstGeom>
           <a:noFill/>
+          <a:ln/>
         </p:spPr>
         <p:txBody>
           <a:bodyPr wrap="square" rtlCol="0" anchor="ctr"/>
           <a:lstStyle/>
           <a:p>
-            <a:pPr marL="0" indent="0" algn="l">
+            <a:pPr algn="l" indent="0" marL="0">
               <a:buNone/>
             </a:pPr>
             <a:r>
@@ -3506,9 +3775,9 @@
                 <a:solidFill>
                   <a:srgbClr val="1F4E9C"/>
                 </a:solidFill>
-                <a:latin typeface="微软雅黑" panose="020B0503020204020204" pitchFamily="34" charset="-122"/>
-                <a:ea typeface="微软雅黑" panose="020B0503020204020204" pitchFamily="34" charset="-122"/>
-                <a:cs typeface="微软雅黑" panose="020B0503020204020204" pitchFamily="34" charset="-120"/>
+                <a:latin typeface="微软雅黑" pitchFamily="34" charset="0"/>
+                <a:ea typeface="微软雅黑" pitchFamily="34" charset="-122"/>
+                <a:cs typeface="微软雅黑" pitchFamily="34" charset="-120"/>
               </a:rPr>
               <a:t>板书推演</a:t>
             </a:r>
@@ -3531,12 +3800,13 @@
             <a:avLst/>
           </a:prstGeom>
           <a:noFill/>
+          <a:ln/>
         </p:spPr>
         <p:txBody>
           <a:bodyPr wrap="square" rtlCol="0" anchor="ctr"/>
           <a:lstStyle/>
           <a:p>
-            <a:pPr marL="0" indent="0" algn="l">
+            <a:pPr algn="l" indent="0" marL="0">
               <a:buNone/>
             </a:pPr>
             <a:r>
@@ -3544,9 +3814,9 @@
                 <a:solidFill>
                   <a:srgbClr val="1F2329"/>
                 </a:solidFill>
-                <a:latin typeface="微软雅黑" panose="020B0503020204020204" pitchFamily="34" charset="-122"/>
-                <a:ea typeface="微软雅黑" panose="020B0503020204020204" pitchFamily="34" charset="-122"/>
-                <a:cs typeface="微软雅黑" panose="020B0503020204020204" pitchFamily="34" charset="-120"/>
+                <a:latin typeface="微软雅黑" pitchFamily="34" charset="0"/>
+                <a:ea typeface="微软雅黑" pitchFamily="34" charset="-122"/>
+                <a:cs typeface="微软雅黑" pitchFamily="34" charset="-120"/>
               </a:rPr>
               <a:t>从零写：读入分数，判等级</a:t>
             </a:r>
@@ -3569,12 +3839,13 @@
             <a:avLst/>
           </a:prstGeom>
           <a:noFill/>
+          <a:ln/>
         </p:spPr>
         <p:txBody>
           <a:bodyPr wrap="square" rtlCol="0" anchor="t"/>
           <a:lstStyle/>
           <a:p>
-            <a:pPr marL="0" indent="0" algn="l">
+            <a:pPr algn="l" indent="0" marL="0">
               <a:buNone/>
             </a:pPr>
             <a:r>
@@ -3582,9 +3853,9 @@
                 <a:solidFill>
                   <a:srgbClr val="1F2329"/>
                 </a:solidFill>
-                <a:latin typeface="微软雅黑" panose="020B0503020204020204" pitchFamily="34" charset="-122"/>
-                <a:ea typeface="微软雅黑" panose="020B0503020204020204" pitchFamily="34" charset="-122"/>
-                <a:cs typeface="微软雅黑" panose="020B0503020204020204" pitchFamily="34" charset="-120"/>
+                <a:latin typeface="微软雅黑" pitchFamily="34" charset="0"/>
+                <a:ea typeface="微软雅黑" pitchFamily="34" charset="-122"/>
+                <a:cs typeface="微软雅黑" pitchFamily="34" charset="-120"/>
               </a:rPr>
               <a:t>任务：写一个完整程序，scanf读入分数，用if-else if-else输出"优秀/及格/不及格"。分六步：头文件 → main开头 → 声明并读入分数 → 写三段判断 → 打印 → return 0 补花括号。追加：再用for循环打印1到10</a:t>
             </a:r>
@@ -3600,8 +3871,8 @@
         </p:nvSpPr>
         <p:spPr>
           <a:xfrm>
-            <a:off x="822960" y="2880360"/>
-            <a:ext cx="10546080" cy="3070860"/>
+            <a:off x="822960" y="3017520"/>
+            <a:ext cx="10545775" cy="2788920"/>
           </a:xfrm>
           <a:prstGeom prst="rect">
             <a:avLst/>
@@ -3632,12 +3903,13 @@
             <a:avLst/>
           </a:prstGeom>
           <a:noFill/>
+          <a:ln/>
         </p:spPr>
         <p:txBody>
           <a:bodyPr wrap="square" rtlCol="0" anchor="ctr"/>
           <a:lstStyle/>
           <a:p>
-            <a:pPr marL="0" indent="0" algn="r">
+            <a:pPr algn="r" indent="0" marL="0">
               <a:buNone/>
             </a:pPr>
             <a:r>
@@ -3645,9 +3917,9 @@
                 <a:solidFill>
                   <a:srgbClr val="8A9099"/>
                 </a:solidFill>
-                <a:latin typeface="微软雅黑" panose="020B0503020204020204" pitchFamily="34" charset="-122"/>
-                <a:ea typeface="微软雅黑" panose="020B0503020204020204" pitchFamily="34" charset="-122"/>
-                <a:cs typeface="微软雅黑" panose="020B0503020204020204" pitchFamily="34" charset="-120"/>
+                <a:latin typeface="微软雅黑" pitchFamily="34" charset="0"/>
+                <a:ea typeface="微软雅黑" pitchFamily="34" charset="-122"/>
+                <a:cs typeface="微软雅黑" pitchFamily="34" charset="-120"/>
               </a:rPr>
               <a:t>此处板书推演</a:t>
             </a:r>
@@ -3665,7 +3937,7 @@
 
 <file path=ppt/slides/slide14.xml><?xml version="1.0" encoding="utf-8"?>
 <p:sld xmlns:a="http://schemas.openxmlformats.org/drawingml/2006/main" xmlns:r="http://schemas.openxmlformats.org/officeDocument/2006/relationships" xmlns:p="http://schemas.openxmlformats.org/presentationml/2006/main">
-  <p:cSld>
+  <p:cSld name="Slide 14">
     <p:bg>
       <p:bgPr>
         <a:blipFill dpi="0" rotWithShape="1">
@@ -3709,12 +3981,13 @@
             <a:avLst/>
           </a:prstGeom>
           <a:noFill/>
+          <a:ln/>
         </p:spPr>
         <p:txBody>
           <a:bodyPr wrap="square" rtlCol="0" anchor="ctr"/>
           <a:lstStyle/>
           <a:p>
-            <a:pPr marL="0" indent="0" algn="r">
+            <a:pPr algn="r" indent="0" marL="0">
               <a:buNone/>
             </a:pPr>
             <a:r>
@@ -3722,9 +3995,9 @@
                 <a:solidFill>
                   <a:srgbClr val="8A9099"/>
                 </a:solidFill>
-                <a:latin typeface="微软雅黑" panose="020B0503020204020204" pitchFamily="34" charset="-122"/>
-                <a:ea typeface="微软雅黑" panose="020B0503020204020204" pitchFamily="34" charset="-122"/>
-                <a:cs typeface="微软雅黑" panose="020B0503020204020204" pitchFamily="34" charset="-120"/>
+                <a:latin typeface="微软雅黑" pitchFamily="34" charset="0"/>
+                <a:ea typeface="微软雅黑" pitchFamily="34" charset="-122"/>
+                <a:cs typeface="微软雅黑" pitchFamily="34" charset="-120"/>
               </a:rPr>
               <a:t>14 / 16</a:t>
             </a:r>
@@ -3747,12 +4020,13 @@
             <a:avLst/>
           </a:prstGeom>
           <a:noFill/>
+          <a:ln/>
         </p:spPr>
         <p:txBody>
           <a:bodyPr wrap="square" rtlCol="0" anchor="ctr"/>
           <a:lstStyle/>
           <a:p>
-            <a:pPr marL="0" indent="0" algn="l">
+            <a:pPr algn="l" indent="0" marL="0">
               <a:buNone/>
             </a:pPr>
             <a:r>
@@ -3760,9 +4034,9 @@
                 <a:solidFill>
                   <a:srgbClr val="1F4E9C"/>
                 </a:solidFill>
-                <a:latin typeface="微软雅黑" panose="020B0503020204020204" pitchFamily="34" charset="-122"/>
-                <a:ea typeface="微软雅黑" panose="020B0503020204020204" pitchFamily="34" charset="-122"/>
-                <a:cs typeface="微软雅黑" panose="020B0503020204020204" pitchFamily="34" charset="-120"/>
+                <a:latin typeface="微软雅黑" pitchFamily="34" charset="0"/>
+                <a:ea typeface="微软雅黑" pitchFamily="34" charset="-122"/>
+                <a:cs typeface="微软雅黑" pitchFamily="34" charset="-120"/>
               </a:rPr>
               <a:t>板书结论</a:t>
             </a:r>
@@ -3785,12 +4059,13 @@
             <a:avLst/>
           </a:prstGeom>
           <a:noFill/>
+          <a:ln/>
         </p:spPr>
         <p:txBody>
           <a:bodyPr wrap="square" rtlCol="0" anchor="ctr"/>
           <a:lstStyle/>
           <a:p>
-            <a:pPr marL="0" indent="0" algn="l">
+            <a:pPr algn="l" indent="0" marL="0">
               <a:buNone/>
             </a:pPr>
             <a:r>
@@ -3798,9 +4073,9 @@
                 <a:solidFill>
                   <a:srgbClr val="1F2329"/>
                 </a:solidFill>
-                <a:latin typeface="微软雅黑" panose="020B0503020204020204" pitchFamily="34" charset="-122"/>
-                <a:ea typeface="微软雅黑" panose="020B0503020204020204" pitchFamily="34" charset="-122"/>
-                <a:cs typeface="微软雅黑" panose="020B0503020204020204" pitchFamily="34" charset="-120"/>
+                <a:latin typeface="微软雅黑" pitchFamily="34" charset="0"/>
+                <a:ea typeface="微软雅黑" pitchFamily="34" charset="-122"/>
+                <a:cs typeface="微软雅黑" pitchFamily="34" charset="-120"/>
               </a:rPr>
               <a:t>程序长这样</a:t>
             </a:r>
@@ -3848,12 +4123,13 @@
             <a:avLst/>
           </a:prstGeom>
           <a:noFill/>
+          <a:ln/>
         </p:spPr>
         <p:txBody>
           <a:bodyPr wrap="square" rtlCol="0" anchor="t"/>
           <a:lstStyle/>
           <a:p>
-            <a:pPr marL="0" indent="0" algn="l">
+            <a:pPr algn="l" indent="0" marL="0">
               <a:lnSpc>
                 <a:spcPct val="125000"/>
               </a:lnSpc>
@@ -3864,9 +4140,9 @@
                 <a:solidFill>
                   <a:srgbClr val="1F2329"/>
                 </a:solidFill>
-                <a:latin typeface="Consolas" panose="020B0609020204030204" pitchFamily="34" charset="0"/>
-                <a:ea typeface="Consolas" panose="020B0609020204030204" pitchFamily="34" charset="-122"/>
-                <a:cs typeface="Consolas" panose="020B0609020204030204" pitchFamily="34" charset="-120"/>
+                <a:latin typeface="Consolas" pitchFamily="34" charset="0"/>
+                <a:ea typeface="Consolas" pitchFamily="34" charset="-122"/>
+                <a:cs typeface="Consolas" pitchFamily="34" charset="-120"/>
               </a:rPr>
               <a:t>#include &lt;stdio.h&gt;
 int main(){
@@ -3899,12 +4175,13 @@
             <a:avLst/>
           </a:prstGeom>
           <a:noFill/>
+          <a:ln/>
         </p:spPr>
         <p:txBody>
           <a:bodyPr wrap="square" rtlCol="0" anchor="t"/>
           <a:lstStyle/>
           <a:p>
-            <a:pPr marL="0" indent="0" algn="l">
+            <a:pPr algn="l" indent="0" marL="0">
               <a:buNone/>
             </a:pPr>
             <a:r>
@@ -3912,9 +4189,9 @@
                 <a:solidFill>
                   <a:srgbClr val="8A9099"/>
                 </a:solidFill>
-                <a:latin typeface="微软雅黑" panose="020B0503020204020204" pitchFamily="34" charset="-122"/>
-                <a:ea typeface="微软雅黑" panose="020B0503020204020204" pitchFamily="34" charset="-122"/>
-                <a:cs typeface="微软雅黑" panose="020B0503020204020204" pitchFamily="34" charset="-120"/>
+                <a:latin typeface="微软雅黑" pitchFamily="34" charset="0"/>
+                <a:ea typeface="微软雅黑" pitchFamily="34" charset="-122"/>
+                <a:cs typeface="微软雅黑" pitchFamily="34" charset="-120"/>
               </a:rPr>
               <a:t>输入95，输出"优秀"，然后打印 1 2 3 ... 10</a:t>
             </a:r>
@@ -3932,7 +4209,7 @@
 
 <file path=ppt/slides/slide15.xml><?xml version="1.0" encoding="utf-8"?>
 <p:sld xmlns:a="http://schemas.openxmlformats.org/drawingml/2006/main" xmlns:r="http://schemas.openxmlformats.org/officeDocument/2006/relationships" xmlns:p="http://schemas.openxmlformats.org/presentationml/2006/main">
-  <p:cSld>
+  <p:cSld name="Slide 15">
     <p:bg>
       <p:bgPr>
         <a:blipFill dpi="0" rotWithShape="1">
@@ -3976,12 +4253,13 @@
             <a:avLst/>
           </a:prstGeom>
           <a:noFill/>
+          <a:ln/>
         </p:spPr>
         <p:txBody>
           <a:bodyPr wrap="square" rtlCol="0" anchor="ctr"/>
           <a:lstStyle/>
           <a:p>
-            <a:pPr marL="0" indent="0" algn="r">
+            <a:pPr algn="r" indent="0" marL="0">
               <a:buNone/>
             </a:pPr>
             <a:r>
@@ -3989,9 +4267,9 @@
                 <a:solidFill>
                   <a:srgbClr val="8A9099"/>
                 </a:solidFill>
-                <a:latin typeface="微软雅黑" panose="020B0503020204020204" pitchFamily="34" charset="-122"/>
-                <a:ea typeface="微软雅黑" panose="020B0503020204020204" pitchFamily="34" charset="-122"/>
-                <a:cs typeface="微软雅黑" panose="020B0503020204020204" pitchFamily="34" charset="-120"/>
+                <a:latin typeface="微软雅黑" pitchFamily="34" charset="0"/>
+                <a:ea typeface="微软雅黑" pitchFamily="34" charset="-122"/>
+                <a:cs typeface="微软雅黑" pitchFamily="34" charset="-120"/>
               </a:rPr>
               <a:t>15 / 16</a:t>
             </a:r>
@@ -4014,12 +4292,13 @@
             <a:avLst/>
           </a:prstGeom>
           <a:noFill/>
+          <a:ln/>
         </p:spPr>
         <p:txBody>
           <a:bodyPr wrap="square" rtlCol="0" anchor="ctr"/>
           <a:lstStyle/>
           <a:p>
-            <a:pPr marL="0" indent="0" algn="l">
+            <a:pPr algn="l" indent="0" marL="0">
               <a:buNone/>
             </a:pPr>
             <a:r>
@@ -4027,9 +4306,9 @@
                 <a:solidFill>
                   <a:srgbClr val="1F4E9C"/>
                 </a:solidFill>
-                <a:latin typeface="微软雅黑" panose="020B0503020204020204" pitchFamily="34" charset="-122"/>
-                <a:ea typeface="微软雅黑" panose="020B0503020204020204" pitchFamily="34" charset="-122"/>
-                <a:cs typeface="微软雅黑" panose="020B0503020204020204" pitchFamily="34" charset="-120"/>
+                <a:latin typeface="微软雅黑" pitchFamily="34" charset="0"/>
+                <a:ea typeface="微软雅黑" pitchFamily="34" charset="-122"/>
+                <a:cs typeface="微软雅黑" pitchFamily="34" charset="-120"/>
               </a:rPr>
               <a:t>本节总结</a:t>
             </a:r>
@@ -4052,12 +4331,13 @@
             <a:avLst/>
           </a:prstGeom>
           <a:noFill/>
+          <a:ln/>
         </p:spPr>
         <p:txBody>
           <a:bodyPr wrap="square" rtlCol="0" anchor="ctr"/>
           <a:lstStyle/>
           <a:p>
-            <a:pPr marL="0" indent="0" algn="l">
+            <a:pPr algn="l" indent="0" marL="0">
               <a:buNone/>
             </a:pPr>
             <a:r>
@@ -4065,9 +4345,9 @@
                 <a:solidFill>
                   <a:srgbClr val="1F2329"/>
                 </a:solidFill>
-                <a:latin typeface="微软雅黑" panose="020B0503020204020204" pitchFamily="34" charset="-122"/>
-                <a:ea typeface="微软雅黑" panose="020B0503020204020204" pitchFamily="34" charset="-122"/>
-                <a:cs typeface="微软雅黑" panose="020B0503020204020204" pitchFamily="34" charset="-120"/>
+                <a:latin typeface="微软雅黑" pitchFamily="34" charset="0"/>
+                <a:ea typeface="微软雅黑" pitchFamily="34" charset="-122"/>
+                <a:cs typeface="微软雅黑" pitchFamily="34" charset="-120"/>
               </a:rPr>
               <a:t>这节记这四条</a:t>
             </a:r>
@@ -4090,12 +4370,13 @@
             <a:avLst/>
           </a:prstGeom>
           <a:noFill/>
+          <a:ln/>
         </p:spPr>
         <p:txBody>
           <a:bodyPr wrap="square" rtlCol="0" anchor="t"/>
           <a:lstStyle/>
           <a:p>
-            <a:pPr marL="0" indent="0" algn="l">
+            <a:pPr algn="l" indent="0" marL="0">
               <a:lnSpc>
                 <a:spcPct val="115000"/>
               </a:lnSpc>
@@ -4106,12 +4387,18 @@
                 <a:solidFill>
                   <a:srgbClr val="1F4E9C"/>
                 </a:solidFill>
-                <a:latin typeface="微软雅黑" panose="020B0503020204020204" pitchFamily="34" charset="-122"/>
-                <a:ea typeface="微软雅黑" panose="020B0503020204020204" pitchFamily="34" charset="-122"/>
-                <a:cs typeface="微软雅黑" panose="020B0503020204020204" pitchFamily="34" charset="-120"/>
+                <a:latin typeface="微软雅黑" pitchFamily="34" charset="0"/>
+                <a:ea typeface="微软雅黑" pitchFamily="34" charset="-122"/>
+                <a:cs typeface="微软雅黑" pitchFamily="34" charset="-120"/>
               </a:rPr>
               <a:t>•  </a:t>
             </a:r>
+            <a:pPr algn="l" indent="0" marL="0">
+              <a:lnSpc>
+                <a:spcPct val="115000"/>
+              </a:lnSpc>
+              <a:buNone/>
+            </a:pPr>
             <a:r>
               <a:rPr lang="en-US" sz="1800" dirty="0">
                 <a:solidFill>
@@ -4132,19 +4419,20 @@
         </p:nvSpPr>
         <p:spPr>
           <a:xfrm>
-            <a:off x="896112" y="2914904"/>
+            <a:off x="896112" y="3209544"/>
             <a:ext cx="10454335" cy="397764"/>
           </a:xfrm>
           <a:prstGeom prst="rect">
             <a:avLst/>
           </a:prstGeom>
           <a:noFill/>
+          <a:ln/>
         </p:spPr>
         <p:txBody>
           <a:bodyPr wrap="square" rtlCol="0" anchor="t"/>
           <a:lstStyle/>
           <a:p>
-            <a:pPr marL="0" indent="0" algn="l">
+            <a:pPr algn="l" indent="0" marL="0">
               <a:lnSpc>
                 <a:spcPct val="115000"/>
               </a:lnSpc>
@@ -4155,12 +4443,18 @@
                 <a:solidFill>
                   <a:srgbClr val="1F4E9C"/>
                 </a:solidFill>
-                <a:latin typeface="微软雅黑" panose="020B0503020204020204" pitchFamily="34" charset="-122"/>
-                <a:ea typeface="微软雅黑" panose="020B0503020204020204" pitchFamily="34" charset="-122"/>
-                <a:cs typeface="微软雅黑" panose="020B0503020204020204" pitchFamily="34" charset="-120"/>
+                <a:latin typeface="微软雅黑" pitchFamily="34" charset="0"/>
+                <a:ea typeface="微软雅黑" pitchFamily="34" charset="-122"/>
+                <a:cs typeface="微软雅黑" pitchFamily="34" charset="-120"/>
               </a:rPr>
               <a:t>•  </a:t>
             </a:r>
+            <a:pPr algn="l" indent="0" marL="0">
+              <a:lnSpc>
+                <a:spcPct val="115000"/>
+              </a:lnSpc>
+              <a:buNone/>
+            </a:pPr>
             <a:r>
               <a:rPr lang="en-US" sz="1800" dirty="0">
                 <a:solidFill>
@@ -4169,6 +4463,12 @@
               </a:rPr>
               <a:t>循环三要素：初始化、条件、更新，</a:t>
             </a:r>
+            <a:pPr algn="l" indent="0" marL="0">
+              <a:lnSpc>
+                <a:spcPct val="115000"/>
+              </a:lnSpc>
+              <a:buNone/>
+            </a:pPr>
             <a:r>
               <a:rPr lang="en-US" sz="1800" b="1" dirty="0">
                 <a:solidFill>
@@ -4189,19 +4489,20 @@
         </p:nvSpPr>
         <p:spPr>
           <a:xfrm>
-            <a:off x="896112" y="3385820"/>
+            <a:off x="896112" y="3680460"/>
             <a:ext cx="10454335" cy="397764"/>
           </a:xfrm>
           <a:prstGeom prst="rect">
             <a:avLst/>
           </a:prstGeom>
           <a:noFill/>
+          <a:ln/>
         </p:spPr>
         <p:txBody>
           <a:bodyPr wrap="square" rtlCol="0" anchor="t"/>
           <a:lstStyle/>
           <a:p>
-            <a:pPr marL="0" indent="0" algn="l">
+            <a:pPr algn="l" indent="0" marL="0">
               <a:lnSpc>
                 <a:spcPct val="115000"/>
               </a:lnSpc>
@@ -4212,12 +4513,18 @@
                 <a:solidFill>
                   <a:srgbClr val="1F4E9C"/>
                 </a:solidFill>
-                <a:latin typeface="微软雅黑" panose="020B0503020204020204" pitchFamily="34" charset="-122"/>
-                <a:ea typeface="微软雅黑" panose="020B0503020204020204" pitchFamily="34" charset="-122"/>
-                <a:cs typeface="微软雅黑" panose="020B0503020204020204" pitchFamily="34" charset="-120"/>
+                <a:latin typeface="微软雅黑" pitchFamily="34" charset="0"/>
+                <a:ea typeface="微软雅黑" pitchFamily="34" charset="-122"/>
+                <a:cs typeface="微软雅黑" pitchFamily="34" charset="-120"/>
               </a:rPr>
               <a:t>•  </a:t>
             </a:r>
+            <a:pPr algn="l" indent="0" marL="0">
+              <a:lnSpc>
+                <a:spcPct val="115000"/>
+              </a:lnSpc>
+              <a:buNone/>
+            </a:pPr>
             <a:r>
               <a:rPr lang="en-US" sz="1800" dirty="0">
                 <a:solidFill>
@@ -4238,19 +4545,20 @@
         </p:nvSpPr>
         <p:spPr>
           <a:xfrm>
-            <a:off x="896112" y="3856736"/>
+            <a:off x="896112" y="4151376"/>
             <a:ext cx="10454335" cy="397764"/>
           </a:xfrm>
           <a:prstGeom prst="rect">
             <a:avLst/>
           </a:prstGeom>
           <a:noFill/>
+          <a:ln/>
         </p:spPr>
         <p:txBody>
           <a:bodyPr wrap="square" rtlCol="0" anchor="t"/>
           <a:lstStyle/>
           <a:p>
-            <a:pPr marL="0" indent="0" algn="l">
+            <a:pPr algn="l" indent="0" marL="0">
               <a:lnSpc>
                 <a:spcPct val="115000"/>
               </a:lnSpc>
@@ -4261,12 +4569,18 @@
                 <a:solidFill>
                   <a:srgbClr val="1F4E9C"/>
                 </a:solidFill>
-                <a:latin typeface="微软雅黑" panose="020B0503020204020204" pitchFamily="34" charset="-122"/>
-                <a:ea typeface="微软雅黑" panose="020B0503020204020204" pitchFamily="34" charset="-122"/>
-                <a:cs typeface="微软雅黑" panose="020B0503020204020204" pitchFamily="34" charset="-120"/>
+                <a:latin typeface="微软雅黑" pitchFamily="34" charset="0"/>
+                <a:ea typeface="微软雅黑" pitchFamily="34" charset="-122"/>
+                <a:cs typeface="微软雅黑" pitchFamily="34" charset="-120"/>
               </a:rPr>
               <a:t>•  </a:t>
             </a:r>
+            <a:pPr algn="l" indent="0" marL="0">
+              <a:lnSpc>
+                <a:spcPct val="115000"/>
+              </a:lnSpc>
+              <a:buNone/>
+            </a:pPr>
             <a:r>
               <a:rPr lang="en-US" sz="1800" dirty="0">
                 <a:solidFill>
@@ -4294,12 +4608,13 @@
             <a:avLst/>
           </a:prstGeom>
           <a:noFill/>
+          <a:ln/>
         </p:spPr>
         <p:txBody>
           <a:bodyPr wrap="square" rtlCol="0" anchor="t"/>
           <a:lstStyle/>
           <a:p>
-            <a:pPr marL="0" indent="0" algn="l">
+            <a:pPr algn="l" indent="0" marL="0">
               <a:buNone/>
             </a:pPr>
             <a:r>
@@ -4307,9 +4622,9 @@
                 <a:solidFill>
                   <a:srgbClr val="8A9099"/>
                 </a:solidFill>
-                <a:latin typeface="微软雅黑" panose="020B0503020204020204" pitchFamily="34" charset="-122"/>
-                <a:ea typeface="微软雅黑" panose="020B0503020204020204" pitchFamily="34" charset="-122"/>
-                <a:cs typeface="微软雅黑" panose="020B0503020204020204" pitchFamily="34" charset="-120"/>
+                <a:latin typeface="微软雅黑" pitchFamily="34" charset="0"/>
+                <a:ea typeface="微软雅黑" pitchFamily="34" charset="-122"/>
+                <a:cs typeface="微软雅黑" pitchFamily="34" charset="-120"/>
               </a:rPr>
               <a:t>下一节：函数与数组，本阶段收官</a:t>
             </a:r>
@@ -4327,7 +4642,7 @@
 
 <file path=ppt/slides/slide16.xml><?xml version="1.0" encoding="utf-8"?>
 <p:sld xmlns:a="http://schemas.openxmlformats.org/drawingml/2006/main" xmlns:r="http://schemas.openxmlformats.org/officeDocument/2006/relationships" xmlns:p="http://schemas.openxmlformats.org/presentationml/2006/main">
-  <p:cSld>
+  <p:cSld name="Slide 16">
     <p:bg>
       <p:bgPr>
         <a:blipFill dpi="0" rotWithShape="1">
@@ -4371,12 +4686,13 @@
             <a:avLst/>
           </a:prstGeom>
           <a:noFill/>
+          <a:ln/>
         </p:spPr>
         <p:txBody>
           <a:bodyPr wrap="square" rtlCol="0" anchor="ctr"/>
           <a:lstStyle/>
           <a:p>
-            <a:pPr marL="0" indent="0" algn="r">
+            <a:pPr algn="r" indent="0" marL="0">
               <a:buNone/>
             </a:pPr>
             <a:r>
@@ -4384,9 +4700,9 @@
                 <a:solidFill>
                   <a:srgbClr val="8A9099"/>
                 </a:solidFill>
-                <a:latin typeface="微软雅黑" panose="020B0503020204020204" pitchFamily="34" charset="-122"/>
-                <a:ea typeface="微软雅黑" panose="020B0503020204020204" pitchFamily="34" charset="-122"/>
-                <a:cs typeface="微软雅黑" panose="020B0503020204020204" pitchFamily="34" charset="-120"/>
+                <a:latin typeface="微软雅黑" pitchFamily="34" charset="0"/>
+                <a:ea typeface="微软雅黑" pitchFamily="34" charset="-122"/>
+                <a:cs typeface="微软雅黑" pitchFamily="34" charset="-120"/>
               </a:rPr>
               <a:t>16 / 16</a:t>
             </a:r>
@@ -4409,12 +4725,13 @@
             <a:avLst/>
           </a:prstGeom>
           <a:noFill/>
+          <a:ln/>
         </p:spPr>
         <p:txBody>
           <a:bodyPr wrap="square" rtlCol="0" anchor="ctr"/>
           <a:lstStyle/>
           <a:p>
-            <a:pPr marL="0" indent="0" algn="l">
+            <a:pPr algn="l" indent="0" marL="0">
               <a:buNone/>
             </a:pPr>
             <a:r>
@@ -4422,9 +4739,9 @@
                 <a:solidFill>
                   <a:srgbClr val="1F4E9C"/>
                 </a:solidFill>
-                <a:latin typeface="微软雅黑" panose="020B0503020204020204" pitchFamily="34" charset="-122"/>
-                <a:ea typeface="微软雅黑" panose="020B0503020204020204" pitchFamily="34" charset="-122"/>
-                <a:cs typeface="微软雅黑" panose="020B0503020204020204" pitchFamily="34" charset="-120"/>
+                <a:latin typeface="微软雅黑" pitchFamily="34" charset="0"/>
+                <a:ea typeface="微软雅黑" pitchFamily="34" charset="-122"/>
+                <a:cs typeface="微软雅黑" pitchFamily="34" charset="-120"/>
               </a:rPr>
               <a:t>课后任务</a:t>
             </a:r>
@@ -4447,12 +4764,13 @@
             <a:avLst/>
           </a:prstGeom>
           <a:noFill/>
+          <a:ln/>
         </p:spPr>
         <p:txBody>
           <a:bodyPr wrap="square" rtlCol="0" anchor="ctr"/>
           <a:lstStyle/>
           <a:p>
-            <a:pPr marL="0" indent="0" algn="l">
+            <a:pPr algn="l" indent="0" marL="0">
               <a:buNone/>
             </a:pPr>
             <a:r>
@@ -4460,9 +4778,9 @@
                 <a:solidFill>
                   <a:srgbClr val="1F2329"/>
                 </a:solidFill>
-                <a:latin typeface="微软雅黑" panose="020B0503020204020204" pitchFamily="34" charset="-122"/>
-                <a:ea typeface="微软雅黑" panose="020B0503020204020204" pitchFamily="34" charset="-122"/>
-                <a:cs typeface="微软雅黑" panose="020B0503020204020204" pitchFamily="34" charset="-120"/>
+                <a:latin typeface="微软雅黑" pitchFamily="34" charset="0"/>
+                <a:ea typeface="微软雅黑" pitchFamily="34" charset="-122"/>
+                <a:cs typeface="微软雅黑" pitchFamily="34" charset="-120"/>
               </a:rPr>
               <a:t>1道跟练 ＋ 1道模仿</a:t>
             </a:r>
@@ -4485,12 +4803,13 @@
             <a:avLst/>
           </a:prstGeom>
           <a:noFill/>
+          <a:ln/>
         </p:spPr>
         <p:txBody>
           <a:bodyPr wrap="square" rtlCol="0" anchor="t"/>
           <a:lstStyle/>
           <a:p>
-            <a:pPr marL="0" indent="0" algn="l">
+            <a:pPr algn="l" indent="0" marL="0">
               <a:lnSpc>
                 <a:spcPct val="115000"/>
               </a:lnSpc>
@@ -4501,12 +4820,18 @@
                 <a:solidFill>
                   <a:srgbClr val="1F4E9C"/>
                 </a:solidFill>
-                <a:latin typeface="微软雅黑" panose="020B0503020204020204" pitchFamily="34" charset="-122"/>
-                <a:ea typeface="微软雅黑" panose="020B0503020204020204" pitchFamily="34" charset="-122"/>
-                <a:cs typeface="微软雅黑" panose="020B0503020204020204" pitchFamily="34" charset="-120"/>
+                <a:latin typeface="微软雅黑" pitchFamily="34" charset="0"/>
+                <a:ea typeface="微软雅黑" pitchFamily="34" charset="-122"/>
+                <a:cs typeface="微软雅黑" pitchFamily="34" charset="-120"/>
               </a:rPr>
               <a:t>•  </a:t>
             </a:r>
+            <a:pPr algn="l" indent="0" marL="0">
+              <a:lnSpc>
+                <a:spcPct val="115000"/>
+              </a:lnSpc>
+              <a:buNone/>
+            </a:pPr>
             <a:r>
               <a:rPr lang="en-US" sz="1800" b="1" dirty="0">
                 <a:solidFill>
@@ -4515,6 +4840,12 @@
               </a:rPr>
               <a:t>跟练题</a:t>
             </a:r>
+            <a:pPr algn="l" indent="0" marL="0">
+              <a:lnSpc>
+                <a:spcPct val="115000"/>
+              </a:lnSpc>
+              <a:buNone/>
+            </a:pPr>
             <a:r>
               <a:rPr lang="en-US" sz="1800" dirty="0">
                 <a:solidFill>
@@ -4542,12 +4873,13 @@
             <a:avLst/>
           </a:prstGeom>
           <a:noFill/>
+          <a:ln/>
         </p:spPr>
         <p:txBody>
           <a:bodyPr wrap="square" rtlCol="0" anchor="t"/>
           <a:lstStyle/>
           <a:p>
-            <a:pPr marL="0" indent="0" algn="l">
+            <a:pPr algn="l" indent="0" marL="0">
               <a:lnSpc>
                 <a:spcPct val="115000"/>
               </a:lnSpc>
@@ -4558,12 +4890,18 @@
                 <a:solidFill>
                   <a:srgbClr val="1F4E9C"/>
                 </a:solidFill>
-                <a:latin typeface="微软雅黑" panose="020B0503020204020204" pitchFamily="34" charset="-122"/>
-                <a:ea typeface="微软雅黑" panose="020B0503020204020204" pitchFamily="34" charset="-122"/>
-                <a:cs typeface="微软雅黑" panose="020B0503020204020204" pitchFamily="34" charset="-120"/>
+                <a:latin typeface="微软雅黑" pitchFamily="34" charset="0"/>
+                <a:ea typeface="微软雅黑" pitchFamily="34" charset="-122"/>
+                <a:cs typeface="微软雅黑" pitchFamily="34" charset="-120"/>
               </a:rPr>
               <a:t>•  </a:t>
             </a:r>
+            <a:pPr algn="l" indent="0" marL="0">
+              <a:lnSpc>
+                <a:spcPct val="115000"/>
+              </a:lnSpc>
+              <a:buNone/>
+            </a:pPr>
             <a:r>
               <a:rPr lang="en-US" sz="1800" b="1" dirty="0">
                 <a:solidFill>
@@ -4572,6 +4910,12 @@
               </a:rPr>
               <a:t>模仿题</a:t>
             </a:r>
+            <a:pPr algn="l" indent="0" marL="0">
+              <a:lnSpc>
+                <a:spcPct val="115000"/>
+              </a:lnSpc>
+              <a:buNone/>
+            </a:pPr>
             <a:r>
               <a:rPr lang="en-US" sz="1800" dirty="0">
                 <a:solidFill>
@@ -4599,12 +4943,13 @@
             <a:avLst/>
           </a:prstGeom>
           <a:noFill/>
+          <a:ln/>
         </p:spPr>
         <p:txBody>
           <a:bodyPr wrap="square" rtlCol="0" anchor="t"/>
           <a:lstStyle/>
           <a:p>
-            <a:pPr marL="0" indent="0" algn="l">
+            <a:pPr algn="l" indent="0" marL="0">
               <a:buNone/>
             </a:pPr>
             <a:r>
@@ -4612,9 +4957,9 @@
                 <a:solidFill>
                   <a:srgbClr val="8A9099"/>
                 </a:solidFill>
-                <a:latin typeface="微软雅黑" panose="020B0503020204020204" pitchFamily="34" charset="-122"/>
-                <a:ea typeface="微软雅黑" panose="020B0503020204020204" pitchFamily="34" charset="-122"/>
-                <a:cs typeface="微软雅黑" panose="020B0503020204020204" pitchFamily="34" charset="-120"/>
+                <a:latin typeface="微软雅黑" pitchFamily="34" charset="0"/>
+                <a:ea typeface="微软雅黑" pitchFamily="34" charset="-122"/>
+                <a:cs typeface="微软雅黑" pitchFamily="34" charset="-120"/>
               </a:rPr>
               <a:t>写完对照讲稿附录的参考答案；要求：合上笔记能默写循环三要素</a:t>
             </a:r>
@@ -4632,7 +4977,7 @@
 
 <file path=ppt/slides/slide2.xml><?xml version="1.0" encoding="utf-8"?>
 <p:sld xmlns:a="http://schemas.openxmlformats.org/drawingml/2006/main" xmlns:r="http://schemas.openxmlformats.org/officeDocument/2006/relationships" xmlns:p="http://schemas.openxmlformats.org/presentationml/2006/main">
-  <p:cSld>
+  <p:cSld name="Slide 2">
     <p:bg>
       <p:bgPr>
         <a:blipFill dpi="0" rotWithShape="1">
@@ -4676,12 +5021,13 @@
             <a:avLst/>
           </a:prstGeom>
           <a:noFill/>
+          <a:ln/>
         </p:spPr>
         <p:txBody>
           <a:bodyPr wrap="square" rtlCol="0" anchor="ctr"/>
           <a:lstStyle/>
           <a:p>
-            <a:pPr marL="0" indent="0" algn="r">
+            <a:pPr algn="r" indent="0" marL="0">
               <a:buNone/>
             </a:pPr>
             <a:r>
@@ -4689,9 +5035,9 @@
                 <a:solidFill>
                   <a:srgbClr val="8A9099"/>
                 </a:solidFill>
-                <a:latin typeface="微软雅黑" panose="020B0503020204020204" pitchFamily="34" charset="-122"/>
-                <a:ea typeface="微软雅黑" panose="020B0503020204020204" pitchFamily="34" charset="-122"/>
-                <a:cs typeface="微软雅黑" panose="020B0503020204020204" pitchFamily="34" charset="-120"/>
+                <a:latin typeface="微软雅黑" pitchFamily="34" charset="0"/>
+                <a:ea typeface="微软雅黑" pitchFamily="34" charset="-122"/>
+                <a:cs typeface="微软雅黑" pitchFamily="34" charset="-120"/>
               </a:rPr>
               <a:t>2 / 16</a:t>
             </a:r>
@@ -4741,12 +5087,13 @@
             <a:avLst/>
           </a:prstGeom>
           <a:noFill/>
+          <a:ln/>
         </p:spPr>
         <p:txBody>
           <a:bodyPr wrap="square" rtlCol="0" anchor="ctr"/>
           <a:lstStyle/>
           <a:p>
-            <a:pPr marL="0" indent="0" algn="ctr">
+            <a:pPr algn="ctr" indent="0" marL="0">
               <a:buNone/>
             </a:pPr>
             <a:r>
@@ -4754,9 +5101,9 @@
                 <a:solidFill>
                   <a:srgbClr val="C0392B"/>
                 </a:solidFill>
-                <a:latin typeface="微软雅黑" panose="020B0503020204020204" pitchFamily="34" charset="-122"/>
-                <a:ea typeface="微软雅黑" panose="020B0503020204020204" pitchFamily="34" charset="-122"/>
-                <a:cs typeface="微软雅黑" panose="020B0503020204020204" pitchFamily="34" charset="-120"/>
+                <a:latin typeface="微软雅黑" pitchFamily="34" charset="0"/>
+                <a:ea typeface="微软雅黑" pitchFamily="34" charset="-122"/>
+                <a:cs typeface="微软雅黑" pitchFamily="34" charset="-120"/>
               </a:rPr>
               <a:t>第4节</a:t>
             </a:r>
@@ -4779,12 +5126,13 @@
             <a:avLst/>
           </a:prstGeom>
           <a:noFill/>
+          <a:ln/>
         </p:spPr>
         <p:txBody>
           <a:bodyPr wrap="square" rtlCol="0" anchor="ctr"/>
           <a:lstStyle/>
           <a:p>
-            <a:pPr marL="0" indent="0" algn="l">
+            <a:pPr algn="l" indent="0" marL="0">
               <a:buNone/>
             </a:pPr>
             <a:r>
@@ -4792,9 +5140,9 @@
                 <a:solidFill>
                   <a:srgbClr val="1F4E9C"/>
                 </a:solidFill>
-                <a:latin typeface="微软雅黑" panose="020B0503020204020204" pitchFamily="34" charset="-122"/>
-                <a:ea typeface="微软雅黑" panose="020B0503020204020204" pitchFamily="34" charset="-122"/>
-                <a:cs typeface="微软雅黑" panose="020B0503020204020204" pitchFamily="34" charset="-120"/>
+                <a:latin typeface="微软雅黑" pitchFamily="34" charset="0"/>
+                <a:ea typeface="微软雅黑" pitchFamily="34" charset="-122"/>
+                <a:cs typeface="微软雅黑" pitchFamily="34" charset="-120"/>
               </a:rPr>
               <a:t>先看一个问题</a:t>
             </a:r>
@@ -4817,12 +5165,13 @@
             <a:avLst/>
           </a:prstGeom>
           <a:noFill/>
+          <a:ln/>
         </p:spPr>
         <p:txBody>
           <a:bodyPr wrap="square" rtlCol="0" anchor="ctr"/>
           <a:lstStyle/>
           <a:p>
-            <a:pPr marL="0" indent="0" algn="l">
+            <a:pPr algn="l" indent="0" marL="0">
               <a:buNone/>
             </a:pPr>
             <a:r>
@@ -4830,9 +5179,9 @@
                 <a:solidFill>
                   <a:srgbClr val="1F2329"/>
                 </a:solidFill>
-                <a:latin typeface="微软雅黑" panose="020B0503020204020204" pitchFamily="34" charset="-122"/>
-                <a:ea typeface="微软雅黑" panose="020B0503020204020204" pitchFamily="34" charset="-122"/>
-                <a:cs typeface="微软雅黑" panose="020B0503020204020204" pitchFamily="34" charset="-120"/>
+                <a:latin typeface="微软雅黑" pitchFamily="34" charset="0"/>
+                <a:ea typeface="微软雅黑" pitchFamily="34" charset="-122"/>
+                <a:cs typeface="微软雅黑" pitchFamily="34" charset="-120"/>
               </a:rPr>
               <a:t>程序不能只会一条路走到黑</a:t>
             </a:r>
@@ -4880,12 +5229,13 @@
             <a:avLst/>
           </a:prstGeom>
           <a:noFill/>
+          <a:ln/>
         </p:spPr>
         <p:txBody>
           <a:bodyPr wrap="square" rtlCol="0" anchor="t"/>
           <a:lstStyle/>
           <a:p>
-            <a:pPr marL="0" indent="0" algn="l">
+            <a:pPr algn="l" indent="0" marL="0">
               <a:lnSpc>
                 <a:spcPct val="125000"/>
               </a:lnSpc>
@@ -4896,9 +5246,9 @@
                 <a:solidFill>
                   <a:srgbClr val="1F2329"/>
                 </a:solidFill>
-                <a:latin typeface="Consolas" panose="020B0609020204030204" pitchFamily="34" charset="0"/>
-                <a:ea typeface="Consolas" panose="020B0609020204030204" pitchFamily="34" charset="-122"/>
-                <a:cs typeface="Consolas" panose="020B0609020204030204" pitchFamily="34" charset="-120"/>
+                <a:latin typeface="Consolas" pitchFamily="34" charset="0"/>
+                <a:ea typeface="Consolas" pitchFamily="34" charset="-122"/>
+                <a:cs typeface="Consolas" pitchFamily="34" charset="-120"/>
               </a:rPr>
               <a:t>scanf("%d", &amp;score);
 printf("及格\n");        // 不管考多少分，都打"及格"？
@@ -4923,12 +5273,13 @@
             <a:avLst/>
           </a:prstGeom>
           <a:noFill/>
+          <a:ln/>
         </p:spPr>
         <p:txBody>
           <a:bodyPr wrap="square" rtlCol="0" anchor="t"/>
           <a:lstStyle/>
           <a:p>
-            <a:pPr marL="0" indent="0" algn="l">
+            <a:pPr algn="l" indent="0" marL="0">
               <a:lnSpc>
                 <a:spcPct val="115000"/>
               </a:lnSpc>
@@ -4939,12 +5290,18 @@
                 <a:solidFill>
                   <a:srgbClr val="1F4E9C"/>
                 </a:solidFill>
-                <a:latin typeface="微软雅黑" panose="020B0503020204020204" pitchFamily="34" charset="-122"/>
-                <a:ea typeface="微软雅黑" panose="020B0503020204020204" pitchFamily="34" charset="-122"/>
-                <a:cs typeface="微软雅黑" panose="020B0503020204020204" pitchFamily="34" charset="-120"/>
+                <a:latin typeface="微软雅黑" pitchFamily="34" charset="0"/>
+                <a:ea typeface="微软雅黑" pitchFamily="34" charset="-122"/>
+                <a:cs typeface="微软雅黑" pitchFamily="34" charset="-120"/>
               </a:rPr>
               <a:t>•  </a:t>
             </a:r>
+            <a:pPr algn="l" indent="0" marL="0">
+              <a:lnSpc>
+                <a:spcPct val="115000"/>
+              </a:lnSpc>
+              <a:buNone/>
+            </a:pPr>
             <a:r>
               <a:rPr lang="en-US" sz="1800" dirty="0">
                 <a:solidFill>
@@ -4953,6 +5310,12 @@
               </a:rPr>
               <a:t>现在的程序只会</a:t>
             </a:r>
+            <a:pPr algn="l" indent="0" marL="0">
+              <a:lnSpc>
+                <a:spcPct val="115000"/>
+              </a:lnSpc>
+              <a:buNone/>
+            </a:pPr>
             <a:r>
               <a:rPr lang="en-US" sz="1800" b="1" dirty="0">
                 <a:solidFill>
@@ -4961,6 +5324,12 @@
               </a:rPr>
               <a:t>从上往下</a:t>
             </a:r>
+            <a:pPr algn="l" indent="0" marL="0">
+              <a:lnSpc>
+                <a:spcPct val="115000"/>
+              </a:lnSpc>
+              <a:buNone/>
+            </a:pPr>
             <a:r>
               <a:rPr lang="en-US" sz="1800" dirty="0">
                 <a:solidFill>
@@ -4988,12 +5357,13 @@
             <a:avLst/>
           </a:prstGeom>
           <a:noFill/>
+          <a:ln/>
         </p:spPr>
         <p:txBody>
           <a:bodyPr wrap="square" rtlCol="0" anchor="t"/>
           <a:lstStyle/>
           <a:p>
-            <a:pPr marL="0" indent="0" algn="l">
+            <a:pPr algn="l" indent="0" marL="0">
               <a:lnSpc>
                 <a:spcPct val="115000"/>
               </a:lnSpc>
@@ -5004,12 +5374,18 @@
                 <a:solidFill>
                   <a:srgbClr val="1F4E9C"/>
                 </a:solidFill>
-                <a:latin typeface="微软雅黑" panose="020B0503020204020204" pitchFamily="34" charset="-122"/>
-                <a:ea typeface="微软雅黑" panose="020B0503020204020204" pitchFamily="34" charset="-122"/>
-                <a:cs typeface="微软雅黑" panose="020B0503020204020204" pitchFamily="34" charset="-120"/>
+                <a:latin typeface="微软雅黑" pitchFamily="34" charset="0"/>
+                <a:ea typeface="微软雅黑" pitchFamily="34" charset="-122"/>
+                <a:cs typeface="微软雅黑" pitchFamily="34" charset="-120"/>
               </a:rPr>
               <a:t>•  </a:t>
             </a:r>
+            <a:pPr algn="l" indent="0" marL="0">
+              <a:lnSpc>
+                <a:spcPct val="115000"/>
+              </a:lnSpc>
+              <a:buNone/>
+            </a:pPr>
             <a:r>
               <a:rPr lang="en-US" sz="1800" dirty="0">
                 <a:solidFill>
@@ -5018,6 +5394,12 @@
               </a:rPr>
               <a:t>但真实问题要</a:t>
             </a:r>
+            <a:pPr algn="l" indent="0" marL="0">
+              <a:lnSpc>
+                <a:spcPct val="115000"/>
+              </a:lnSpc>
+              <a:buNone/>
+            </a:pPr>
             <a:r>
               <a:rPr lang="en-US" sz="1800" b="1" dirty="0">
                 <a:solidFill>
@@ -5026,6 +5408,12 @@
               </a:rPr>
               <a:t>判断</a:t>
             </a:r>
+            <a:pPr algn="l" indent="0" marL="0">
+              <a:lnSpc>
+                <a:spcPct val="115000"/>
+              </a:lnSpc>
+              <a:buNone/>
+            </a:pPr>
             <a:r>
               <a:rPr lang="en-US" sz="1800" dirty="0">
                 <a:solidFill>
@@ -5053,12 +5441,13 @@
             <a:avLst/>
           </a:prstGeom>
           <a:noFill/>
+          <a:ln/>
         </p:spPr>
         <p:txBody>
           <a:bodyPr wrap="square" rtlCol="0" anchor="t"/>
           <a:lstStyle/>
           <a:p>
-            <a:pPr marL="0" indent="0" algn="l">
+            <a:pPr algn="l" indent="0" marL="0">
               <a:lnSpc>
                 <a:spcPct val="115000"/>
               </a:lnSpc>
@@ -5069,12 +5458,18 @@
                 <a:solidFill>
                   <a:srgbClr val="1F4E9C"/>
                 </a:solidFill>
-                <a:latin typeface="微软雅黑" panose="020B0503020204020204" pitchFamily="34" charset="-122"/>
-                <a:ea typeface="微软雅黑" panose="020B0503020204020204" pitchFamily="34" charset="-122"/>
-                <a:cs typeface="微软雅黑" panose="020B0503020204020204" pitchFamily="34" charset="-120"/>
+                <a:latin typeface="微软雅黑" pitchFamily="34" charset="0"/>
+                <a:ea typeface="微软雅黑" pitchFamily="34" charset="-122"/>
+                <a:cs typeface="微软雅黑" pitchFamily="34" charset="-120"/>
               </a:rPr>
               <a:t>•  </a:t>
             </a:r>
+            <a:pPr algn="l" indent="0" marL="0">
+              <a:lnSpc>
+                <a:spcPct val="115000"/>
+              </a:lnSpc>
+              <a:buNone/>
+            </a:pPr>
             <a:r>
               <a:rPr lang="en-US" sz="1800" dirty="0">
                 <a:solidFill>
@@ -5083,6 +5478,12 @@
               </a:rPr>
               <a:t>还要</a:t>
             </a:r>
+            <a:pPr algn="l" indent="0" marL="0">
+              <a:lnSpc>
+                <a:spcPct val="115000"/>
+              </a:lnSpc>
+              <a:buNone/>
+            </a:pPr>
             <a:r>
               <a:rPr lang="en-US" sz="1800" b="1" dirty="0">
                 <a:solidFill>
@@ -5091,6 +5492,12 @@
               </a:rPr>
               <a:t>重复</a:t>
             </a:r>
+            <a:pPr algn="l" indent="0" marL="0">
+              <a:lnSpc>
+                <a:spcPct val="115000"/>
+              </a:lnSpc>
+              <a:buNone/>
+            </a:pPr>
             <a:r>
               <a:rPr lang="en-US" sz="1800" dirty="0">
                 <a:solidFill>
@@ -5118,12 +5525,13 @@
             <a:avLst/>
           </a:prstGeom>
           <a:noFill/>
+          <a:ln/>
         </p:spPr>
         <p:txBody>
           <a:bodyPr wrap="square" rtlCol="0" anchor="t"/>
           <a:lstStyle/>
           <a:p>
-            <a:pPr marL="0" indent="0" algn="l">
+            <a:pPr algn="l" indent="0" marL="0">
               <a:lnSpc>
                 <a:spcPct val="115000"/>
               </a:lnSpc>
@@ -5134,12 +5542,18 @@
                 <a:solidFill>
                   <a:srgbClr val="1F4E9C"/>
                 </a:solidFill>
-                <a:latin typeface="微软雅黑" panose="020B0503020204020204" pitchFamily="34" charset="-122"/>
-                <a:ea typeface="微软雅黑" panose="020B0503020204020204" pitchFamily="34" charset="-122"/>
-                <a:cs typeface="微软雅黑" panose="020B0503020204020204" pitchFamily="34" charset="-120"/>
+                <a:latin typeface="微软雅黑" pitchFamily="34" charset="0"/>
+                <a:ea typeface="微软雅黑" pitchFamily="34" charset="-122"/>
+                <a:cs typeface="微软雅黑" pitchFamily="34" charset="-120"/>
               </a:rPr>
               <a:t>•  </a:t>
             </a:r>
+            <a:pPr algn="l" indent="0" marL="0">
+              <a:lnSpc>
+                <a:spcPct val="115000"/>
+              </a:lnSpc>
+              <a:buNone/>
+            </a:pPr>
             <a:r>
               <a:rPr lang="en-US" sz="1800" dirty="0">
                 <a:solidFill>
@@ -5148,6 +5562,12 @@
               </a:rPr>
               <a:t>本节目标：学完你能用 </a:t>
             </a:r>
+            <a:pPr algn="l" indent="0" marL="0">
+              <a:lnSpc>
+                <a:spcPct val="115000"/>
+              </a:lnSpc>
+              <a:buNone/>
+            </a:pPr>
             <a:r>
               <a:rPr lang="en-US" sz="1800" b="1" dirty="0">
                 <a:solidFill>
@@ -5170,7 +5590,7 @@
 
 <file path=ppt/slides/slide3.xml><?xml version="1.0" encoding="utf-8"?>
 <p:sld xmlns:a="http://schemas.openxmlformats.org/drawingml/2006/main" xmlns:r="http://schemas.openxmlformats.org/officeDocument/2006/relationships" xmlns:p="http://schemas.openxmlformats.org/presentationml/2006/main">
-  <p:cSld>
+  <p:cSld name="Slide 3">
     <p:bg>
       <p:bgPr>
         <a:blipFill dpi="0" rotWithShape="1">
@@ -5214,12 +5634,13 @@
             <a:avLst/>
           </a:prstGeom>
           <a:noFill/>
+          <a:ln/>
         </p:spPr>
         <p:txBody>
           <a:bodyPr wrap="square" rtlCol="0" anchor="ctr"/>
           <a:lstStyle/>
           <a:p>
-            <a:pPr marL="0" indent="0" algn="r">
+            <a:pPr algn="r" indent="0" marL="0">
               <a:buNone/>
             </a:pPr>
             <a:r>
@@ -5227,9 +5648,9 @@
                 <a:solidFill>
                   <a:srgbClr val="8A9099"/>
                 </a:solidFill>
-                <a:latin typeface="微软雅黑" panose="020B0503020204020204" pitchFamily="34" charset="-122"/>
-                <a:ea typeface="微软雅黑" panose="020B0503020204020204" pitchFamily="34" charset="-122"/>
-                <a:cs typeface="微软雅黑" panose="020B0503020204020204" pitchFamily="34" charset="-120"/>
+                <a:latin typeface="微软雅黑" pitchFamily="34" charset="0"/>
+                <a:ea typeface="微软雅黑" pitchFamily="34" charset="-122"/>
+                <a:cs typeface="微软雅黑" pitchFamily="34" charset="-120"/>
               </a:rPr>
               <a:t>3 / 16</a:t>
             </a:r>
@@ -5252,12 +5673,13 @@
             <a:avLst/>
           </a:prstGeom>
           <a:noFill/>
+          <a:ln/>
         </p:spPr>
         <p:txBody>
           <a:bodyPr wrap="square" rtlCol="0" anchor="ctr"/>
           <a:lstStyle/>
           <a:p>
-            <a:pPr marL="0" indent="0" algn="l">
+            <a:pPr algn="l" indent="0" marL="0">
               <a:buNone/>
             </a:pPr>
             <a:r>
@@ -5265,9 +5687,9 @@
                 <a:solidFill>
                   <a:srgbClr val="1F4E9C"/>
                 </a:solidFill>
-                <a:latin typeface="微软雅黑" panose="020B0503020204020204" pitchFamily="34" charset="-122"/>
-                <a:ea typeface="微软雅黑" panose="020B0503020204020204" pitchFamily="34" charset="-122"/>
-                <a:cs typeface="微软雅黑" panose="020B0503020204020204" pitchFamily="34" charset="-120"/>
+                <a:latin typeface="微软雅黑" pitchFamily="34" charset="0"/>
+                <a:ea typeface="微软雅黑" pitchFamily="34" charset="-122"/>
+                <a:cs typeface="微软雅黑" pitchFamily="34" charset="-120"/>
               </a:rPr>
               <a:t>分支：if</a:t>
             </a:r>
@@ -5290,12 +5712,13 @@
             <a:avLst/>
           </a:prstGeom>
           <a:noFill/>
+          <a:ln/>
         </p:spPr>
         <p:txBody>
           <a:bodyPr wrap="square" rtlCol="0" anchor="ctr"/>
           <a:lstStyle/>
           <a:p>
-            <a:pPr marL="0" indent="0" algn="l">
+            <a:pPr algn="l" indent="0" marL="0">
               <a:buNone/>
             </a:pPr>
             <a:r>
@@ -5303,9 +5726,9 @@
                 <a:solidFill>
                   <a:srgbClr val="1F2329"/>
                 </a:solidFill>
-                <a:latin typeface="微软雅黑" panose="020B0503020204020204" pitchFamily="34" charset="-122"/>
-                <a:ea typeface="微软雅黑" panose="020B0503020204020204" pitchFamily="34" charset="-122"/>
-                <a:cs typeface="微软雅黑" panose="020B0503020204020204" pitchFamily="34" charset="-120"/>
+                <a:latin typeface="微软雅黑" pitchFamily="34" charset="0"/>
+                <a:ea typeface="微软雅黑" pitchFamily="34" charset="-122"/>
+                <a:cs typeface="微软雅黑" pitchFamily="34" charset="-120"/>
               </a:rPr>
               <a:t>最简单的判断：if</a:t>
             </a:r>
@@ -5353,12 +5776,13 @@
             <a:avLst/>
           </a:prstGeom>
           <a:noFill/>
+          <a:ln/>
         </p:spPr>
         <p:txBody>
           <a:bodyPr wrap="square" rtlCol="0" anchor="t"/>
           <a:lstStyle/>
           <a:p>
-            <a:pPr marL="0" indent="0" algn="l">
+            <a:pPr algn="l" indent="0" marL="0">
               <a:lnSpc>
                 <a:spcPct val="125000"/>
               </a:lnSpc>
@@ -5369,9 +5793,9 @@
                 <a:solidFill>
                   <a:srgbClr val="1F2329"/>
                 </a:solidFill>
-                <a:latin typeface="Consolas" panose="020B0609020204030204" pitchFamily="34" charset="0"/>
-                <a:ea typeface="Consolas" panose="020B0609020204030204" pitchFamily="34" charset="-122"/>
-                <a:cs typeface="Consolas" panose="020B0609020204030204" pitchFamily="34" charset="-120"/>
+                <a:latin typeface="Consolas" pitchFamily="34" charset="0"/>
+                <a:ea typeface="Consolas" pitchFamily="34" charset="-122"/>
+                <a:cs typeface="Consolas" pitchFamily="34" charset="-120"/>
               </a:rPr>
               <a:t>if(score &gt;= 60){
     printf("及格\n");
@@ -5397,12 +5821,13 @@
             <a:avLst/>
           </a:prstGeom>
           <a:noFill/>
+          <a:ln/>
         </p:spPr>
         <p:txBody>
           <a:bodyPr wrap="square" rtlCol="0" anchor="t"/>
           <a:lstStyle/>
           <a:p>
-            <a:pPr marL="0" indent="0" algn="l">
+            <a:pPr algn="l" indent="0" marL="0">
               <a:lnSpc>
                 <a:spcPct val="115000"/>
               </a:lnSpc>
@@ -5413,12 +5838,18 @@
                 <a:solidFill>
                   <a:srgbClr val="1F4E9C"/>
                 </a:solidFill>
-                <a:latin typeface="微软雅黑" panose="020B0503020204020204" pitchFamily="34" charset="-122"/>
-                <a:ea typeface="微软雅黑" panose="020B0503020204020204" pitchFamily="34" charset="-122"/>
-                <a:cs typeface="微软雅黑" panose="020B0503020204020204" pitchFamily="34" charset="-120"/>
+                <a:latin typeface="微软雅黑" pitchFamily="34" charset="0"/>
+                <a:ea typeface="微软雅黑" pitchFamily="34" charset="-122"/>
+                <a:cs typeface="微软雅黑" pitchFamily="34" charset="-120"/>
               </a:rPr>
               <a:t>•  </a:t>
             </a:r>
+            <a:pPr algn="l" indent="0" marL="0">
+              <a:lnSpc>
+                <a:spcPct val="115000"/>
+              </a:lnSpc>
+              <a:buNone/>
+            </a:pPr>
             <a:r>
               <a:rPr lang="en-US" sz="1800" dirty="0">
                 <a:solidFill>
@@ -5427,6 +5858,12 @@
               </a:rPr>
               <a:t>读法：</a:t>
             </a:r>
+            <a:pPr algn="l" indent="0" marL="0">
+              <a:lnSpc>
+                <a:spcPct val="115000"/>
+              </a:lnSpc>
+              <a:buNone/>
+            </a:pPr>
             <a:r>
               <a:rPr lang="en-US" sz="1800" b="1" dirty="0">
                 <a:solidFill>
@@ -5435,6 +5872,12 @@
               </a:rPr>
               <a:t>如果</a:t>
             </a:r>
+            <a:pPr algn="l" indent="0" marL="0">
+              <a:lnSpc>
+                <a:spcPct val="115000"/>
+              </a:lnSpc>
+              <a:buNone/>
+            </a:pPr>
             <a:r>
               <a:rPr lang="en-US" sz="1800" dirty="0">
                 <a:solidFill>
@@ -5443,6 +5886,12 @@
               </a:rPr>
               <a:t>条件成立，</a:t>
             </a:r>
+            <a:pPr algn="l" indent="0" marL="0">
+              <a:lnSpc>
+                <a:spcPct val="115000"/>
+              </a:lnSpc>
+              <a:buNone/>
+            </a:pPr>
             <a:r>
               <a:rPr lang="en-US" sz="1800" b="1" dirty="0">
                 <a:solidFill>
@@ -5451,6 +5900,12 @@
               </a:rPr>
               <a:t>就</a:t>
             </a:r>
+            <a:pPr algn="l" indent="0" marL="0">
+              <a:lnSpc>
+                <a:spcPct val="115000"/>
+              </a:lnSpc>
+              <a:buNone/>
+            </a:pPr>
             <a:r>
               <a:rPr lang="en-US" sz="1800" dirty="0">
                 <a:solidFill>
@@ -5478,12 +5933,13 @@
             <a:avLst/>
           </a:prstGeom>
           <a:noFill/>
+          <a:ln/>
         </p:spPr>
         <p:txBody>
           <a:bodyPr wrap="square" rtlCol="0" anchor="t"/>
           <a:lstStyle/>
           <a:p>
-            <a:pPr marL="0" indent="0" algn="l">
+            <a:pPr algn="l" indent="0" marL="0">
               <a:lnSpc>
                 <a:spcPct val="115000"/>
               </a:lnSpc>
@@ -5494,12 +5950,18 @@
                 <a:solidFill>
                   <a:srgbClr val="1F4E9C"/>
                 </a:solidFill>
-                <a:latin typeface="微软雅黑" panose="020B0503020204020204" pitchFamily="34" charset="-122"/>
-                <a:ea typeface="微软雅黑" panose="020B0503020204020204" pitchFamily="34" charset="-122"/>
-                <a:cs typeface="微软雅黑" panose="020B0503020204020204" pitchFamily="34" charset="-120"/>
+                <a:latin typeface="微软雅黑" pitchFamily="34" charset="0"/>
+                <a:ea typeface="微软雅黑" pitchFamily="34" charset="-122"/>
+                <a:cs typeface="微软雅黑" pitchFamily="34" charset="-120"/>
               </a:rPr>
               <a:t>•  </a:t>
             </a:r>
+            <a:pPr algn="l" indent="0" marL="0">
+              <a:lnSpc>
+                <a:spcPct val="115000"/>
+              </a:lnSpc>
+              <a:buNone/>
+            </a:pPr>
             <a:r>
               <a:rPr lang="en-US" sz="1800" dirty="0">
                 <a:solidFill>
@@ -5527,12 +5989,13 @@
             <a:avLst/>
           </a:prstGeom>
           <a:noFill/>
+          <a:ln/>
         </p:spPr>
         <p:txBody>
           <a:bodyPr wrap="square" rtlCol="0" anchor="t"/>
           <a:lstStyle/>
           <a:p>
-            <a:pPr marL="0" indent="0" algn="l">
+            <a:pPr algn="l" indent="0" marL="0">
               <a:lnSpc>
                 <a:spcPct val="115000"/>
               </a:lnSpc>
@@ -5543,12 +6006,18 @@
                 <a:solidFill>
                   <a:srgbClr val="1F4E9C"/>
                 </a:solidFill>
-                <a:latin typeface="微软雅黑" panose="020B0503020204020204" pitchFamily="34" charset="-122"/>
-                <a:ea typeface="微软雅黑" panose="020B0503020204020204" pitchFamily="34" charset="-122"/>
-                <a:cs typeface="微软雅黑" panose="020B0503020204020204" pitchFamily="34" charset="-120"/>
+                <a:latin typeface="微软雅黑" pitchFamily="34" charset="0"/>
+                <a:ea typeface="微软雅黑" pitchFamily="34" charset="-122"/>
+                <a:cs typeface="微软雅黑" pitchFamily="34" charset="-120"/>
               </a:rPr>
               <a:t>•  </a:t>
             </a:r>
+            <a:pPr algn="l" indent="0" marL="0">
+              <a:lnSpc>
+                <a:spcPct val="115000"/>
+              </a:lnSpc>
+              <a:buNone/>
+            </a:pPr>
             <a:r>
               <a:rPr lang="en-US" sz="1800" dirty="0">
                 <a:solidFill>
@@ -5557,6 +6026,12 @@
               </a:rPr>
               <a:t>条件不成立，花括号里的内容</a:t>
             </a:r>
+            <a:pPr algn="l" indent="0" marL="0">
+              <a:lnSpc>
+                <a:spcPct val="115000"/>
+              </a:lnSpc>
+              <a:buNone/>
+            </a:pPr>
             <a:r>
               <a:rPr lang="en-US" sz="1800" b="1" dirty="0">
                 <a:solidFill>
@@ -5584,12 +6059,13 @@
             <a:avLst/>
           </a:prstGeom>
           <a:noFill/>
+          <a:ln/>
         </p:spPr>
         <p:txBody>
           <a:bodyPr wrap="square" rtlCol="0" anchor="t"/>
           <a:lstStyle/>
           <a:p>
-            <a:pPr marL="0" indent="0" algn="l">
+            <a:pPr algn="l" indent="0" marL="0">
               <a:lnSpc>
                 <a:spcPct val="115000"/>
               </a:lnSpc>
@@ -5600,12 +6076,18 @@
                 <a:solidFill>
                   <a:srgbClr val="1F4E9C"/>
                 </a:solidFill>
-                <a:latin typeface="微软雅黑" panose="020B0503020204020204" pitchFamily="34" charset="-122"/>
-                <a:ea typeface="微软雅黑" panose="020B0503020204020204" pitchFamily="34" charset="-122"/>
-                <a:cs typeface="微软雅黑" panose="020B0503020204020204" pitchFamily="34" charset="-120"/>
+                <a:latin typeface="微软雅黑" pitchFamily="34" charset="0"/>
+                <a:ea typeface="微软雅黑" pitchFamily="34" charset="-122"/>
+                <a:cs typeface="微软雅黑" pitchFamily="34" charset="-120"/>
               </a:rPr>
               <a:t>•  </a:t>
             </a:r>
+            <a:pPr algn="l" indent="0" marL="0">
+              <a:lnSpc>
+                <a:spcPct val="115000"/>
+              </a:lnSpc>
+              <a:buNone/>
+            </a:pPr>
             <a:r>
               <a:rPr lang="en-US" sz="1800" dirty="0">
                 <a:solidFill>
@@ -5628,7 +6110,7 @@
 
 <file path=ppt/slides/slide4.xml><?xml version="1.0" encoding="utf-8"?>
 <p:sld xmlns:a="http://schemas.openxmlformats.org/drawingml/2006/main" xmlns:r="http://schemas.openxmlformats.org/officeDocument/2006/relationships" xmlns:p="http://schemas.openxmlformats.org/presentationml/2006/main">
-  <p:cSld>
+  <p:cSld name="Slide 4">
     <p:bg>
       <p:bgPr>
         <a:blipFill dpi="0" rotWithShape="1">
@@ -5672,12 +6154,13 @@
             <a:avLst/>
           </a:prstGeom>
           <a:noFill/>
+          <a:ln/>
         </p:spPr>
         <p:txBody>
           <a:bodyPr wrap="square" rtlCol="0" anchor="ctr"/>
           <a:lstStyle/>
           <a:p>
-            <a:pPr marL="0" indent="0" algn="r">
+            <a:pPr algn="r" indent="0" marL="0">
               <a:buNone/>
             </a:pPr>
             <a:r>
@@ -5685,9 +6168,9 @@
                 <a:solidFill>
                   <a:srgbClr val="8A9099"/>
                 </a:solidFill>
-                <a:latin typeface="微软雅黑" panose="020B0503020204020204" pitchFamily="34" charset="-122"/>
-                <a:ea typeface="微软雅黑" panose="020B0503020204020204" pitchFamily="34" charset="-122"/>
-                <a:cs typeface="微软雅黑" panose="020B0503020204020204" pitchFamily="34" charset="-120"/>
+                <a:latin typeface="微软雅黑" pitchFamily="34" charset="0"/>
+                <a:ea typeface="微软雅黑" pitchFamily="34" charset="-122"/>
+                <a:cs typeface="微软雅黑" pitchFamily="34" charset="-120"/>
               </a:rPr>
               <a:t>4 / 16</a:t>
             </a:r>
@@ -5710,12 +6193,13 @@
             <a:avLst/>
           </a:prstGeom>
           <a:noFill/>
+          <a:ln/>
         </p:spPr>
         <p:txBody>
           <a:bodyPr wrap="square" rtlCol="0" anchor="ctr"/>
           <a:lstStyle/>
           <a:p>
-            <a:pPr marL="0" indent="0" algn="l">
+            <a:pPr algn="l" indent="0" marL="0">
               <a:buNone/>
             </a:pPr>
             <a:r>
@@ -5723,9 +6207,9 @@
                 <a:solidFill>
                   <a:srgbClr val="1F4E9C"/>
                 </a:solidFill>
-                <a:latin typeface="微软雅黑" panose="020B0503020204020204" pitchFamily="34" charset="-122"/>
-                <a:ea typeface="微软雅黑" panose="020B0503020204020204" pitchFamily="34" charset="-122"/>
-                <a:cs typeface="微软雅黑" panose="020B0503020204020204" pitchFamily="34" charset="-120"/>
+                <a:latin typeface="微软雅黑" pitchFamily="34" charset="0"/>
+                <a:ea typeface="微软雅黑" pitchFamily="34" charset="-122"/>
+                <a:cs typeface="微软雅黑" pitchFamily="34" charset="-120"/>
               </a:rPr>
               <a:t>分支：if-else</a:t>
             </a:r>
@@ -5748,12 +6232,13 @@
             <a:avLst/>
           </a:prstGeom>
           <a:noFill/>
+          <a:ln/>
         </p:spPr>
         <p:txBody>
           <a:bodyPr wrap="square" rtlCol="0" anchor="ctr"/>
           <a:lstStyle/>
           <a:p>
-            <a:pPr marL="0" indent="0" algn="l">
+            <a:pPr algn="l" indent="0" marL="0">
               <a:buNone/>
             </a:pPr>
             <a:r>
@@ -5761,9 +6246,9 @@
                 <a:solidFill>
                   <a:srgbClr val="1F2329"/>
                 </a:solidFill>
-                <a:latin typeface="微软雅黑" panose="020B0503020204020204" pitchFamily="34" charset="-122"/>
-                <a:ea typeface="微软雅黑" panose="020B0503020204020204" pitchFamily="34" charset="-122"/>
-                <a:cs typeface="微软雅黑" panose="020B0503020204020204" pitchFamily="34" charset="-120"/>
+                <a:latin typeface="微软雅黑" pitchFamily="34" charset="0"/>
+                <a:ea typeface="微软雅黑" pitchFamily="34" charset="-122"/>
+                <a:cs typeface="微软雅黑" pitchFamily="34" charset="-120"/>
               </a:rPr>
               <a:t>两条路：if-else</a:t>
             </a:r>
@@ -5811,12 +6296,13 @@
             <a:avLst/>
           </a:prstGeom>
           <a:noFill/>
+          <a:ln/>
         </p:spPr>
         <p:txBody>
           <a:bodyPr wrap="square" rtlCol="0" anchor="t"/>
           <a:lstStyle/>
           <a:p>
-            <a:pPr marL="0" indent="0" algn="l">
+            <a:pPr algn="l" indent="0" marL="0">
               <a:lnSpc>
                 <a:spcPct val="125000"/>
               </a:lnSpc>
@@ -5827,9 +6313,9 @@
                 <a:solidFill>
                   <a:srgbClr val="1F2329"/>
                 </a:solidFill>
-                <a:latin typeface="Consolas" panose="020B0609020204030204" pitchFamily="34" charset="0"/>
-                <a:ea typeface="Consolas" panose="020B0609020204030204" pitchFamily="34" charset="-122"/>
-                <a:cs typeface="Consolas" panose="020B0609020204030204" pitchFamily="34" charset="-120"/>
+                <a:latin typeface="Consolas" pitchFamily="34" charset="0"/>
+                <a:ea typeface="Consolas" pitchFamily="34" charset="-122"/>
+                <a:cs typeface="Consolas" pitchFamily="34" charset="-120"/>
               </a:rPr>
               <a:t>if(score &gt;= 60){
     printf("及格\n");
@@ -5857,12 +6343,13 @@
             <a:avLst/>
           </a:prstGeom>
           <a:noFill/>
+          <a:ln/>
         </p:spPr>
         <p:txBody>
           <a:bodyPr wrap="square" rtlCol="0" anchor="t"/>
           <a:lstStyle/>
           <a:p>
-            <a:pPr marL="0" indent="0" algn="l">
+            <a:pPr algn="l" indent="0" marL="0">
               <a:lnSpc>
                 <a:spcPct val="115000"/>
               </a:lnSpc>
@@ -5873,12 +6360,18 @@
                 <a:solidFill>
                   <a:srgbClr val="1F4E9C"/>
                 </a:solidFill>
-                <a:latin typeface="微软雅黑" panose="020B0503020204020204" pitchFamily="34" charset="-122"/>
-                <a:ea typeface="微软雅黑" panose="020B0503020204020204" pitchFamily="34" charset="-122"/>
-                <a:cs typeface="微软雅黑" panose="020B0503020204020204" pitchFamily="34" charset="-120"/>
+                <a:latin typeface="微软雅黑" pitchFamily="34" charset="0"/>
+                <a:ea typeface="微软雅黑" pitchFamily="34" charset="-122"/>
+                <a:cs typeface="微软雅黑" pitchFamily="34" charset="-120"/>
               </a:rPr>
               <a:t>•  </a:t>
             </a:r>
+            <a:pPr algn="l" indent="0" marL="0">
+              <a:lnSpc>
+                <a:spcPct val="115000"/>
+              </a:lnSpc>
+              <a:buNone/>
+            </a:pPr>
             <a:r>
               <a:rPr lang="en-US" sz="1800" dirty="0">
                 <a:solidFill>
@@ -5887,6 +6380,12 @@
               </a:rPr>
               <a:t>条件成立走if，不成立走else，</a:t>
             </a:r>
+            <a:pPr algn="l" indent="0" marL="0">
+              <a:lnSpc>
+                <a:spcPct val="115000"/>
+              </a:lnSpc>
+              <a:buNone/>
+            </a:pPr>
             <a:r>
               <a:rPr lang="en-US" sz="1800" b="1" dirty="0">
                 <a:solidFill>
@@ -5914,12 +6413,13 @@
             <a:avLst/>
           </a:prstGeom>
           <a:noFill/>
+          <a:ln/>
         </p:spPr>
         <p:txBody>
           <a:bodyPr wrap="square" rtlCol="0" anchor="t"/>
           <a:lstStyle/>
           <a:p>
-            <a:pPr marL="0" indent="0" algn="l">
+            <a:pPr algn="l" indent="0" marL="0">
               <a:lnSpc>
                 <a:spcPct val="115000"/>
               </a:lnSpc>
@@ -5930,12 +6430,18 @@
                 <a:solidFill>
                   <a:srgbClr val="1F4E9C"/>
                 </a:solidFill>
-                <a:latin typeface="微软雅黑" panose="020B0503020204020204" pitchFamily="34" charset="-122"/>
-                <a:ea typeface="微软雅黑" panose="020B0503020204020204" pitchFamily="34" charset="-122"/>
-                <a:cs typeface="微软雅黑" panose="020B0503020204020204" pitchFamily="34" charset="-120"/>
+                <a:latin typeface="微软雅黑" pitchFamily="34" charset="0"/>
+                <a:ea typeface="微软雅黑" pitchFamily="34" charset="-122"/>
+                <a:cs typeface="微软雅黑" pitchFamily="34" charset="-120"/>
               </a:rPr>
               <a:t>•  </a:t>
             </a:r>
+            <a:pPr algn="l" indent="0" marL="0">
+              <a:lnSpc>
+                <a:spcPct val="115000"/>
+              </a:lnSpc>
+              <a:buNone/>
+            </a:pPr>
             <a:r>
               <a:rPr lang="en-US" sz="1800" dirty="0">
                 <a:solidFill>
@@ -5944,6 +6450,12 @@
               </a:rPr>
               <a:t>else后面</a:t>
             </a:r>
+            <a:pPr algn="l" indent="0" marL="0">
+              <a:lnSpc>
+                <a:spcPct val="115000"/>
+              </a:lnSpc>
+              <a:buNone/>
+            </a:pPr>
             <a:r>
               <a:rPr lang="en-US" sz="1800" b="1" dirty="0">
                 <a:solidFill>
@@ -5952,6 +6464,12 @@
               </a:rPr>
               <a:t>不写条件</a:t>
             </a:r>
+            <a:pPr algn="l" indent="0" marL="0">
+              <a:lnSpc>
+                <a:spcPct val="115000"/>
+              </a:lnSpc>
+              <a:buNone/>
+            </a:pPr>
             <a:r>
               <a:rPr lang="en-US" sz="1800" dirty="0">
                 <a:solidFill>
@@ -5979,12 +6497,13 @@
             <a:avLst/>
           </a:prstGeom>
           <a:noFill/>
+          <a:ln/>
         </p:spPr>
         <p:txBody>
           <a:bodyPr wrap="square" rtlCol="0" anchor="t"/>
           <a:lstStyle/>
           <a:p>
-            <a:pPr marL="0" indent="0" algn="l">
+            <a:pPr algn="l" indent="0" marL="0">
               <a:lnSpc>
                 <a:spcPct val="115000"/>
               </a:lnSpc>
@@ -5995,12 +6514,18 @@
                 <a:solidFill>
                   <a:srgbClr val="1F4E9C"/>
                 </a:solidFill>
-                <a:latin typeface="微软雅黑" panose="020B0503020204020204" pitchFamily="34" charset="-122"/>
-                <a:ea typeface="微软雅黑" panose="020B0503020204020204" pitchFamily="34" charset="-122"/>
-                <a:cs typeface="微软雅黑" panose="020B0503020204020204" pitchFamily="34" charset="-120"/>
+                <a:latin typeface="微软雅黑" pitchFamily="34" charset="0"/>
+                <a:ea typeface="微软雅黑" pitchFamily="34" charset="-122"/>
+                <a:cs typeface="微软雅黑" pitchFamily="34" charset="-120"/>
               </a:rPr>
               <a:t>•  </a:t>
             </a:r>
+            <a:pPr algn="l" indent="0" marL="0">
+              <a:lnSpc>
+                <a:spcPct val="115000"/>
+              </a:lnSpc>
+              <a:buNone/>
+            </a:pPr>
             <a:r>
               <a:rPr lang="en-US" sz="1800" dirty="0">
                 <a:solidFill>
@@ -6023,7 +6548,7 @@
 
 <file path=ppt/slides/slide5.xml><?xml version="1.0" encoding="utf-8"?>
 <p:sld xmlns:a="http://schemas.openxmlformats.org/drawingml/2006/main" xmlns:r="http://schemas.openxmlformats.org/officeDocument/2006/relationships" xmlns:p="http://schemas.openxmlformats.org/presentationml/2006/main">
-  <p:cSld>
+  <p:cSld name="Slide 5">
     <p:bg>
       <p:bgPr>
         <a:blipFill dpi="0" rotWithShape="1">
@@ -6067,12 +6592,13 @@
             <a:avLst/>
           </a:prstGeom>
           <a:noFill/>
+          <a:ln/>
         </p:spPr>
         <p:txBody>
           <a:bodyPr wrap="square" rtlCol="0" anchor="ctr"/>
           <a:lstStyle/>
           <a:p>
-            <a:pPr marL="0" indent="0" algn="r">
+            <a:pPr algn="r" indent="0" marL="0">
               <a:buNone/>
             </a:pPr>
             <a:r>
@@ -6080,9 +6606,9 @@
                 <a:solidFill>
                   <a:srgbClr val="8A9099"/>
                 </a:solidFill>
-                <a:latin typeface="微软雅黑" panose="020B0503020204020204" pitchFamily="34" charset="-122"/>
-                <a:ea typeface="微软雅黑" panose="020B0503020204020204" pitchFamily="34" charset="-122"/>
-                <a:cs typeface="微软雅黑" panose="020B0503020204020204" pitchFamily="34" charset="-120"/>
+                <a:latin typeface="微软雅黑" pitchFamily="34" charset="0"/>
+                <a:ea typeface="微软雅黑" pitchFamily="34" charset="-122"/>
+                <a:cs typeface="微软雅黑" pitchFamily="34" charset="-120"/>
               </a:rPr>
               <a:t>5 / 16</a:t>
             </a:r>
@@ -6105,12 +6631,13 @@
             <a:avLst/>
           </a:prstGeom>
           <a:noFill/>
+          <a:ln/>
         </p:spPr>
         <p:txBody>
           <a:bodyPr wrap="square" rtlCol="0" anchor="ctr"/>
           <a:lstStyle/>
           <a:p>
-            <a:pPr marL="0" indent="0" algn="l">
+            <a:pPr algn="l" indent="0" marL="0">
               <a:buNone/>
             </a:pPr>
             <a:r>
@@ -6118,9 +6645,9 @@
                 <a:solidFill>
                   <a:srgbClr val="1F4E9C"/>
                 </a:solidFill>
-                <a:latin typeface="微软雅黑" panose="020B0503020204020204" pitchFamily="34" charset="-122"/>
-                <a:ea typeface="微软雅黑" panose="020B0503020204020204" pitchFamily="34" charset="-122"/>
-                <a:cs typeface="微软雅黑" panose="020B0503020204020204" pitchFamily="34" charset="-120"/>
+                <a:latin typeface="微软雅黑" pitchFamily="34" charset="0"/>
+                <a:ea typeface="微软雅黑" pitchFamily="34" charset="-122"/>
+                <a:cs typeface="微软雅黑" pitchFamily="34" charset="-120"/>
               </a:rPr>
               <a:t>分支：else if</a:t>
             </a:r>
@@ -6143,12 +6670,13 @@
             <a:avLst/>
           </a:prstGeom>
           <a:noFill/>
+          <a:ln/>
         </p:spPr>
         <p:txBody>
           <a:bodyPr wrap="square" rtlCol="0" anchor="ctr"/>
           <a:lstStyle/>
           <a:p>
-            <a:pPr marL="0" indent="0" algn="l">
+            <a:pPr algn="l" indent="0" marL="0">
               <a:buNone/>
             </a:pPr>
             <a:r>
@@ -6156,9 +6684,9 @@
                 <a:solidFill>
                   <a:srgbClr val="1F2329"/>
                 </a:solidFill>
-                <a:latin typeface="微软雅黑" panose="020B0503020204020204" pitchFamily="34" charset="-122"/>
-                <a:ea typeface="微软雅黑" panose="020B0503020204020204" pitchFamily="34" charset="-122"/>
-                <a:cs typeface="微软雅黑" panose="020B0503020204020204" pitchFamily="34" charset="-120"/>
+                <a:latin typeface="微软雅黑" pitchFamily="34" charset="0"/>
+                <a:ea typeface="微软雅黑" pitchFamily="34" charset="-122"/>
+                <a:cs typeface="微软雅黑" pitchFamily="34" charset="-120"/>
               </a:rPr>
               <a:t>多条路：else if</a:t>
             </a:r>
@@ -6206,12 +6734,13 @@
             <a:avLst/>
           </a:prstGeom>
           <a:noFill/>
+          <a:ln/>
         </p:spPr>
         <p:txBody>
           <a:bodyPr wrap="square" rtlCol="0" anchor="t"/>
           <a:lstStyle/>
           <a:p>
-            <a:pPr marL="0" indent="0" algn="l">
+            <a:pPr algn="l" indent="0" marL="0">
               <a:lnSpc>
                 <a:spcPct val="125000"/>
               </a:lnSpc>
@@ -6222,9 +6751,9 @@
                 <a:solidFill>
                   <a:srgbClr val="1F2329"/>
                 </a:solidFill>
-                <a:latin typeface="Consolas" panose="020B0609020204030204" pitchFamily="34" charset="0"/>
-                <a:ea typeface="Consolas" panose="020B0609020204030204" pitchFamily="34" charset="-122"/>
-                <a:cs typeface="Consolas" panose="020B0609020204030204" pitchFamily="34" charset="-120"/>
+                <a:latin typeface="Consolas" pitchFamily="34" charset="0"/>
+                <a:ea typeface="Consolas" pitchFamily="34" charset="-122"/>
+                <a:cs typeface="Consolas" pitchFamily="34" charset="-120"/>
               </a:rPr>
               <a:t>if(score &gt;= 90){
     printf("优秀\n");
@@ -6254,12 +6783,13 @@
             <a:avLst/>
           </a:prstGeom>
           <a:noFill/>
+          <a:ln/>
         </p:spPr>
         <p:txBody>
           <a:bodyPr wrap="square" rtlCol="0" anchor="t"/>
           <a:lstStyle/>
           <a:p>
-            <a:pPr marL="0" indent="0" algn="l">
+            <a:pPr algn="l" indent="0" marL="0">
               <a:lnSpc>
                 <a:spcPct val="115000"/>
               </a:lnSpc>
@@ -6270,12 +6800,18 @@
                 <a:solidFill>
                   <a:srgbClr val="1F4E9C"/>
                 </a:solidFill>
-                <a:latin typeface="微软雅黑" panose="020B0503020204020204" pitchFamily="34" charset="-122"/>
-                <a:ea typeface="微软雅黑" panose="020B0503020204020204" pitchFamily="34" charset="-122"/>
-                <a:cs typeface="微软雅黑" panose="020B0503020204020204" pitchFamily="34" charset="-120"/>
+                <a:latin typeface="微软雅黑" pitchFamily="34" charset="0"/>
+                <a:ea typeface="微软雅黑" pitchFamily="34" charset="-122"/>
+                <a:cs typeface="微软雅黑" pitchFamily="34" charset="-120"/>
               </a:rPr>
               <a:t>•  </a:t>
             </a:r>
+            <a:pPr algn="l" indent="0" marL="0">
+              <a:lnSpc>
+                <a:spcPct val="115000"/>
+              </a:lnSpc>
+              <a:buNone/>
+            </a:pPr>
             <a:r>
               <a:rPr lang="en-US" sz="1700" dirty="0">
                 <a:solidFill>
@@ -6284,6 +6820,12 @@
               </a:rPr>
               <a:t>从上往下逐个判断，</a:t>
             </a:r>
+            <a:pPr algn="l" indent="0" marL="0">
+              <a:lnSpc>
+                <a:spcPct val="115000"/>
+              </a:lnSpc>
+              <a:buNone/>
+            </a:pPr>
             <a:r>
               <a:rPr lang="en-US" sz="1700" b="1" dirty="0">
                 <a:solidFill>
@@ -6292,6 +6834,12 @@
               </a:rPr>
               <a:t>命中一个就停</a:t>
             </a:r>
+            <a:pPr algn="l" indent="0" marL="0">
+              <a:lnSpc>
+                <a:spcPct val="115000"/>
+              </a:lnSpc>
+              <a:buNone/>
+            </a:pPr>
             <a:r>
               <a:rPr lang="en-US" sz="1700" dirty="0">
                 <a:solidFill>
@@ -6319,12 +6867,13 @@
             <a:avLst/>
           </a:prstGeom>
           <a:noFill/>
+          <a:ln/>
         </p:spPr>
         <p:txBody>
           <a:bodyPr wrap="square" rtlCol="0" anchor="t"/>
           <a:lstStyle/>
           <a:p>
-            <a:pPr marL="0" indent="0" algn="l">
+            <a:pPr algn="l" indent="0" marL="0">
               <a:lnSpc>
                 <a:spcPct val="115000"/>
               </a:lnSpc>
@@ -6335,12 +6884,18 @@
                 <a:solidFill>
                   <a:srgbClr val="1F4E9C"/>
                 </a:solidFill>
-                <a:latin typeface="微软雅黑" panose="020B0503020204020204" pitchFamily="34" charset="-122"/>
-                <a:ea typeface="微软雅黑" panose="020B0503020204020204" pitchFamily="34" charset="-122"/>
-                <a:cs typeface="微软雅黑" panose="020B0503020204020204" pitchFamily="34" charset="-120"/>
+                <a:latin typeface="微软雅黑" pitchFamily="34" charset="0"/>
+                <a:ea typeface="微软雅黑" pitchFamily="34" charset="-122"/>
+                <a:cs typeface="微软雅黑" pitchFamily="34" charset="-120"/>
               </a:rPr>
               <a:t>•  </a:t>
             </a:r>
+            <a:pPr algn="l" indent="0" marL="0">
+              <a:lnSpc>
+                <a:spcPct val="115000"/>
+              </a:lnSpc>
+              <a:buNone/>
+            </a:pPr>
             <a:r>
               <a:rPr lang="en-US" sz="1700" dirty="0">
                 <a:solidFill>
@@ -6368,12 +6923,13 @@
             <a:avLst/>
           </a:prstGeom>
           <a:noFill/>
+          <a:ln/>
         </p:spPr>
         <p:txBody>
           <a:bodyPr wrap="square" rtlCol="0" anchor="t"/>
           <a:lstStyle/>
           <a:p>
-            <a:pPr marL="0" indent="0" algn="l">
+            <a:pPr algn="l" indent="0" marL="0">
               <a:lnSpc>
                 <a:spcPct val="115000"/>
               </a:lnSpc>
@@ -6384,12 +6940,18 @@
                 <a:solidFill>
                   <a:srgbClr val="1F4E9C"/>
                 </a:solidFill>
-                <a:latin typeface="微软雅黑" panose="020B0503020204020204" pitchFamily="34" charset="-122"/>
-                <a:ea typeface="微软雅黑" panose="020B0503020204020204" pitchFamily="34" charset="-122"/>
-                <a:cs typeface="微软雅黑" panose="020B0503020204020204" pitchFamily="34" charset="-120"/>
+                <a:latin typeface="微软雅黑" pitchFamily="34" charset="0"/>
+                <a:ea typeface="微软雅黑" pitchFamily="34" charset="-122"/>
+                <a:cs typeface="微软雅黑" pitchFamily="34" charset="-120"/>
               </a:rPr>
               <a:t>•  </a:t>
             </a:r>
+            <a:pPr algn="l" indent="0" marL="0">
+              <a:lnSpc>
+                <a:spcPct val="115000"/>
+              </a:lnSpc>
+              <a:buNone/>
+            </a:pPr>
             <a:r>
               <a:rPr lang="en-US" sz="1700" dirty="0">
                 <a:solidFill>
@@ -6398,35 +6960,7 @@
               </a:rPr>
               <a:t>最后的else是兜底，前面都不命中才走它</a:t>
             </a:r>
-            <a:r>
-              <a:rPr lang="zh-CN" altLang="en-US" sz="1700" dirty="0">
-                <a:solidFill>
-                  <a:srgbClr val="000000"/>
-                </a:solidFill>
-              </a:rPr>
-              <a:t>，当然也可以</a:t>
-            </a:r>
-            <a:r>
-              <a:rPr lang="zh-CN" altLang="en-US" sz="1700" dirty="0">
-                <a:solidFill>
-                  <a:srgbClr val="000000"/>
-                </a:solidFill>
-              </a:rPr>
-              <a:t>不写</a:t>
-            </a:r>
-            <a:r>
-              <a:rPr lang="en-US" altLang="zh-CN" sz="1700" dirty="0">
-                <a:solidFill>
-                  <a:srgbClr val="000000"/>
-                </a:solidFill>
-              </a:rPr>
-              <a:t>else</a:t>
-            </a:r>
-            <a:endParaRPr lang="en-US" altLang="zh-CN" sz="1700" dirty="0">
-              <a:solidFill>
-                <a:srgbClr val="000000"/>
-              </a:solidFill>
-            </a:endParaRPr>
+            <a:endParaRPr lang="en-US" sz="1700" dirty="0"/>
           </a:p>
         </p:txBody>
       </p:sp>
@@ -6440,7 +6974,7 @@
 
 <file path=ppt/slides/slide6.xml><?xml version="1.0" encoding="utf-8"?>
 <p:sld xmlns:a="http://schemas.openxmlformats.org/drawingml/2006/main" xmlns:r="http://schemas.openxmlformats.org/officeDocument/2006/relationships" xmlns:p="http://schemas.openxmlformats.org/presentationml/2006/main">
-  <p:cSld>
+  <p:cSld name="Slide 6">
     <p:bg>
       <p:bgPr>
         <a:blipFill dpi="0" rotWithShape="1">
@@ -6484,12 +7018,13 @@
             <a:avLst/>
           </a:prstGeom>
           <a:noFill/>
+          <a:ln/>
         </p:spPr>
         <p:txBody>
           <a:bodyPr wrap="square" rtlCol="0" anchor="ctr"/>
           <a:lstStyle/>
           <a:p>
-            <a:pPr marL="0" indent="0" algn="r">
+            <a:pPr algn="r" indent="0" marL="0">
               <a:buNone/>
             </a:pPr>
             <a:r>
@@ -6497,9 +7032,9 @@
                 <a:solidFill>
                   <a:srgbClr val="8A9099"/>
                 </a:solidFill>
-                <a:latin typeface="微软雅黑" panose="020B0503020204020204" pitchFamily="34" charset="-122"/>
-                <a:ea typeface="微软雅黑" panose="020B0503020204020204" pitchFamily="34" charset="-122"/>
-                <a:cs typeface="微软雅黑" panose="020B0503020204020204" pitchFamily="34" charset="-120"/>
+                <a:latin typeface="微软雅黑" pitchFamily="34" charset="0"/>
+                <a:ea typeface="微软雅黑" pitchFamily="34" charset="-122"/>
+                <a:cs typeface="微软雅黑" pitchFamily="34" charset="-120"/>
               </a:rPr>
               <a:t>6 / 16</a:t>
             </a:r>
@@ -6522,12 +7057,13 @@
             <a:avLst/>
           </a:prstGeom>
           <a:noFill/>
+          <a:ln/>
         </p:spPr>
         <p:txBody>
           <a:bodyPr wrap="square" rtlCol="0" anchor="ctr"/>
           <a:lstStyle/>
           <a:p>
-            <a:pPr marL="0" indent="0" algn="l">
+            <a:pPr algn="l" indent="0" marL="0">
               <a:buNone/>
             </a:pPr>
             <a:r>
@@ -6535,9 +7071,9 @@
                 <a:solidFill>
                   <a:srgbClr val="1F4E9C"/>
                 </a:solidFill>
-                <a:latin typeface="微软雅黑" panose="020B0503020204020204" pitchFamily="34" charset="-122"/>
-                <a:ea typeface="微软雅黑" panose="020B0503020204020204" pitchFamily="34" charset="-122"/>
-                <a:cs typeface="微软雅黑" panose="020B0503020204020204" pitchFamily="34" charset="-120"/>
+                <a:latin typeface="微软雅黑" pitchFamily="34" charset="0"/>
+                <a:ea typeface="微软雅黑" pitchFamily="34" charset="-122"/>
+                <a:cs typeface="微软雅黑" pitchFamily="34" charset="-120"/>
               </a:rPr>
               <a:t>分支：switch</a:t>
             </a:r>
@@ -6560,12 +7096,13 @@
             <a:avLst/>
           </a:prstGeom>
           <a:noFill/>
+          <a:ln/>
         </p:spPr>
         <p:txBody>
           <a:bodyPr wrap="square" rtlCol="0" anchor="ctr"/>
           <a:lstStyle/>
           <a:p>
-            <a:pPr marL="0" indent="0" algn="l">
+            <a:pPr algn="l" indent="0" marL="0">
               <a:buNone/>
             </a:pPr>
             <a:r>
@@ -6573,9 +7110,9 @@
                 <a:solidFill>
                   <a:srgbClr val="1F2329"/>
                 </a:solidFill>
-                <a:latin typeface="微软雅黑" panose="020B0503020204020204" pitchFamily="34" charset="-122"/>
-                <a:ea typeface="微软雅黑" panose="020B0503020204020204" pitchFamily="34" charset="-122"/>
-                <a:cs typeface="微软雅黑" panose="020B0503020204020204" pitchFamily="34" charset="-120"/>
+                <a:latin typeface="微软雅黑" pitchFamily="34" charset="0"/>
+                <a:ea typeface="微软雅黑" pitchFamily="34" charset="-122"/>
+                <a:cs typeface="微软雅黑" pitchFamily="34" charset="-120"/>
               </a:rPr>
               <a:t>等值多选：switch</a:t>
             </a:r>
@@ -6623,12 +7160,13 @@
             <a:avLst/>
           </a:prstGeom>
           <a:noFill/>
+          <a:ln/>
         </p:spPr>
         <p:txBody>
           <a:bodyPr wrap="square" rtlCol="0" anchor="t"/>
           <a:lstStyle/>
           <a:p>
-            <a:pPr marL="0" indent="0" algn="l">
+            <a:pPr algn="l" indent="0" marL="0">
               <a:lnSpc>
                 <a:spcPct val="125000"/>
               </a:lnSpc>
@@ -6639,9 +7177,9 @@
                 <a:solidFill>
                   <a:srgbClr val="1F2329"/>
                 </a:solidFill>
-                <a:latin typeface="Consolas" panose="020B0609020204030204" pitchFamily="34" charset="0"/>
-                <a:ea typeface="Consolas" panose="020B0609020204030204" pitchFamily="34" charset="-122"/>
-                <a:cs typeface="Consolas" panose="020B0609020204030204" pitchFamily="34" charset="-120"/>
+                <a:latin typeface="Consolas" pitchFamily="34" charset="0"/>
+                <a:ea typeface="Consolas" pitchFamily="34" charset="-122"/>
+                <a:cs typeface="Consolas" pitchFamily="34" charset="-120"/>
               </a:rPr>
               <a:t>switch(level){
     case 1: printf("优秀\n"); break;
@@ -6669,12 +7207,13 @@
             <a:avLst/>
           </a:prstGeom>
           <a:noFill/>
+          <a:ln/>
         </p:spPr>
         <p:txBody>
           <a:bodyPr wrap="square" rtlCol="0" anchor="t"/>
           <a:lstStyle/>
           <a:p>
-            <a:pPr marL="0" indent="0" algn="l">
+            <a:pPr algn="l" indent="0" marL="0">
               <a:lnSpc>
                 <a:spcPct val="115000"/>
               </a:lnSpc>
@@ -6685,12 +7224,18 @@
                 <a:solidFill>
                   <a:srgbClr val="1F4E9C"/>
                 </a:solidFill>
-                <a:latin typeface="微软雅黑" panose="020B0503020204020204" pitchFamily="34" charset="-122"/>
-                <a:ea typeface="微软雅黑" panose="020B0503020204020204" pitchFamily="34" charset="-122"/>
-                <a:cs typeface="微软雅黑" panose="020B0503020204020204" pitchFamily="34" charset="-120"/>
+                <a:latin typeface="微软雅黑" pitchFamily="34" charset="0"/>
+                <a:ea typeface="微软雅黑" pitchFamily="34" charset="-122"/>
+                <a:cs typeface="微软雅黑" pitchFamily="34" charset="-120"/>
               </a:rPr>
               <a:t>•  </a:t>
             </a:r>
+            <a:pPr algn="l" indent="0" marL="0">
+              <a:lnSpc>
+                <a:spcPct val="115000"/>
+              </a:lnSpc>
+              <a:buNone/>
+            </a:pPr>
             <a:r>
               <a:rPr lang="en-US" sz="1800" dirty="0">
                 <a:solidFill>
@@ -6699,6 +7244,12 @@
               </a:rPr>
               <a:t>switch专门处理"</a:t>
             </a:r>
+            <a:pPr algn="l" indent="0" marL="0">
+              <a:lnSpc>
+                <a:spcPct val="115000"/>
+              </a:lnSpc>
+              <a:buNone/>
+            </a:pPr>
             <a:r>
               <a:rPr lang="en-US" sz="1800" b="1" dirty="0">
                 <a:solidFill>
@@ -6707,6 +7258,12 @@
               </a:rPr>
               <a:t>等于某个值</a:t>
             </a:r>
+            <a:pPr algn="l" indent="0" marL="0">
+              <a:lnSpc>
+                <a:spcPct val="115000"/>
+              </a:lnSpc>
+              <a:buNone/>
+            </a:pPr>
             <a:r>
               <a:rPr lang="en-US" sz="1800" dirty="0">
                 <a:solidFill>
@@ -6734,12 +7291,13 @@
             <a:avLst/>
           </a:prstGeom>
           <a:noFill/>
+          <a:ln/>
         </p:spPr>
         <p:txBody>
           <a:bodyPr wrap="square" rtlCol="0" anchor="t"/>
           <a:lstStyle/>
           <a:p>
-            <a:pPr marL="0" indent="0" algn="l">
+            <a:pPr algn="l" indent="0" marL="0">
               <a:lnSpc>
                 <a:spcPct val="115000"/>
               </a:lnSpc>
@@ -6750,12 +7308,18 @@
                 <a:solidFill>
                   <a:srgbClr val="1F4E9C"/>
                 </a:solidFill>
-                <a:latin typeface="微软雅黑" panose="020B0503020204020204" pitchFamily="34" charset="-122"/>
-                <a:ea typeface="微软雅黑" panose="020B0503020204020204" pitchFamily="34" charset="-122"/>
-                <a:cs typeface="微软雅黑" panose="020B0503020204020204" pitchFamily="34" charset="-120"/>
+                <a:latin typeface="微软雅黑" pitchFamily="34" charset="0"/>
+                <a:ea typeface="微软雅黑" pitchFamily="34" charset="-122"/>
+                <a:cs typeface="微软雅黑" pitchFamily="34" charset="-120"/>
               </a:rPr>
               <a:t>•  </a:t>
             </a:r>
+            <a:pPr algn="l" indent="0" marL="0">
+              <a:lnSpc>
+                <a:spcPct val="115000"/>
+              </a:lnSpc>
+              <a:buNone/>
+            </a:pPr>
             <a:r>
               <a:rPr lang="en-US" sz="1800" dirty="0">
                 <a:solidFill>
@@ -6764,6 +7328,12 @@
               </a:rPr>
               <a:t>每个case后面的 </a:t>
             </a:r>
+            <a:pPr algn="l" indent="0" marL="0">
+              <a:lnSpc>
+                <a:spcPct val="115000"/>
+              </a:lnSpc>
+              <a:buNone/>
+            </a:pPr>
             <a:r>
               <a:rPr lang="en-US" sz="1800" b="1" dirty="0">
                 <a:solidFill>
@@ -6772,6 +7342,12 @@
               </a:rPr>
               <a:t>break 不能漏</a:t>
             </a:r>
+            <a:pPr algn="l" indent="0" marL="0">
+              <a:lnSpc>
+                <a:spcPct val="115000"/>
+              </a:lnSpc>
+              <a:buNone/>
+            </a:pPr>
             <a:r>
               <a:rPr lang="en-US" sz="1800" dirty="0">
                 <a:solidFill>
@@ -6799,12 +7375,13 @@
             <a:avLst/>
           </a:prstGeom>
           <a:noFill/>
+          <a:ln/>
         </p:spPr>
         <p:txBody>
           <a:bodyPr wrap="square" rtlCol="0" anchor="t"/>
           <a:lstStyle/>
           <a:p>
-            <a:pPr marL="0" indent="0" algn="l">
+            <a:pPr algn="l" indent="0" marL="0">
               <a:lnSpc>
                 <a:spcPct val="115000"/>
               </a:lnSpc>
@@ -6815,12 +7392,18 @@
                 <a:solidFill>
                   <a:srgbClr val="1F4E9C"/>
                 </a:solidFill>
-                <a:latin typeface="微软雅黑" panose="020B0503020204020204" pitchFamily="34" charset="-122"/>
-                <a:ea typeface="微软雅黑" panose="020B0503020204020204" pitchFamily="34" charset="-122"/>
-                <a:cs typeface="微软雅黑" panose="020B0503020204020204" pitchFamily="34" charset="-120"/>
+                <a:latin typeface="微软雅黑" pitchFamily="34" charset="0"/>
+                <a:ea typeface="微软雅黑" pitchFamily="34" charset="-122"/>
+                <a:cs typeface="微软雅黑" pitchFamily="34" charset="-120"/>
               </a:rPr>
               <a:t>•  </a:t>
             </a:r>
+            <a:pPr algn="l" indent="0" marL="0">
+              <a:lnSpc>
+                <a:spcPct val="115000"/>
+              </a:lnSpc>
+              <a:buNone/>
+            </a:pPr>
             <a:r>
               <a:rPr lang="en-US" sz="1800" dirty="0">
                 <a:solidFill>
@@ -6843,7 +7426,7 @@
 
 <file path=ppt/slides/slide7.xml><?xml version="1.0" encoding="utf-8"?>
 <p:sld xmlns:a="http://schemas.openxmlformats.org/drawingml/2006/main" xmlns:r="http://schemas.openxmlformats.org/officeDocument/2006/relationships" xmlns:p="http://schemas.openxmlformats.org/presentationml/2006/main">
-  <p:cSld>
+  <p:cSld name="Slide 7">
     <p:bg>
       <p:bgPr>
         <a:blipFill dpi="0" rotWithShape="1">
@@ -6887,12 +7470,13 @@
             <a:avLst/>
           </a:prstGeom>
           <a:noFill/>
+          <a:ln/>
         </p:spPr>
         <p:txBody>
           <a:bodyPr wrap="square" rtlCol="0" anchor="ctr"/>
           <a:lstStyle/>
           <a:p>
-            <a:pPr marL="0" indent="0" algn="r">
+            <a:pPr algn="r" indent="0" marL="0">
               <a:buNone/>
             </a:pPr>
             <a:r>
@@ -6900,9 +7484,9 @@
                 <a:solidFill>
                   <a:srgbClr val="8A9099"/>
                 </a:solidFill>
-                <a:latin typeface="微软雅黑" panose="020B0503020204020204" pitchFamily="34" charset="-122"/>
-                <a:ea typeface="微软雅黑" panose="020B0503020204020204" pitchFamily="34" charset="-122"/>
-                <a:cs typeface="微软雅黑" panose="020B0503020204020204" pitchFamily="34" charset="-120"/>
+                <a:latin typeface="微软雅黑" pitchFamily="34" charset="0"/>
+                <a:ea typeface="微软雅黑" pitchFamily="34" charset="-122"/>
+                <a:cs typeface="微软雅黑" pitchFamily="34" charset="-120"/>
               </a:rPr>
               <a:t>7 / 16</a:t>
             </a:r>
@@ -6925,12 +7509,13 @@
             <a:avLst/>
           </a:prstGeom>
           <a:noFill/>
+          <a:ln/>
         </p:spPr>
         <p:txBody>
           <a:bodyPr wrap="square" rtlCol="0" anchor="ctr"/>
           <a:lstStyle/>
           <a:p>
-            <a:pPr marL="0" indent="0" algn="l">
+            <a:pPr algn="l" indent="0" marL="0">
               <a:buNone/>
             </a:pPr>
             <a:r>
@@ -6938,9 +7523,9 @@
                 <a:solidFill>
                   <a:srgbClr val="1F4E9C"/>
                 </a:solidFill>
-                <a:latin typeface="微软雅黑" panose="020B0503020204020204" pitchFamily="34" charset="-122"/>
-                <a:ea typeface="微软雅黑" panose="020B0503020204020204" pitchFamily="34" charset="-122"/>
-                <a:cs typeface="微软雅黑" panose="020B0503020204020204" pitchFamily="34" charset="-120"/>
+                <a:latin typeface="微软雅黑" pitchFamily="34" charset="0"/>
+                <a:ea typeface="微软雅黑" pitchFamily="34" charset="-122"/>
+                <a:cs typeface="微软雅黑" pitchFamily="34" charset="-120"/>
               </a:rPr>
               <a:t>循环登场</a:t>
             </a:r>
@@ -6963,12 +7548,13 @@
             <a:avLst/>
           </a:prstGeom>
           <a:noFill/>
+          <a:ln/>
         </p:spPr>
         <p:txBody>
           <a:bodyPr wrap="square" rtlCol="0" anchor="ctr"/>
           <a:lstStyle/>
           <a:p>
-            <a:pPr marL="0" indent="0" algn="l">
+            <a:pPr algn="l" indent="0" marL="0">
               <a:buNone/>
             </a:pPr>
             <a:r>
@@ -6976,9 +7562,9 @@
                 <a:solidFill>
                   <a:srgbClr val="1F2329"/>
                 </a:solidFill>
-                <a:latin typeface="微软雅黑" panose="020B0503020204020204" pitchFamily="34" charset="-122"/>
-                <a:ea typeface="微软雅黑" panose="020B0503020204020204" pitchFamily="34" charset="-122"/>
-                <a:cs typeface="微软雅黑" panose="020B0503020204020204" pitchFamily="34" charset="-120"/>
+                <a:latin typeface="微软雅黑" pitchFamily="34" charset="0"/>
+                <a:ea typeface="微软雅黑" pitchFamily="34" charset="-122"/>
+                <a:cs typeface="微软雅黑" pitchFamily="34" charset="-120"/>
               </a:rPr>
               <a:t>重复的活，交给循环</a:t>
             </a:r>
@@ -7026,12 +7612,13 @@
             <a:avLst/>
           </a:prstGeom>
           <a:noFill/>
+          <a:ln/>
         </p:spPr>
         <p:txBody>
           <a:bodyPr wrap="square" rtlCol="0" anchor="t"/>
           <a:lstStyle/>
           <a:p>
-            <a:pPr marL="0" indent="0" algn="l">
+            <a:pPr algn="l" indent="0" marL="0">
               <a:lnSpc>
                 <a:spcPct val="125000"/>
               </a:lnSpc>
@@ -7042,9 +7629,9 @@
                 <a:solidFill>
                   <a:srgbClr val="1F2329"/>
                 </a:solidFill>
-                <a:latin typeface="Consolas" panose="020B0609020204030204" pitchFamily="34" charset="0"/>
-                <a:ea typeface="Consolas" panose="020B0609020204030204" pitchFamily="34" charset="-122"/>
-                <a:cs typeface="Consolas" panose="020B0609020204030204" pitchFamily="34" charset="-120"/>
+                <a:latin typeface="Consolas" pitchFamily="34" charset="0"/>
+                <a:ea typeface="Consolas" pitchFamily="34" charset="-122"/>
+                <a:cs typeface="Consolas" pitchFamily="34" charset="-120"/>
               </a:rPr>
               <a:t>printf("加油\n");
 printf("加油\n");
@@ -7070,12 +7657,13 @@
             <a:avLst/>
           </a:prstGeom>
           <a:noFill/>
+          <a:ln/>
         </p:spPr>
         <p:txBody>
           <a:bodyPr wrap="square" rtlCol="0" anchor="t"/>
           <a:lstStyle/>
           <a:p>
-            <a:pPr marL="0" indent="0" algn="l">
+            <a:pPr algn="l" indent="0" marL="0">
               <a:lnSpc>
                 <a:spcPct val="115000"/>
               </a:lnSpc>
@@ -7086,12 +7674,18 @@
                 <a:solidFill>
                   <a:srgbClr val="1F4E9C"/>
                 </a:solidFill>
-                <a:latin typeface="微软雅黑" panose="020B0503020204020204" pitchFamily="34" charset="-122"/>
-                <a:ea typeface="微软雅黑" panose="020B0503020204020204" pitchFamily="34" charset="-122"/>
-                <a:cs typeface="微软雅黑" panose="020B0503020204020204" pitchFamily="34" charset="-120"/>
+                <a:latin typeface="微软雅黑" pitchFamily="34" charset="0"/>
+                <a:ea typeface="微软雅黑" pitchFamily="34" charset="-122"/>
+                <a:cs typeface="微软雅黑" pitchFamily="34" charset="-120"/>
               </a:rPr>
               <a:t>•  </a:t>
             </a:r>
+            <a:pPr algn="l" indent="0" marL="0">
+              <a:lnSpc>
+                <a:spcPct val="115000"/>
+              </a:lnSpc>
+              <a:buNone/>
+            </a:pPr>
             <a:r>
               <a:rPr lang="en-US" sz="1800" dirty="0">
                 <a:solidFill>
@@ -7119,12 +7713,13 @@
             <a:avLst/>
           </a:prstGeom>
           <a:noFill/>
+          <a:ln/>
         </p:spPr>
         <p:txBody>
           <a:bodyPr wrap="square" rtlCol="0" anchor="t"/>
           <a:lstStyle/>
           <a:p>
-            <a:pPr marL="0" indent="0" algn="l">
+            <a:pPr algn="l" indent="0" marL="0">
               <a:lnSpc>
                 <a:spcPct val="115000"/>
               </a:lnSpc>
@@ -7135,12 +7730,18 @@
                 <a:solidFill>
                   <a:srgbClr val="1F4E9C"/>
                 </a:solidFill>
-                <a:latin typeface="微软雅黑" panose="020B0503020204020204" pitchFamily="34" charset="-122"/>
-                <a:ea typeface="微软雅黑" panose="020B0503020204020204" pitchFamily="34" charset="-122"/>
-                <a:cs typeface="微软雅黑" panose="020B0503020204020204" pitchFamily="34" charset="-120"/>
+                <a:latin typeface="微软雅黑" pitchFamily="34" charset="0"/>
+                <a:ea typeface="微软雅黑" pitchFamily="34" charset="-122"/>
+                <a:cs typeface="微软雅黑" pitchFamily="34" charset="-120"/>
               </a:rPr>
               <a:t>•  </a:t>
             </a:r>
+            <a:pPr algn="l" indent="0" marL="0">
+              <a:lnSpc>
+                <a:spcPct val="115000"/>
+              </a:lnSpc>
+              <a:buNone/>
+            </a:pPr>
             <a:r>
               <a:rPr lang="en-US" sz="1800" dirty="0">
                 <a:solidFill>
@@ -7149,6 +7750,12 @@
               </a:rPr>
               <a:t>循环就是让计算机</a:t>
             </a:r>
+            <a:pPr algn="l" indent="0" marL="0">
+              <a:lnSpc>
+                <a:spcPct val="115000"/>
+              </a:lnSpc>
+              <a:buNone/>
+            </a:pPr>
             <a:r>
               <a:rPr lang="en-US" sz="1800" b="1" dirty="0">
                 <a:solidFill>
@@ -7176,12 +7783,13 @@
             <a:avLst/>
           </a:prstGeom>
           <a:noFill/>
+          <a:ln/>
         </p:spPr>
         <p:txBody>
           <a:bodyPr wrap="square" rtlCol="0" anchor="t"/>
           <a:lstStyle/>
           <a:p>
-            <a:pPr marL="0" indent="0" algn="l">
+            <a:pPr algn="l" indent="0" marL="0">
               <a:lnSpc>
                 <a:spcPct val="115000"/>
               </a:lnSpc>
@@ -7192,12 +7800,18 @@
                 <a:solidFill>
                   <a:srgbClr val="1F4E9C"/>
                 </a:solidFill>
-                <a:latin typeface="微软雅黑" panose="020B0503020204020204" pitchFamily="34" charset="-122"/>
-                <a:ea typeface="微软雅黑" panose="020B0503020204020204" pitchFamily="34" charset="-122"/>
-                <a:cs typeface="微软雅黑" panose="020B0503020204020204" pitchFamily="34" charset="-120"/>
+                <a:latin typeface="微软雅黑" pitchFamily="34" charset="0"/>
+                <a:ea typeface="微软雅黑" pitchFamily="34" charset="-122"/>
+                <a:cs typeface="微软雅黑" pitchFamily="34" charset="-120"/>
               </a:rPr>
               <a:t>•  </a:t>
             </a:r>
+            <a:pPr algn="l" indent="0" marL="0">
+              <a:lnSpc>
+                <a:spcPct val="115000"/>
+              </a:lnSpc>
+              <a:buNone/>
+            </a:pPr>
             <a:r>
               <a:rPr lang="en-US" sz="1800" dirty="0">
                 <a:solidFill>
@@ -7220,7 +7834,7 @@
 
 <file path=ppt/slides/slide8.xml><?xml version="1.0" encoding="utf-8"?>
 <p:sld xmlns:a="http://schemas.openxmlformats.org/drawingml/2006/main" xmlns:r="http://schemas.openxmlformats.org/officeDocument/2006/relationships" xmlns:p="http://schemas.openxmlformats.org/presentationml/2006/main">
-  <p:cSld>
+  <p:cSld name="Slide 8">
     <p:bg>
       <p:bgPr>
         <a:blipFill dpi="0" rotWithShape="1">
@@ -7264,12 +7878,13 @@
             <a:avLst/>
           </a:prstGeom>
           <a:noFill/>
+          <a:ln/>
         </p:spPr>
         <p:txBody>
           <a:bodyPr wrap="square" rtlCol="0" anchor="ctr"/>
           <a:lstStyle/>
           <a:p>
-            <a:pPr marL="0" indent="0" algn="r">
+            <a:pPr algn="r" indent="0" marL="0">
               <a:buNone/>
             </a:pPr>
             <a:r>
@@ -7277,9 +7892,9 @@
                 <a:solidFill>
                   <a:srgbClr val="8A9099"/>
                 </a:solidFill>
-                <a:latin typeface="微软雅黑" panose="020B0503020204020204" pitchFamily="34" charset="-122"/>
-                <a:ea typeface="微软雅黑" panose="020B0503020204020204" pitchFamily="34" charset="-122"/>
-                <a:cs typeface="微软雅黑" panose="020B0503020204020204" pitchFamily="34" charset="-120"/>
+                <a:latin typeface="微软雅黑" pitchFamily="34" charset="0"/>
+                <a:ea typeface="微软雅黑" pitchFamily="34" charset="-122"/>
+                <a:cs typeface="微软雅黑" pitchFamily="34" charset="-120"/>
               </a:rPr>
               <a:t>8 / 16</a:t>
             </a:r>
@@ -7302,12 +7917,13 @@
             <a:avLst/>
           </a:prstGeom>
           <a:noFill/>
+          <a:ln/>
         </p:spPr>
         <p:txBody>
           <a:bodyPr wrap="square" rtlCol="0" anchor="ctr"/>
           <a:lstStyle/>
           <a:p>
-            <a:pPr marL="0" indent="0" algn="l">
+            <a:pPr algn="l" indent="0" marL="0">
               <a:buNone/>
             </a:pPr>
             <a:r>
@@ -7315,9 +7931,9 @@
                 <a:solidFill>
                   <a:srgbClr val="1F4E9C"/>
                 </a:solidFill>
-                <a:latin typeface="微软雅黑" panose="020B0503020204020204" pitchFamily="34" charset="-122"/>
-                <a:ea typeface="微软雅黑" panose="020B0503020204020204" pitchFamily="34" charset="-122"/>
-                <a:cs typeface="微软雅黑" panose="020B0503020204020204" pitchFamily="34" charset="-120"/>
+                <a:latin typeface="微软雅黑" pitchFamily="34" charset="0"/>
+                <a:ea typeface="微软雅黑" pitchFamily="34" charset="-122"/>
+                <a:cs typeface="微软雅黑" pitchFamily="34" charset="-120"/>
               </a:rPr>
               <a:t>循环：while</a:t>
             </a:r>
@@ -7340,12 +7956,13 @@
             <a:avLst/>
           </a:prstGeom>
           <a:noFill/>
+          <a:ln/>
         </p:spPr>
         <p:txBody>
           <a:bodyPr wrap="square" rtlCol="0" anchor="ctr"/>
           <a:lstStyle/>
           <a:p>
-            <a:pPr marL="0" indent="0" algn="l">
+            <a:pPr algn="l" indent="0" marL="0">
               <a:buNone/>
             </a:pPr>
             <a:r>
@@ -7353,9 +7970,9 @@
                 <a:solidFill>
                   <a:srgbClr val="1F2329"/>
                 </a:solidFill>
-                <a:latin typeface="微软雅黑" panose="020B0503020204020204" pitchFamily="34" charset="-122"/>
-                <a:ea typeface="微软雅黑" panose="020B0503020204020204" pitchFamily="34" charset="-122"/>
-                <a:cs typeface="微软雅黑" panose="020B0503020204020204" pitchFamily="34" charset="-120"/>
+                <a:latin typeface="微软雅黑" pitchFamily="34" charset="0"/>
+                <a:ea typeface="微软雅黑" pitchFamily="34" charset="-122"/>
+                <a:cs typeface="微软雅黑" pitchFamily="34" charset="-120"/>
               </a:rPr>
               <a:t>while：条件成立就一直做</a:t>
             </a:r>
@@ -7403,12 +8020,13 @@
             <a:avLst/>
           </a:prstGeom>
           <a:noFill/>
+          <a:ln/>
         </p:spPr>
         <p:txBody>
           <a:bodyPr wrap="square" rtlCol="0" anchor="t"/>
           <a:lstStyle/>
           <a:p>
-            <a:pPr marL="0" indent="0" algn="l">
+            <a:pPr algn="l" indent="0" marL="0">
               <a:lnSpc>
                 <a:spcPct val="125000"/>
               </a:lnSpc>
@@ -7419,9 +8037,9 @@
                 <a:solidFill>
                   <a:srgbClr val="1F2329"/>
                 </a:solidFill>
-                <a:latin typeface="Consolas" panose="020B0609020204030204" pitchFamily="34" charset="0"/>
-                <a:ea typeface="Consolas" panose="020B0609020204030204" pitchFamily="34" charset="-122"/>
-                <a:cs typeface="Consolas" panose="020B0609020204030204" pitchFamily="34" charset="-120"/>
+                <a:latin typeface="Consolas" pitchFamily="34" charset="0"/>
+                <a:ea typeface="Consolas" pitchFamily="34" charset="-122"/>
+                <a:cs typeface="Consolas" pitchFamily="34" charset="-120"/>
               </a:rPr>
               <a:t>int i = 1;                  // ① 初始化
 while(i &lt;= 100){            // ② 条件
@@ -7449,12 +8067,13 @@
             <a:avLst/>
           </a:prstGeom>
           <a:noFill/>
+          <a:ln/>
         </p:spPr>
         <p:txBody>
           <a:bodyPr wrap="square" rtlCol="0" anchor="t"/>
           <a:lstStyle/>
           <a:p>
-            <a:pPr marL="0" indent="0" algn="l">
+            <a:pPr algn="l" indent="0" marL="0">
               <a:lnSpc>
                 <a:spcPct val="115000"/>
               </a:lnSpc>
@@ -7465,12 +8084,18 @@
                 <a:solidFill>
                   <a:srgbClr val="1F4E9C"/>
                 </a:solidFill>
-                <a:latin typeface="微软雅黑" panose="020B0503020204020204" pitchFamily="34" charset="-122"/>
-                <a:ea typeface="微软雅黑" panose="020B0503020204020204" pitchFamily="34" charset="-122"/>
-                <a:cs typeface="微软雅黑" panose="020B0503020204020204" pitchFamily="34" charset="-120"/>
+                <a:latin typeface="微软雅黑" pitchFamily="34" charset="0"/>
+                <a:ea typeface="微软雅黑" pitchFamily="34" charset="-122"/>
+                <a:cs typeface="微软雅黑" pitchFamily="34" charset="-120"/>
               </a:rPr>
               <a:t>•  </a:t>
             </a:r>
+            <a:pPr algn="l" indent="0" marL="0">
+              <a:lnSpc>
+                <a:spcPct val="115000"/>
+              </a:lnSpc>
+              <a:buNone/>
+            </a:pPr>
             <a:r>
               <a:rPr lang="en-US" sz="1800" b="1" dirty="0">
                 <a:solidFill>
@@ -7479,6 +8104,12 @@
               </a:rPr>
               <a:t>循环三要素</a:t>
             </a:r>
+            <a:pPr algn="l" indent="0" marL="0">
+              <a:lnSpc>
+                <a:spcPct val="115000"/>
+              </a:lnSpc>
+              <a:buNone/>
+            </a:pPr>
             <a:r>
               <a:rPr lang="en-US" sz="1800" dirty="0">
                 <a:solidFill>
@@ -7506,12 +8137,13 @@
             <a:avLst/>
           </a:prstGeom>
           <a:noFill/>
+          <a:ln/>
         </p:spPr>
         <p:txBody>
           <a:bodyPr wrap="square" rtlCol="0" anchor="t"/>
           <a:lstStyle/>
           <a:p>
-            <a:pPr marL="0" indent="0" algn="l">
+            <a:pPr algn="l" indent="0" marL="0">
               <a:lnSpc>
                 <a:spcPct val="115000"/>
               </a:lnSpc>
@@ -7522,12 +8154,18 @@
                 <a:solidFill>
                   <a:srgbClr val="1F4E9C"/>
                 </a:solidFill>
-                <a:latin typeface="微软雅黑" panose="020B0503020204020204" pitchFamily="34" charset="-122"/>
-                <a:ea typeface="微软雅黑" panose="020B0503020204020204" pitchFamily="34" charset="-122"/>
-                <a:cs typeface="微软雅黑" panose="020B0503020204020204" pitchFamily="34" charset="-120"/>
+                <a:latin typeface="微软雅黑" pitchFamily="34" charset="0"/>
+                <a:ea typeface="微软雅黑" pitchFamily="34" charset="-122"/>
+                <a:cs typeface="微软雅黑" pitchFamily="34" charset="-120"/>
               </a:rPr>
               <a:t>•  </a:t>
             </a:r>
+            <a:pPr algn="l" indent="0" marL="0">
+              <a:lnSpc>
+                <a:spcPct val="115000"/>
+              </a:lnSpc>
+              <a:buNone/>
+            </a:pPr>
             <a:r>
               <a:rPr lang="en-US" sz="1800" dirty="0">
                 <a:solidFill>
@@ -7555,12 +8193,13 @@
             <a:avLst/>
           </a:prstGeom>
           <a:noFill/>
+          <a:ln/>
         </p:spPr>
         <p:txBody>
           <a:bodyPr wrap="square" rtlCol="0" anchor="t"/>
           <a:lstStyle/>
           <a:p>
-            <a:pPr marL="0" indent="0" algn="l">
+            <a:pPr algn="l" indent="0" marL="0">
               <a:lnSpc>
                 <a:spcPct val="115000"/>
               </a:lnSpc>
@@ -7571,12 +8210,18 @@
                 <a:solidFill>
                   <a:srgbClr val="1F4E9C"/>
                 </a:solidFill>
-                <a:latin typeface="微软雅黑" panose="020B0503020204020204" pitchFamily="34" charset="-122"/>
-                <a:ea typeface="微软雅黑" panose="020B0503020204020204" pitchFamily="34" charset="-122"/>
-                <a:cs typeface="微软雅黑" panose="020B0503020204020204" pitchFamily="34" charset="-120"/>
+                <a:latin typeface="微软雅黑" pitchFamily="34" charset="0"/>
+                <a:ea typeface="微软雅黑" pitchFamily="34" charset="-122"/>
+                <a:cs typeface="微软雅黑" pitchFamily="34" charset="-120"/>
               </a:rPr>
               <a:t>•  </a:t>
             </a:r>
+            <a:pPr algn="l" indent="0" marL="0">
+              <a:lnSpc>
+                <a:spcPct val="115000"/>
+              </a:lnSpc>
+              <a:buNone/>
+            </a:pPr>
             <a:r>
               <a:rPr lang="en-US" sz="1800" dirty="0">
                 <a:solidFill>
@@ -7599,7 +8244,7 @@
 
 <file path=ppt/slides/slide9.xml><?xml version="1.0" encoding="utf-8"?>
 <p:sld xmlns:a="http://schemas.openxmlformats.org/drawingml/2006/main" xmlns:r="http://schemas.openxmlformats.org/officeDocument/2006/relationships" xmlns:p="http://schemas.openxmlformats.org/presentationml/2006/main">
-  <p:cSld>
+  <p:cSld name="Slide 9">
     <p:bg>
       <p:bgPr>
         <a:blipFill dpi="0" rotWithShape="1">
@@ -7643,12 +8288,13 @@
             <a:avLst/>
           </a:prstGeom>
           <a:noFill/>
+          <a:ln/>
         </p:spPr>
         <p:txBody>
           <a:bodyPr wrap="square" rtlCol="0" anchor="ctr"/>
           <a:lstStyle/>
           <a:p>
-            <a:pPr marL="0" indent="0" algn="r">
+            <a:pPr algn="r" indent="0" marL="0">
               <a:buNone/>
             </a:pPr>
             <a:r>
@@ -7656,9 +8302,9 @@
                 <a:solidFill>
                   <a:srgbClr val="8A9099"/>
                 </a:solidFill>
-                <a:latin typeface="微软雅黑" panose="020B0503020204020204" pitchFamily="34" charset="-122"/>
-                <a:ea typeface="微软雅黑" panose="020B0503020204020204" pitchFamily="34" charset="-122"/>
-                <a:cs typeface="微软雅黑" panose="020B0503020204020204" pitchFamily="34" charset="-120"/>
+                <a:latin typeface="微软雅黑" pitchFamily="34" charset="0"/>
+                <a:ea typeface="微软雅黑" pitchFamily="34" charset="-122"/>
+                <a:cs typeface="微软雅黑" pitchFamily="34" charset="-120"/>
               </a:rPr>
               <a:t>9 / 16</a:t>
             </a:r>
@@ -7681,12 +8327,13 @@
             <a:avLst/>
           </a:prstGeom>
           <a:noFill/>
+          <a:ln/>
         </p:spPr>
         <p:txBody>
           <a:bodyPr wrap="square" rtlCol="0" anchor="ctr"/>
           <a:lstStyle/>
           <a:p>
-            <a:pPr marL="0" indent="0" algn="l">
+            <a:pPr algn="l" indent="0" marL="0">
               <a:buNone/>
             </a:pPr>
             <a:r>
@@ -7694,9 +8341,9 @@
                 <a:solidFill>
                   <a:srgbClr val="1F4E9C"/>
                 </a:solidFill>
-                <a:latin typeface="微软雅黑" panose="020B0503020204020204" pitchFamily="34" charset="-122"/>
-                <a:ea typeface="微软雅黑" panose="020B0503020204020204" pitchFamily="34" charset="-122"/>
-                <a:cs typeface="微软雅黑" panose="020B0503020204020204" pitchFamily="34" charset="-120"/>
+                <a:latin typeface="微软雅黑" pitchFamily="34" charset="0"/>
+                <a:ea typeface="微软雅黑" pitchFamily="34" charset="-122"/>
+                <a:cs typeface="微软雅黑" pitchFamily="34" charset="-120"/>
               </a:rPr>
               <a:t>本节难忘时刻</a:t>
             </a:r>
@@ -7719,12 +8366,13 @@
             <a:avLst/>
           </a:prstGeom>
           <a:noFill/>
+          <a:ln/>
         </p:spPr>
         <p:txBody>
           <a:bodyPr wrap="square" rtlCol="0" anchor="ctr"/>
           <a:lstStyle/>
           <a:p>
-            <a:pPr marL="0" indent="0" algn="l">
+            <a:pPr algn="l" indent="0" marL="0">
               <a:buNone/>
             </a:pPr>
             <a:r>
@@ -7732,9 +8380,9 @@
                 <a:solidFill>
                   <a:srgbClr val="1F2329"/>
                 </a:solidFill>
-                <a:latin typeface="微软雅黑" panose="020B0503020204020204" pitchFamily="34" charset="-122"/>
-                <a:ea typeface="微软雅黑" panose="020B0503020204020204" pitchFamily="34" charset="-122"/>
-                <a:cs typeface="微软雅黑" panose="020B0503020204020204" pitchFamily="34" charset="-120"/>
+                <a:latin typeface="微软雅黑" pitchFamily="34" charset="0"/>
+                <a:ea typeface="微软雅黑" pitchFamily="34" charset="-122"/>
+                <a:cs typeface="微软雅黑" pitchFamily="34" charset="-120"/>
               </a:rPr>
               <a:t>忘写更新，就是死循环</a:t>
             </a:r>
@@ -7782,12 +8430,13 @@
             <a:avLst/>
           </a:prstGeom>
           <a:noFill/>
+          <a:ln/>
         </p:spPr>
         <p:txBody>
           <a:bodyPr wrap="square" rtlCol="0" anchor="t"/>
           <a:lstStyle/>
           <a:p>
-            <a:pPr marL="0" indent="0" algn="l">
+            <a:pPr algn="l" indent="0" marL="0">
               <a:lnSpc>
                 <a:spcPct val="125000"/>
               </a:lnSpc>
@@ -7798,9 +8447,9 @@
                 <a:solidFill>
                   <a:srgbClr val="1F2329"/>
                 </a:solidFill>
-                <a:latin typeface="Consolas" panose="020B0609020204030204" pitchFamily="34" charset="0"/>
-                <a:ea typeface="Consolas" panose="020B0609020204030204" pitchFamily="34" charset="-122"/>
-                <a:cs typeface="Consolas" panose="020B0609020204030204" pitchFamily="34" charset="-120"/>
+                <a:latin typeface="Consolas" pitchFamily="34" charset="0"/>
+                <a:ea typeface="Consolas" pitchFamily="34" charset="-122"/>
+                <a:cs typeface="Consolas" pitchFamily="34" charset="-120"/>
               </a:rPr>
               <a:t>int i = 1;
 while(i &lt;= 100){
@@ -7828,12 +8477,13 @@
             <a:avLst/>
           </a:prstGeom>
           <a:noFill/>
+          <a:ln/>
         </p:spPr>
         <p:txBody>
           <a:bodyPr wrap="square" rtlCol="0" anchor="t"/>
           <a:lstStyle/>
           <a:p>
-            <a:pPr marL="0" indent="0" algn="l">
+            <a:pPr algn="l" indent="0" marL="0">
               <a:lnSpc>
                 <a:spcPct val="115000"/>
               </a:lnSpc>
@@ -7844,12 +8494,18 @@
                 <a:solidFill>
                   <a:srgbClr val="1F4E9C"/>
                 </a:solidFill>
-                <a:latin typeface="微软雅黑" panose="020B0503020204020204" pitchFamily="34" charset="-122"/>
-                <a:ea typeface="微软雅黑" panose="020B0503020204020204" pitchFamily="34" charset="-122"/>
-                <a:cs typeface="微软雅黑" panose="020B0503020204020204" pitchFamily="34" charset="-120"/>
+                <a:latin typeface="微软雅黑" pitchFamily="34" charset="0"/>
+                <a:ea typeface="微软雅黑" pitchFamily="34" charset="-122"/>
+                <a:cs typeface="微软雅黑" pitchFamily="34" charset="-120"/>
               </a:rPr>
               <a:t>•  </a:t>
             </a:r>
+            <a:pPr algn="l" indent="0" marL="0">
+              <a:lnSpc>
+                <a:spcPct val="115000"/>
+              </a:lnSpc>
+              <a:buNone/>
+            </a:pPr>
             <a:r>
               <a:rPr lang="en-US" sz="1800" dirty="0">
                 <a:solidFill>
@@ -7858,6 +8514,12 @@
               </a:rPr>
               <a:t>i永远是1，条件永远成立，</a:t>
             </a:r>
+            <a:pPr algn="l" indent="0" marL="0">
+              <a:lnSpc>
+                <a:spcPct val="115000"/>
+              </a:lnSpc>
+              <a:buNone/>
+            </a:pPr>
             <a:r>
               <a:rPr lang="en-US" sz="1800" b="1" dirty="0">
                 <a:solidFill>
@@ -7885,12 +8547,13 @@
             <a:avLst/>
           </a:prstGeom>
           <a:noFill/>
+          <a:ln/>
         </p:spPr>
         <p:txBody>
           <a:bodyPr wrap="square" rtlCol="0" anchor="t"/>
           <a:lstStyle/>
           <a:p>
-            <a:pPr marL="0" indent="0" algn="l">
+            <a:pPr algn="l" indent="0" marL="0">
               <a:lnSpc>
                 <a:spcPct val="115000"/>
               </a:lnSpc>
@@ -7901,12 +8564,18 @@
                 <a:solidFill>
                   <a:srgbClr val="1F4E9C"/>
                 </a:solidFill>
-                <a:latin typeface="微软雅黑" panose="020B0503020204020204" pitchFamily="34" charset="-122"/>
-                <a:ea typeface="微软雅黑" panose="020B0503020204020204" pitchFamily="34" charset="-122"/>
-                <a:cs typeface="微软雅黑" panose="020B0503020204020204" pitchFamily="34" charset="-120"/>
+                <a:latin typeface="微软雅黑" pitchFamily="34" charset="0"/>
+                <a:ea typeface="微软雅黑" pitchFamily="34" charset="-122"/>
+                <a:cs typeface="微软雅黑" pitchFamily="34" charset="-120"/>
               </a:rPr>
               <a:t>•  </a:t>
             </a:r>
+            <a:pPr algn="l" indent="0" marL="0">
+              <a:lnSpc>
+                <a:spcPct val="115000"/>
+              </a:lnSpc>
+              <a:buNone/>
+            </a:pPr>
             <a:r>
               <a:rPr lang="en-US" sz="1800" dirty="0">
                 <a:solidFill>
@@ -7934,12 +8603,13 @@
             <a:avLst/>
           </a:prstGeom>
           <a:noFill/>
+          <a:ln/>
         </p:spPr>
         <p:txBody>
           <a:bodyPr wrap="square" rtlCol="0" anchor="t"/>
           <a:lstStyle/>
           <a:p>
-            <a:pPr marL="0" indent="0" algn="l">
+            <a:pPr algn="l" indent="0" marL="0">
               <a:lnSpc>
                 <a:spcPct val="115000"/>
               </a:lnSpc>
@@ -7950,12 +8620,18 @@
                 <a:solidFill>
                   <a:srgbClr val="1F4E9C"/>
                 </a:solidFill>
-                <a:latin typeface="微软雅黑" panose="020B0503020204020204" pitchFamily="34" charset="-122"/>
-                <a:ea typeface="微软雅黑" panose="020B0503020204020204" pitchFamily="34" charset="-122"/>
-                <a:cs typeface="微软雅黑" panose="020B0503020204020204" pitchFamily="34" charset="-120"/>
+                <a:latin typeface="微软雅黑" pitchFamily="34" charset="0"/>
+                <a:ea typeface="微软雅黑" pitchFamily="34" charset="-122"/>
+                <a:cs typeface="微软雅黑" pitchFamily="34" charset="-120"/>
               </a:rPr>
               <a:t>•  </a:t>
             </a:r>
+            <a:pPr algn="l" indent="0" marL="0">
+              <a:lnSpc>
+                <a:spcPct val="115000"/>
+              </a:lnSpc>
+              <a:buNone/>
+            </a:pPr>
             <a:r>
               <a:rPr lang="en-US" sz="1800" dirty="0">
                 <a:solidFill>
@@ -7964,6 +8640,12 @@
               </a:rPr>
               <a:t>写循环先问自己：</a:t>
             </a:r>
+            <a:pPr algn="l" indent="0" marL="0">
+              <a:lnSpc>
+                <a:spcPct val="115000"/>
+              </a:lnSpc>
+              <a:buNone/>
+            </a:pPr>
             <a:r>
               <a:rPr lang="en-US" sz="1800" b="1" dirty="0">
                 <a:solidFill>
@@ -8027,7 +8709,7 @@
     </a:clrScheme>
     <a:fontScheme name="Office">
       <a:majorFont>
-        <a:latin typeface="Calibri Light"/>
+        <a:latin typeface="Calibri Light" panose="020F0302020204030204"/>
         <a:ea typeface=""/>
         <a:cs typeface=""/>
         <a:font script="Jpan" typeface="游ゴシック Light"/>
@@ -8060,9 +8742,26 @@
         <a:font script="Viet" typeface="Times New Roman"/>
         <a:font script="Uigh" typeface="Microsoft Uighur"/>
         <a:font script="Geor" typeface="Sylfaen"/>
+        <a:font script="Armn" typeface="Arial"/>
+        <a:font script="Bugi" typeface="Leelawadee UI"/>
+        <a:font script="Bopo" typeface="Microsoft JhengHei"/>
+        <a:font script="Java" typeface="Javanese Text"/>
+        <a:font script="Lisu" typeface="Segoe UI"/>
+        <a:font script="Mymr" typeface="Myanmar Text"/>
+        <a:font script="Nkoo" typeface="Ebrima"/>
+        <a:font script="Olck" typeface="Nirmala UI"/>
+        <a:font script="Osma" typeface="Ebrima"/>
+        <a:font script="Phag" typeface="Phagspa"/>
+        <a:font script="Syrn" typeface="Estrangelo Edessa"/>
+        <a:font script="Syrj" typeface="Estrangelo Edessa"/>
+        <a:font script="Syre" typeface="Estrangelo Edessa"/>
+        <a:font script="Sora" typeface="Nirmala UI"/>
+        <a:font script="Tale" typeface="Microsoft Tai Le"/>
+        <a:font script="Talu" typeface="Microsoft New Tai Lue"/>
+        <a:font script="Tfng" typeface="Ebrima"/>
       </a:majorFont>
       <a:minorFont>
-        <a:latin typeface="Calibri"/>
+        <a:latin typeface="Calibri" panose="020F0502020204030204"/>
         <a:ea typeface=""/>
         <a:cs typeface=""/>
         <a:font script="Jpan" typeface="游ゴシック"/>
@@ -8095,6 +8794,23 @@
         <a:font script="Viet" typeface="Arial"/>
         <a:font script="Uigh" typeface="Microsoft Uighur"/>
         <a:font script="Geor" typeface="Sylfaen"/>
+        <a:font script="Armn" typeface="Arial"/>
+        <a:font script="Bugi" typeface="Leelawadee UI"/>
+        <a:font script="Bopo" typeface="Microsoft JhengHei"/>
+        <a:font script="Java" typeface="Javanese Text"/>
+        <a:font script="Lisu" typeface="Segoe UI"/>
+        <a:font script="Mymr" typeface="Myanmar Text"/>
+        <a:font script="Nkoo" typeface="Ebrima"/>
+        <a:font script="Olck" typeface="Nirmala UI"/>
+        <a:font script="Osma" typeface="Ebrima"/>
+        <a:font script="Phag" typeface="Phagspa"/>
+        <a:font script="Syrn" typeface="Estrangelo Edessa"/>
+        <a:font script="Syrj" typeface="Estrangelo Edessa"/>
+        <a:font script="Syre" typeface="Estrangelo Edessa"/>
+        <a:font script="Sora" typeface="Nirmala UI"/>
+        <a:font script="Tale" typeface="Microsoft Tai Le"/>
+        <a:font script="Talu" typeface="Microsoft New Tai Lue"/>
+        <a:font script="Tfng" typeface="Ebrima"/>
       </a:minorFont>
     </a:fontScheme>
     <a:fmtScheme name="Office">
@@ -8235,265 +8951,8 @@
       </a:bgFillStyleLst>
     </a:fmtScheme>
   </a:themeElements>
-  <a:extLst>
-    <a:ext uri="{05A4C25C-085E-4340-85A3-A5531E510DB2}">
-      <thm15:themeFamily xmlns:thm15="http://schemas.microsoft.com/office/thememl/2012/main" name="Office Theme" id="{62F939B6-93AF-4DB8-9C6B-D6C7DFDC589F}" vid="{4A3C46E8-61CC-4603-A589-7422A47A8E4A}"/>
-    </a:ext>
-  </a:extLst>
-</a:theme>
-</file>
-
-<file path=ppt/theme/theme2.xml><?xml version="1.0" encoding="utf-8"?>
-<a:theme xmlns:a="http://schemas.openxmlformats.org/drawingml/2006/main" name="Office Theme">
-  <a:themeElements>
-    <a:clrScheme name="Office">
-      <a:dk1>
-        <a:sysClr val="windowText" lastClr="000000"/>
-      </a:dk1>
-      <a:lt1>
-        <a:sysClr val="window" lastClr="FFFFFF"/>
-      </a:lt1>
-      <a:dk2>
-        <a:srgbClr val="44546A"/>
-      </a:dk2>
-      <a:lt2>
-        <a:srgbClr val="E7E6E6"/>
-      </a:lt2>
-      <a:accent1>
-        <a:srgbClr val="4472C4"/>
-      </a:accent1>
-      <a:accent2>
-        <a:srgbClr val="ED7D31"/>
-      </a:accent2>
-      <a:accent3>
-        <a:srgbClr val="A5A5A5"/>
-      </a:accent3>
-      <a:accent4>
-        <a:srgbClr val="FFC000"/>
-      </a:accent4>
-      <a:accent5>
-        <a:srgbClr val="5B9BD5"/>
-      </a:accent5>
-      <a:accent6>
-        <a:srgbClr val="70AD47"/>
-      </a:accent6>
-      <a:hlink>
-        <a:srgbClr val="0563C1"/>
-      </a:hlink>
-      <a:folHlink>
-        <a:srgbClr val="954F72"/>
-      </a:folHlink>
-    </a:clrScheme>
-    <a:fontScheme name="Office">
-      <a:majorFont>
-        <a:latin typeface="Calibri Light"/>
-        <a:ea typeface=""/>
-        <a:cs typeface=""/>
-        <a:font script="Jpan" typeface="游ゴシック Light"/>
-        <a:font script="Hang" typeface="맑은 고딕"/>
-        <a:font script="Hans" typeface="等线 Light"/>
-        <a:font script="Hant" typeface="新細明體"/>
-        <a:font script="Arab" typeface="Times New Roman"/>
-        <a:font script="Hebr" typeface="Times New Roman"/>
-        <a:font script="Thai" typeface="Angsana New"/>
-        <a:font script="Ethi" typeface="Nyala"/>
-        <a:font script="Beng" typeface="Vrinda"/>
-        <a:font script="Gujr" typeface="Shruti"/>
-        <a:font script="Khmr" typeface="MoolBoran"/>
-        <a:font script="Knda" typeface="Tunga"/>
-        <a:font script="Guru" typeface="Raavi"/>
-        <a:font script="Cans" typeface="Euphemia"/>
-        <a:font script="Cher" typeface="Plantagenet Cherokee"/>
-        <a:font script="Yiii" typeface="Microsoft Yi Baiti"/>
-        <a:font script="Tibt" typeface="Microsoft Himalaya"/>
-        <a:font script="Thaa" typeface="MV Boli"/>
-        <a:font script="Deva" typeface="Mangal"/>
-        <a:font script="Telu" typeface="Gautami"/>
-        <a:font script="Taml" typeface="Latha"/>
-        <a:font script="Syrc" typeface="Estrangelo Edessa"/>
-        <a:font script="Orya" typeface="Kalinga"/>
-        <a:font script="Mlym" typeface="Kartika"/>
-        <a:font script="Laoo" typeface="DokChampa"/>
-        <a:font script="Sinh" typeface="Iskoola Pota"/>
-        <a:font script="Mong" typeface="Mongolian Baiti"/>
-        <a:font script="Viet" typeface="Times New Roman"/>
-        <a:font script="Uigh" typeface="Microsoft Uighur"/>
-        <a:font script="Geor" typeface="Sylfaen"/>
-      </a:majorFont>
-      <a:minorFont>
-        <a:latin typeface="Calibri"/>
-        <a:ea typeface=""/>
-        <a:cs typeface=""/>
-        <a:font script="Jpan" typeface="游ゴシック"/>
-        <a:font script="Hang" typeface="맑은 고딕"/>
-        <a:font script="Hans" typeface="等线"/>
-        <a:font script="Hant" typeface="新細明體"/>
-        <a:font script="Arab" typeface="Arial"/>
-        <a:font script="Hebr" typeface="Arial"/>
-        <a:font script="Thai" typeface="Cordia New"/>
-        <a:font script="Ethi" typeface="Nyala"/>
-        <a:font script="Beng" typeface="Vrinda"/>
-        <a:font script="Gujr" typeface="Shruti"/>
-        <a:font script="Khmr" typeface="DaunPenh"/>
-        <a:font script="Knda" typeface="Tunga"/>
-        <a:font script="Guru" typeface="Raavi"/>
-        <a:font script="Cans" typeface="Euphemia"/>
-        <a:font script="Cher" typeface="Plantagenet Cherokee"/>
-        <a:font script="Yiii" typeface="Microsoft Yi Baiti"/>
-        <a:font script="Tibt" typeface="Microsoft Himalaya"/>
-        <a:font script="Thaa" typeface="MV Boli"/>
-        <a:font script="Deva" typeface="Mangal"/>
-        <a:font script="Telu" typeface="Gautami"/>
-        <a:font script="Taml" typeface="Latha"/>
-        <a:font script="Syrc" typeface="Estrangelo Edessa"/>
-        <a:font script="Orya" typeface="Kalinga"/>
-        <a:font script="Mlym" typeface="Kartika"/>
-        <a:font script="Laoo" typeface="DokChampa"/>
-        <a:font script="Sinh" typeface="Iskoola Pota"/>
-        <a:font script="Mong" typeface="Mongolian Baiti"/>
-        <a:font script="Viet" typeface="Arial"/>
-        <a:font script="Uigh" typeface="Microsoft Uighur"/>
-        <a:font script="Geor" typeface="Sylfaen"/>
-      </a:minorFont>
-    </a:fontScheme>
-    <a:fmtScheme name="Office">
-      <a:fillStyleLst>
-        <a:solidFill>
-          <a:schemeClr val="phClr"/>
-        </a:solidFill>
-        <a:gradFill rotWithShape="1">
-          <a:gsLst>
-            <a:gs pos="0">
-              <a:schemeClr val="phClr">
-                <a:lumMod val="110000"/>
-                <a:satMod val="105000"/>
-                <a:tint val="67000"/>
-              </a:schemeClr>
-            </a:gs>
-            <a:gs pos="50000">
-              <a:schemeClr val="phClr">
-                <a:lumMod val="105000"/>
-                <a:satMod val="103000"/>
-                <a:tint val="73000"/>
-              </a:schemeClr>
-            </a:gs>
-            <a:gs pos="100000">
-              <a:schemeClr val="phClr">
-                <a:lumMod val="105000"/>
-                <a:satMod val="109000"/>
-                <a:tint val="81000"/>
-              </a:schemeClr>
-            </a:gs>
-          </a:gsLst>
-          <a:lin ang="5400000" scaled="0"/>
-        </a:gradFill>
-        <a:gradFill rotWithShape="1">
-          <a:gsLst>
-            <a:gs pos="0">
-              <a:schemeClr val="phClr">
-                <a:satMod val="103000"/>
-                <a:lumMod val="102000"/>
-                <a:tint val="94000"/>
-              </a:schemeClr>
-            </a:gs>
-            <a:gs pos="50000">
-              <a:schemeClr val="phClr">
-                <a:satMod val="110000"/>
-                <a:lumMod val="100000"/>
-                <a:shade val="100000"/>
-              </a:schemeClr>
-            </a:gs>
-            <a:gs pos="100000">
-              <a:schemeClr val="phClr">
-                <a:lumMod val="99000"/>
-                <a:satMod val="120000"/>
-                <a:shade val="78000"/>
-              </a:schemeClr>
-            </a:gs>
-          </a:gsLst>
-          <a:lin ang="5400000" scaled="0"/>
-        </a:gradFill>
-      </a:fillStyleLst>
-      <a:lnStyleLst>
-        <a:ln w="6350" cap="flat" cmpd="sng" algn="ctr">
-          <a:solidFill>
-            <a:schemeClr val="phClr"/>
-          </a:solidFill>
-          <a:prstDash val="solid"/>
-          <a:miter lim="800000"/>
-        </a:ln>
-        <a:ln w="12700" cap="flat" cmpd="sng" algn="ctr">
-          <a:solidFill>
-            <a:schemeClr val="phClr"/>
-          </a:solidFill>
-          <a:prstDash val="solid"/>
-          <a:miter lim="800000"/>
-        </a:ln>
-        <a:ln w="19050" cap="flat" cmpd="sng" algn="ctr">
-          <a:solidFill>
-            <a:schemeClr val="phClr"/>
-          </a:solidFill>
-          <a:prstDash val="solid"/>
-          <a:miter lim="800000"/>
-        </a:ln>
-      </a:lnStyleLst>
-      <a:effectStyleLst>
-        <a:effectStyle>
-          <a:effectLst/>
-        </a:effectStyle>
-        <a:effectStyle>
-          <a:effectLst/>
-        </a:effectStyle>
-        <a:effectStyle>
-          <a:effectLst>
-            <a:outerShdw blurRad="57150" dist="19050" dir="5400000" algn="ctr" rotWithShape="0">
-              <a:srgbClr val="000000">
-                <a:alpha val="63000"/>
-              </a:srgbClr>
-            </a:outerShdw>
-          </a:effectLst>
-        </a:effectStyle>
-      </a:effectStyleLst>
-      <a:bgFillStyleLst>
-        <a:solidFill>
-          <a:schemeClr val="phClr"/>
-        </a:solidFill>
-        <a:solidFill>
-          <a:schemeClr val="phClr">
-            <a:tint val="95000"/>
-            <a:satMod val="170000"/>
-          </a:schemeClr>
-        </a:solidFill>
-        <a:gradFill rotWithShape="1">
-          <a:gsLst>
-            <a:gs pos="0">
-              <a:schemeClr val="phClr">
-                <a:tint val="93000"/>
-                <a:satMod val="150000"/>
-                <a:shade val="98000"/>
-                <a:lumMod val="102000"/>
-              </a:schemeClr>
-            </a:gs>
-            <a:gs pos="50000">
-              <a:schemeClr val="phClr">
-                <a:tint val="98000"/>
-                <a:satMod val="130000"/>
-                <a:shade val="90000"/>
-                <a:lumMod val="103000"/>
-              </a:schemeClr>
-            </a:gs>
-            <a:gs pos="100000">
-              <a:schemeClr val="phClr">
-                <a:shade val="63000"/>
-                <a:satMod val="120000"/>
-              </a:schemeClr>
-            </a:gs>
-          </a:gsLst>
-          <a:lin ang="5400000" scaled="0"/>
-        </a:gradFill>
-      </a:bgFillStyleLst>
-    </a:fmtScheme>
-  </a:themeElements>
+  <a:objectDefaults/>
+  <a:extraClrSchemeLst/>
   <a:extLst>
     <a:ext uri="{05A4C25C-085E-4340-85A3-A5531E510DB2}">
       <thm15:themeFamily xmlns:thm15="http://schemas.microsoft.com/office/thememl/2012/main" name="Office Theme" id="{62F939B6-93AF-4DB8-9C6B-D6C7DFDC589F}" vid="{4A3C46E8-61CC-4603-A589-7422A47A8E4A}"/>

--- a/课件/C1/C1-A-04/C1-A-04.pptx
+++ b/课件/C1/C1-A-04/C1-A-04.pptx
@@ -21,9 +21,11 @@
     <p:sldId id="269" r:id="rId15"/>
     <p:sldId id="270" r:id="rId16"/>
     <p:sldId id="271" r:id="rId17"/>
+    <p:sldId id="272" r:id="rId18"/>
+    <p:sldId id="273" r:id="rId19"/>
   </p:sldIdLst>
   <p:notesMasterIdLst>
-    <p:notesMasterId r:id="rId18"/>
+    <p:notesMasterId r:id="rId20"/>
   </p:notesMasterIdLst>
   <p:sldSz cx="12191695" cy="6858000"/>
   <p:notesSz cx="6858000" cy="12191695"/>
@@ -1157,6 +1159,182 @@
             <a:fld id="{F7021451-1387-4CA6-816F-3879F97B5CBC}" type="slidenum">
               <a:rPr lang="en-US"/>
               <a:t>16</a:t>
+            </a:fld>
+            <a:endParaRPr lang="en-US"/>
+          </a:p>
+        </p:txBody>
+      </p:sp>
+    </p:spTree>
+    <p:extLst>
+      <p:ext uri="{BB962C8B-B14F-4D97-AF65-F5344CB8AC3E}">
+        <p14:creationId xmlns:p14="http://schemas.microsoft.com/office/powerpoint/2010/main" val="1024086991"/>
+      </p:ext>
+    </p:extLst>
+  </p:cSld>
+  <p:clrMapOvr>
+    <a:masterClrMapping/>
+  </p:clrMapOvr>
+</p:notes>
+</file>
+
+<file path=ppt/notesSlides/notesSlide17.xml><?xml version="1.0" encoding="utf-8"?>
+<p:notes xmlns:a="http://schemas.openxmlformats.org/drawingml/2006/main" xmlns:r="http://schemas.openxmlformats.org/officeDocument/2006/relationships" xmlns:p="http://schemas.openxmlformats.org/presentationml/2006/main">
+  <p:cSld>
+    <p:spTree>
+      <p:nvGrpSpPr>
+        <p:cNvPr id="1" name=""/>
+        <p:cNvGrpSpPr/>
+        <p:nvPr/>
+      </p:nvGrpSpPr>
+      <p:grpSpPr>
+        <a:xfrm>
+          <a:off x="0" y="0"/>
+          <a:ext cx="0" cy="0"/>
+          <a:chOff x="0" y="0"/>
+          <a:chExt cx="0" cy="0"/>
+        </a:xfrm>
+      </p:grpSpPr>
+      <p:sp>
+        <p:nvSpPr>
+          <p:cNvPr id="2" name="Slide Image Placeholder 1"/>
+          <p:cNvSpPr>
+            <a:spLocks noGrp="1" noRot="1" noChangeAspect="1"/>
+          </p:cNvSpPr>
+          <p:nvPr>
+            <p:ph type="sldImg"/>
+          </p:nvPr>
+        </p:nvSpPr>
+        <p:spPr/>
+      </p:sp>
+      <p:sp>
+        <p:nvSpPr>
+          <p:cNvPr id="3" name="Notes Placeholder 2"/>
+          <p:cNvSpPr>
+            <a:spLocks noGrp="1"/>
+          </p:cNvSpPr>
+          <p:nvPr>
+            <p:ph type="body" idx="1"/>
+          </p:nvPr>
+        </p:nvSpPr>
+        <p:spPr/>
+        <p:txBody>
+          <a:bodyPr/>
+          <a:lstStyle/>
+          <a:p>
+            <a:r>
+              <a:rPr lang="en-US" dirty="0"/>
+              <a:t/>
+            </a:r>
+            <a:endParaRPr lang="en-US" dirty="0"/>
+          </a:p>
+        </p:txBody>
+      </p:sp>
+      <p:sp>
+        <p:nvSpPr>
+          <p:cNvPr id="4" name="Slide Number Placeholder 3"/>
+          <p:cNvSpPr>
+            <a:spLocks noGrp="1"/>
+          </p:cNvSpPr>
+          <p:nvPr>
+            <p:ph type="sldNum" sz="quarter" idx="10"/>
+          </p:nvPr>
+        </p:nvSpPr>
+        <p:spPr/>
+        <p:txBody>
+          <a:bodyPr/>
+          <a:lstStyle/>
+          <a:p>
+            <a:fld id="{F7021451-1387-4CA6-816F-3879F97B5CBC}" type="slidenum">
+              <a:rPr lang="en-US"/>
+              <a:t>17</a:t>
+            </a:fld>
+            <a:endParaRPr lang="en-US"/>
+          </a:p>
+        </p:txBody>
+      </p:sp>
+    </p:spTree>
+    <p:extLst>
+      <p:ext uri="{BB962C8B-B14F-4D97-AF65-F5344CB8AC3E}">
+        <p14:creationId xmlns:p14="http://schemas.microsoft.com/office/powerpoint/2010/main" val="1024086991"/>
+      </p:ext>
+    </p:extLst>
+  </p:cSld>
+  <p:clrMapOvr>
+    <a:masterClrMapping/>
+  </p:clrMapOvr>
+</p:notes>
+</file>
+
+<file path=ppt/notesSlides/notesSlide18.xml><?xml version="1.0" encoding="utf-8"?>
+<p:notes xmlns:a="http://schemas.openxmlformats.org/drawingml/2006/main" xmlns:r="http://schemas.openxmlformats.org/officeDocument/2006/relationships" xmlns:p="http://schemas.openxmlformats.org/presentationml/2006/main">
+  <p:cSld>
+    <p:spTree>
+      <p:nvGrpSpPr>
+        <p:cNvPr id="1" name=""/>
+        <p:cNvGrpSpPr/>
+        <p:nvPr/>
+      </p:nvGrpSpPr>
+      <p:grpSpPr>
+        <a:xfrm>
+          <a:off x="0" y="0"/>
+          <a:ext cx="0" cy="0"/>
+          <a:chOff x="0" y="0"/>
+          <a:chExt cx="0" cy="0"/>
+        </a:xfrm>
+      </p:grpSpPr>
+      <p:sp>
+        <p:nvSpPr>
+          <p:cNvPr id="2" name="Slide Image Placeholder 1"/>
+          <p:cNvSpPr>
+            <a:spLocks noGrp="1" noRot="1" noChangeAspect="1"/>
+          </p:cNvSpPr>
+          <p:nvPr>
+            <p:ph type="sldImg"/>
+          </p:nvPr>
+        </p:nvSpPr>
+        <p:spPr/>
+      </p:sp>
+      <p:sp>
+        <p:nvSpPr>
+          <p:cNvPr id="3" name="Notes Placeholder 2"/>
+          <p:cNvSpPr>
+            <a:spLocks noGrp="1"/>
+          </p:cNvSpPr>
+          <p:nvPr>
+            <p:ph type="body" idx="1"/>
+          </p:nvPr>
+        </p:nvSpPr>
+        <p:spPr/>
+        <p:txBody>
+          <a:bodyPr/>
+          <a:lstStyle/>
+          <a:p>
+            <a:r>
+              <a:rPr lang="en-US" dirty="0"/>
+              <a:t/>
+            </a:r>
+            <a:endParaRPr lang="en-US" dirty="0"/>
+          </a:p>
+        </p:txBody>
+      </p:sp>
+      <p:sp>
+        <p:nvSpPr>
+          <p:cNvPr id="4" name="Slide Number Placeholder 3"/>
+          <p:cNvSpPr>
+            <a:spLocks noGrp="1"/>
+          </p:cNvSpPr>
+          <p:nvPr>
+            <p:ph type="sldNum" sz="quarter" idx="10"/>
+          </p:nvPr>
+        </p:nvSpPr>
+        <p:spPr/>
+        <p:txBody>
+          <a:bodyPr/>
+          <a:lstStyle/>
+          <a:p>
+            <a:fld id="{F7021451-1387-4CA6-816F-3879F97B5CBC}" type="slidenum">
+              <a:rPr lang="en-US"/>
+              <a:t>18</a:t>
             </a:fld>
             <a:endParaRPr lang="en-US"/>
           </a:p>
@@ -2250,7 +2428,7 @@
                 <a:ea typeface="微软雅黑" pitchFamily="34" charset="-122"/>
                 <a:cs typeface="微软雅黑" pitchFamily="34" charset="-120"/>
               </a:rPr>
-              <a:t>1 / 16</a:t>
+              <a:t>1 / 18</a:t>
             </a:r>
             <a:endParaRPr lang="en-US" sz="1000" dirty="0"/>
           </a:p>
@@ -2484,7 +2662,7 @@
                 <a:ea typeface="微软雅黑" pitchFamily="34" charset="-122"/>
                 <a:cs typeface="微软雅黑" pitchFamily="34" charset="-120"/>
               </a:rPr>
-              <a:t>10 / 16</a:t>
+              <a:t>10 / 18</a:t>
             </a:r>
             <a:endParaRPr lang="en-US" sz="1000" dirty="0"/>
           </a:p>
@@ -2583,19 +2761,34 @@
             <a:avLst/>
           </a:prstGeom>
           <a:solidFill>
-            <a:srgbClr val="F5F6F7"/>
+            <a:srgbClr val="F7F9FC"/>
           </a:solidFill>
-          <a:ln w="9525">
-            <a:solidFill>
-              <a:srgbClr val="D8DBE0"/>
-            </a:solidFill>
-            <a:prstDash val="solid"/>
-          </a:ln>
-        </p:spPr>
-      </p:sp>
-      <p:sp>
-        <p:nvSpPr>
-          <p:cNvPr id="6" name="Text 4"/>
+          <a:ln/>
+        </p:spPr>
+      </p:sp>
+      <p:sp>
+        <p:nvSpPr>
+          <p:cNvPr id="6" name="Shape 4"/>
+          <p:cNvSpPr/>
+          <p:nvPr/>
+        </p:nvSpPr>
+        <p:spPr>
+          <a:xfrm>
+            <a:off x="822960" y="2395728"/>
+            <a:ext cx="50292" cy="1271016"/>
+          </a:xfrm>
+          <a:prstGeom prst="rect">
+            <a:avLst/>
+          </a:prstGeom>
+          <a:solidFill>
+            <a:srgbClr val="1F4E9C"/>
+          </a:solidFill>
+          <a:ln/>
+        </p:spPr>
+      </p:sp>
+      <p:sp>
+        <p:nvSpPr>
+          <p:cNvPr id="7" name="Text 5"/>
           <p:cNvSpPr/>
           <p:nvPr/>
         </p:nvSpPr>
@@ -2640,7 +2833,7 @@
       </p:sp>
       <p:sp>
         <p:nvSpPr>
-          <p:cNvPr id="7" name="Text 5"/>
+          <p:cNvPr id="8" name="Text 6"/>
           <p:cNvSpPr/>
           <p:nvPr/>
         </p:nvSpPr>
@@ -2724,7 +2917,7 @@
       </p:sp>
       <p:sp>
         <p:nvSpPr>
-          <p:cNvPr id="8" name="Text 6"/>
+          <p:cNvPr id="9" name="Text 7"/>
           <p:cNvSpPr/>
           <p:nvPr/>
         </p:nvSpPr>
@@ -2780,7 +2973,7 @@
       </p:sp>
       <p:sp>
         <p:nvSpPr>
-          <p:cNvPr id="9" name="Text 7"/>
+          <p:cNvPr id="10" name="Text 8"/>
           <p:cNvSpPr/>
           <p:nvPr/>
         </p:nvSpPr>
@@ -2906,7 +3099,7 @@
                 <a:ea typeface="微软雅黑" pitchFamily="34" charset="-122"/>
                 <a:cs typeface="微软雅黑" pitchFamily="34" charset="-120"/>
               </a:rPr>
-              <a:t>11 / 16</a:t>
+              <a:t>11 / 18</a:t>
             </a:r>
             <a:endParaRPr lang="en-US" sz="1000" dirty="0"/>
           </a:p>
@@ -3005,19 +3198,34 @@
             <a:avLst/>
           </a:prstGeom>
           <a:solidFill>
-            <a:srgbClr val="F5F6F7"/>
+            <a:srgbClr val="F7F9FC"/>
           </a:solidFill>
-          <a:ln w="9525">
-            <a:solidFill>
-              <a:srgbClr val="D8DBE0"/>
-            </a:solidFill>
-            <a:prstDash val="solid"/>
-          </a:ln>
-        </p:spPr>
-      </p:sp>
-      <p:sp>
-        <p:nvSpPr>
-          <p:cNvPr id="6" name="Text 4"/>
+          <a:ln/>
+        </p:spPr>
+      </p:sp>
+      <p:sp>
+        <p:nvSpPr>
+          <p:cNvPr id="6" name="Shape 4"/>
+          <p:cNvSpPr/>
+          <p:nvPr/>
+        </p:nvSpPr>
+        <p:spPr>
+          <a:xfrm>
+            <a:off x="822960" y="2395728"/>
+            <a:ext cx="50292" cy="1746504"/>
+          </a:xfrm>
+          <a:prstGeom prst="rect">
+            <a:avLst/>
+          </a:prstGeom>
+          <a:solidFill>
+            <a:srgbClr val="1F4E9C"/>
+          </a:solidFill>
+          <a:ln/>
+        </p:spPr>
+      </p:sp>
+      <p:sp>
+        <p:nvSpPr>
+          <p:cNvPr id="7" name="Text 5"/>
           <p:cNvSpPr/>
           <p:nvPr/>
         </p:nvSpPr>
@@ -3064,7 +3272,7 @@
       </p:sp>
       <p:sp>
         <p:nvSpPr>
-          <p:cNvPr id="7" name="Text 5"/>
+          <p:cNvPr id="8" name="Text 6"/>
           <p:cNvSpPr/>
           <p:nvPr/>
         </p:nvSpPr>
@@ -3134,7 +3342,7 @@
       </p:sp>
       <p:sp>
         <p:nvSpPr>
-          <p:cNvPr id="8" name="Text 6"/>
+          <p:cNvPr id="9" name="Text 7"/>
           <p:cNvSpPr/>
           <p:nvPr/>
         </p:nvSpPr>
@@ -3204,7 +3412,7 @@
       </p:sp>
       <p:sp>
         <p:nvSpPr>
-          <p:cNvPr id="9" name="Text 7"/>
+          <p:cNvPr id="10" name="Text 8"/>
           <p:cNvSpPr/>
           <p:nvPr/>
         </p:nvSpPr>
@@ -3330,7 +3538,7 @@
                 <a:ea typeface="微软雅黑" pitchFamily="34" charset="-122"/>
                 <a:cs typeface="微软雅黑" pitchFamily="34" charset="-120"/>
               </a:rPr>
-              <a:t>12 / 16</a:t>
+              <a:t>12 / 18</a:t>
             </a:r>
             <a:endParaRPr lang="en-US" sz="1000" dirty="0"/>
           </a:p>
@@ -3429,19 +3637,34 @@
             <a:avLst/>
           </a:prstGeom>
           <a:solidFill>
-            <a:srgbClr val="F5F6F7"/>
+            <a:srgbClr val="F7F9FC"/>
           </a:solidFill>
-          <a:ln w="9525">
-            <a:solidFill>
-              <a:srgbClr val="D8DBE0"/>
-            </a:solidFill>
-            <a:prstDash val="solid"/>
-          </a:ln>
-        </p:spPr>
-      </p:sp>
-      <p:sp>
-        <p:nvSpPr>
-          <p:cNvPr id="6" name="Text 4"/>
+          <a:ln/>
+        </p:spPr>
+      </p:sp>
+      <p:sp>
+        <p:nvSpPr>
+          <p:cNvPr id="6" name="Shape 4"/>
+          <p:cNvSpPr/>
+          <p:nvPr/>
+        </p:nvSpPr>
+        <p:spPr>
+          <a:xfrm>
+            <a:off x="822960" y="2395728"/>
+            <a:ext cx="50292" cy="1746504"/>
+          </a:xfrm>
+          <a:prstGeom prst="rect">
+            <a:avLst/>
+          </a:prstGeom>
+          <a:solidFill>
+            <a:srgbClr val="1F4E9C"/>
+          </a:solidFill>
+          <a:ln/>
+        </p:spPr>
+      </p:sp>
+      <p:sp>
+        <p:nvSpPr>
+          <p:cNvPr id="7" name="Text 5"/>
           <p:cNvSpPr/>
           <p:nvPr/>
         </p:nvSpPr>
@@ -3488,7 +3711,7 @@
       </p:sp>
       <p:sp>
         <p:nvSpPr>
-          <p:cNvPr id="7" name="Text 5"/>
+          <p:cNvPr id="8" name="Text 6"/>
           <p:cNvSpPr/>
           <p:nvPr/>
         </p:nvSpPr>
@@ -3544,7 +3767,7 @@
       </p:sp>
       <p:sp>
         <p:nvSpPr>
-          <p:cNvPr id="8" name="Text 6"/>
+          <p:cNvPr id="9" name="Text 7"/>
           <p:cNvSpPr/>
           <p:nvPr/>
         </p:nvSpPr>
@@ -3614,7 +3837,7 @@
       </p:sp>
       <p:sp>
         <p:nvSpPr>
-          <p:cNvPr id="9" name="Text 7"/>
+          <p:cNvPr id="10" name="Text 8"/>
           <p:cNvSpPr/>
           <p:nvPr/>
         </p:nvSpPr>
@@ -3740,7 +3963,7 @@
                 <a:ea typeface="微软雅黑" pitchFamily="34" charset="-122"/>
                 <a:cs typeface="微软雅黑" pitchFamily="34" charset="-120"/>
               </a:rPr>
-              <a:t>13 / 16</a:t>
+              <a:t>13 / 18</a:t>
             </a:r>
             <a:endParaRPr lang="en-US" sz="1000" dirty="0"/>
           </a:p>
@@ -3999,7 +4222,7 @@
                 <a:ea typeface="微软雅黑" pitchFamily="34" charset="-122"/>
                 <a:cs typeface="微软雅黑" pitchFamily="34" charset="-120"/>
               </a:rPr>
-              <a:t>14 / 16</a:t>
+              <a:t>14 / 18</a:t>
             </a:r>
             <a:endParaRPr lang="en-US" sz="1000" dirty="0"/>
           </a:p>
@@ -4098,19 +4321,34 @@
             <a:avLst/>
           </a:prstGeom>
           <a:solidFill>
-            <a:srgbClr val="F5F6F7"/>
+            <a:srgbClr val="F7F9FC"/>
           </a:solidFill>
-          <a:ln w="9525">
-            <a:solidFill>
-              <a:srgbClr val="D8DBE0"/>
-            </a:solidFill>
-            <a:prstDash val="solid"/>
-          </a:ln>
-        </p:spPr>
-      </p:sp>
-      <p:sp>
-        <p:nvSpPr>
-          <p:cNvPr id="6" name="Text 4"/>
+          <a:ln/>
+        </p:spPr>
+      </p:sp>
+      <p:sp>
+        <p:nvSpPr>
+          <p:cNvPr id="6" name="Shape 4"/>
+          <p:cNvSpPr/>
+          <p:nvPr/>
+        </p:nvSpPr>
+        <p:spPr>
+          <a:xfrm>
+            <a:off x="822960" y="2395728"/>
+            <a:ext cx="50292" cy="2935224"/>
+          </a:xfrm>
+          <a:prstGeom prst="rect">
+            <a:avLst/>
+          </a:prstGeom>
+          <a:solidFill>
+            <a:srgbClr val="1F4E9C"/>
+          </a:solidFill>
+          <a:ln/>
+        </p:spPr>
+      </p:sp>
+      <p:sp>
+        <p:nvSpPr>
+          <p:cNvPr id="7" name="Text 5"/>
           <p:cNvSpPr/>
           <p:nvPr/>
         </p:nvSpPr>
@@ -4162,7 +4400,7 @@
       </p:sp>
       <p:sp>
         <p:nvSpPr>
-          <p:cNvPr id="7" name="Text 5"/>
+          <p:cNvPr id="8" name="Text 6"/>
           <p:cNvSpPr/>
           <p:nvPr/>
         </p:nvSpPr>
@@ -4271,7 +4509,7 @@
                 <a:ea typeface="微软雅黑" pitchFamily="34" charset="-122"/>
                 <a:cs typeface="微软雅黑" pitchFamily="34" charset="-120"/>
               </a:rPr>
-              <a:t>15 / 16</a:t>
+              <a:t>15 / 18</a:t>
             </a:r>
             <a:endParaRPr lang="en-US" sz="1000" dirty="0"/>
           </a:p>
@@ -4704,7 +4942,7 @@
                 <a:ea typeface="微软雅黑" pitchFamily="34" charset="-122"/>
                 <a:cs typeface="微软雅黑" pitchFamily="34" charset="-120"/>
               </a:rPr>
-              <a:t>16 / 16</a:t>
+              <a:t>16 / 18</a:t>
             </a:r>
             <a:endParaRPr lang="en-US" sz="1000" dirty="0"/>
           </a:p>
@@ -4961,9 +5199,727 @@
                 <a:ea typeface="微软雅黑" pitchFamily="34" charset="-122"/>
                 <a:cs typeface="微软雅黑" pitchFamily="34" charset="-120"/>
               </a:rPr>
-              <a:t>写完对照讲稿附录的参考答案；要求：合上笔记能默写循环三要素</a:t>
+              <a:t>参考答案在本PPT最后两页，课后自行对照；要求：合上笔记能默写循环三要素</a:t>
             </a:r>
             <a:endParaRPr lang="en-US" sz="1500" dirty="0"/>
+          </a:p>
+        </p:txBody>
+      </p:sp>
+    </p:spTree>
+  </p:cSld>
+  <p:clrMapOvr>
+    <a:masterClrMapping/>
+  </p:clrMapOvr>
+</p:sld>
+</file>
+
+<file path=ppt/slides/slide17.xml><?xml version="1.0" encoding="utf-8"?>
+<p:sld xmlns:a="http://schemas.openxmlformats.org/drawingml/2006/main" xmlns:r="http://schemas.openxmlformats.org/officeDocument/2006/relationships" xmlns:p="http://schemas.openxmlformats.org/presentationml/2006/main">
+  <p:cSld name="Slide 17">
+    <p:bg>
+      <p:bgPr>
+        <a:blipFill dpi="0" rotWithShape="1">
+          <a:blip r:embed="rId1">
+            <a:lum/>
+          </a:blip>
+          <a:srcRect/>
+          <a:stretch>
+            <a:fillRect/>
+          </a:stretch>
+        </a:blipFill>
+        <a:effectLst/>
+      </p:bgPr>
+    </p:bg>
+    <p:spTree>
+      <p:nvGrpSpPr>
+        <p:cNvPr id="1" name=""/>
+        <p:cNvGrpSpPr/>
+        <p:nvPr/>
+      </p:nvGrpSpPr>
+      <p:grpSpPr>
+        <a:xfrm>
+          <a:off x="0" y="0"/>
+          <a:ext cx="0" cy="0"/>
+          <a:chOff x="0" y="0"/>
+          <a:chExt cx="0" cy="0"/>
+        </a:xfrm>
+      </p:grpSpPr>
+      <p:sp>
+        <p:nvSpPr>
+          <p:cNvPr id="2" name="Text 0"/>
+          <p:cNvSpPr/>
+          <p:nvPr/>
+        </p:nvSpPr>
+        <p:spPr>
+          <a:xfrm>
+            <a:off x="10362895" y="6016752"/>
+            <a:ext cx="1463040" cy="320040"/>
+          </a:xfrm>
+          <a:prstGeom prst="rect">
+            <a:avLst/>
+          </a:prstGeom>
+          <a:noFill/>
+          <a:ln/>
+        </p:spPr>
+        <p:txBody>
+          <a:bodyPr wrap="square" rtlCol="0" anchor="ctr"/>
+          <a:lstStyle/>
+          <a:p>
+            <a:pPr algn="r" indent="0" marL="0">
+              <a:buNone/>
+            </a:pPr>
+            <a:r>
+              <a:rPr lang="en-US" sz="1000" dirty="0">
+                <a:solidFill>
+                  <a:srgbClr val="8A9099"/>
+                </a:solidFill>
+                <a:latin typeface="微软雅黑" pitchFamily="34" charset="0"/>
+                <a:ea typeface="微软雅黑" pitchFamily="34" charset="-122"/>
+                <a:cs typeface="微软雅黑" pitchFamily="34" charset="-120"/>
+              </a:rPr>
+              <a:t>17 / 18</a:t>
+            </a:r>
+            <a:endParaRPr lang="en-US" sz="1000" dirty="0"/>
+          </a:p>
+        </p:txBody>
+      </p:sp>
+      <p:sp>
+        <p:nvSpPr>
+          <p:cNvPr id="3" name="Text 1"/>
+          <p:cNvSpPr/>
+          <p:nvPr/>
+        </p:nvSpPr>
+        <p:spPr>
+          <a:xfrm>
+            <a:off x="822960" y="960120"/>
+            <a:ext cx="10545775" cy="365760"/>
+          </a:xfrm>
+          <a:prstGeom prst="rect">
+            <a:avLst/>
+          </a:prstGeom>
+          <a:noFill/>
+          <a:ln/>
+        </p:spPr>
+        <p:txBody>
+          <a:bodyPr wrap="square" rtlCol="0" anchor="ctr"/>
+          <a:lstStyle/>
+          <a:p>
+            <a:pPr algn="l" indent="0" marL="0">
+              <a:buNone/>
+            </a:pPr>
+            <a:r>
+              <a:rPr lang="en-US" sz="1400" b="1" dirty="0">
+                <a:solidFill>
+                  <a:srgbClr val="1F4E9C"/>
+                </a:solidFill>
+                <a:latin typeface="微软雅黑" pitchFamily="34" charset="0"/>
+                <a:ea typeface="微软雅黑" pitchFamily="34" charset="-122"/>
+                <a:cs typeface="微软雅黑" pitchFamily="34" charset="-120"/>
+              </a:rPr>
+              <a:t>参考答案 · 跟练题</a:t>
+            </a:r>
+            <a:endParaRPr lang="en-US" sz="1400" dirty="0"/>
+          </a:p>
+        </p:txBody>
+      </p:sp>
+      <p:sp>
+        <p:nvSpPr>
+          <p:cNvPr id="4" name="Text 2"/>
+          <p:cNvSpPr/>
+          <p:nvPr/>
+        </p:nvSpPr>
+        <p:spPr>
+          <a:xfrm>
+            <a:off x="822960" y="1344168"/>
+            <a:ext cx="10545775" cy="731520"/>
+          </a:xfrm>
+          <a:prstGeom prst="rect">
+            <a:avLst/>
+          </a:prstGeom>
+          <a:noFill/>
+          <a:ln/>
+        </p:spPr>
+        <p:txBody>
+          <a:bodyPr wrap="square" rtlCol="0" anchor="ctr"/>
+          <a:lstStyle/>
+          <a:p>
+            <a:pPr algn="l" indent="0" marL="0">
+              <a:buNone/>
+            </a:pPr>
+            <a:r>
+              <a:rPr lang="en-US" sz="2800" b="1" dirty="0">
+                <a:solidFill>
+                  <a:srgbClr val="1F2329"/>
+                </a:solidFill>
+                <a:latin typeface="微软雅黑" pitchFamily="34" charset="0"/>
+                <a:ea typeface="微软雅黑" pitchFamily="34" charset="-122"/>
+                <a:cs typeface="微软雅黑" pitchFamily="34" charset="-120"/>
+              </a:rPr>
+              <a:t>跟练题参考答案（自行对照）</a:t>
+            </a:r>
+            <a:endParaRPr lang="en-US" sz="2800" dirty="0"/>
+          </a:p>
+        </p:txBody>
+      </p:sp>
+      <p:sp>
+        <p:nvSpPr>
+          <p:cNvPr id="5" name="Shape 3"/>
+          <p:cNvSpPr/>
+          <p:nvPr/>
+        </p:nvSpPr>
+        <p:spPr>
+          <a:xfrm>
+            <a:off x="822960" y="2395728"/>
+            <a:ext cx="10545775" cy="2647370"/>
+          </a:xfrm>
+          <a:prstGeom prst="rect">
+            <a:avLst/>
+          </a:prstGeom>
+          <a:solidFill>
+            <a:srgbClr val="F7F9FC"/>
+          </a:solidFill>
+          <a:ln/>
+        </p:spPr>
+      </p:sp>
+      <p:sp>
+        <p:nvSpPr>
+          <p:cNvPr id="6" name="Shape 4"/>
+          <p:cNvSpPr/>
+          <p:nvPr/>
+        </p:nvSpPr>
+        <p:spPr>
+          <a:xfrm>
+            <a:off x="822960" y="2395728"/>
+            <a:ext cx="50292" cy="2647370"/>
+          </a:xfrm>
+          <a:prstGeom prst="rect">
+            <a:avLst/>
+          </a:prstGeom>
+          <a:solidFill>
+            <a:srgbClr val="1F4E9C"/>
+          </a:solidFill>
+          <a:ln/>
+        </p:spPr>
+      </p:sp>
+      <p:sp>
+        <p:nvSpPr>
+          <p:cNvPr id="7" name="Text 5"/>
+          <p:cNvSpPr/>
+          <p:nvPr/>
+        </p:nvSpPr>
+        <p:spPr>
+          <a:xfrm>
+            <a:off x="1078992" y="2505456"/>
+            <a:ext cx="10033711" cy="2427914"/>
+          </a:xfrm>
+          <a:prstGeom prst="rect">
+            <a:avLst/>
+          </a:prstGeom>
+          <a:noFill/>
+          <a:ln/>
+        </p:spPr>
+        <p:txBody>
+          <a:bodyPr wrap="square" rtlCol="0" anchor="t"/>
+          <a:lstStyle/>
+          <a:p>
+            <a:pPr algn="l" indent="0" marL="0">
+              <a:lnSpc>
+                <a:spcPct val="125000"/>
+              </a:lnSpc>
+              <a:buNone/>
+            </a:pPr>
+            <a:r>
+              <a:rPr lang="en-US" sz="1200" dirty="0">
+                <a:solidFill>
+                  <a:srgbClr val="1F2329"/>
+                </a:solidFill>
+                <a:latin typeface="Consolas" pitchFamily="34" charset="0"/>
+                <a:ea typeface="Consolas" pitchFamily="34" charset="-122"/>
+                <a:cs typeface="Consolas" pitchFamily="34" charset="-120"/>
+              </a:rPr>
+              <a:t>#include &lt;stdio.h&gt;
+int main(){
+    int sum = 0;
+    for(int i = 1; i &lt;= 100; i++){
+        sum += i;
+    }
+    printf("1到100的和是：%d\n", sum);
+    return 0;
+}
+// 输出：1到100的和是：5050
+</a:t>
+            </a:r>
+            <a:endParaRPr lang="en-US" sz="1200" dirty="0"/>
+          </a:p>
+        </p:txBody>
+      </p:sp>
+      <p:sp>
+        <p:nvSpPr>
+          <p:cNvPr id="8" name="Text 6"/>
+          <p:cNvSpPr/>
+          <p:nvPr/>
+        </p:nvSpPr>
+        <p:spPr>
+          <a:xfrm>
+            <a:off x="896112" y="5244266"/>
+            <a:ext cx="10454335" cy="359664"/>
+          </a:xfrm>
+          <a:prstGeom prst="rect">
+            <a:avLst/>
+          </a:prstGeom>
+          <a:noFill/>
+          <a:ln/>
+        </p:spPr>
+        <p:txBody>
+          <a:bodyPr wrap="square" rtlCol="0" anchor="t"/>
+          <a:lstStyle/>
+          <a:p>
+            <a:pPr algn="l" indent="0" marL="0">
+              <a:lnSpc>
+                <a:spcPct val="115000"/>
+              </a:lnSpc>
+              <a:buNone/>
+            </a:pPr>
+            <a:r>
+              <a:rPr lang="en-US" sz="1600" b="1" dirty="0">
+                <a:solidFill>
+                  <a:srgbClr val="1F4E9C"/>
+                </a:solidFill>
+                <a:latin typeface="微软雅黑" pitchFamily="34" charset="0"/>
+                <a:ea typeface="微软雅黑" pitchFamily="34" charset="-122"/>
+                <a:cs typeface="微软雅黑" pitchFamily="34" charset="-120"/>
+              </a:rPr>
+              <a:t>•  </a:t>
+            </a:r>
+            <a:pPr algn="l" indent="0" marL="0">
+              <a:lnSpc>
+                <a:spcPct val="115000"/>
+              </a:lnSpc>
+              <a:buNone/>
+            </a:pPr>
+            <a:r>
+              <a:rPr lang="en-US" sz="1600" dirty="0">
+                <a:solidFill>
+                  <a:srgbClr val="000000"/>
+                </a:solidFill>
+              </a:rPr>
+              <a:t>累加器 sum 先清零，for 让 i 从 1 累加到 100，结果为 5050</a:t>
+            </a:r>
+            <a:endParaRPr lang="en-US" sz="1600" dirty="0"/>
+          </a:p>
+        </p:txBody>
+      </p:sp>
+      <p:sp>
+        <p:nvSpPr>
+          <p:cNvPr id="9" name="Text 7"/>
+          <p:cNvSpPr/>
+          <p:nvPr/>
+        </p:nvSpPr>
+        <p:spPr>
+          <a:xfrm>
+            <a:off x="896112" y="5677082"/>
+            <a:ext cx="10454335" cy="359664"/>
+          </a:xfrm>
+          <a:prstGeom prst="rect">
+            <a:avLst/>
+          </a:prstGeom>
+          <a:noFill/>
+          <a:ln/>
+        </p:spPr>
+        <p:txBody>
+          <a:bodyPr wrap="square" rtlCol="0" anchor="t"/>
+          <a:lstStyle/>
+          <a:p>
+            <a:pPr algn="l" indent="0" marL="0">
+              <a:lnSpc>
+                <a:spcPct val="115000"/>
+              </a:lnSpc>
+              <a:buNone/>
+            </a:pPr>
+            <a:r>
+              <a:rPr lang="en-US" sz="1600" b="1" dirty="0">
+                <a:solidFill>
+                  <a:srgbClr val="1F4E9C"/>
+                </a:solidFill>
+                <a:latin typeface="微软雅黑" pitchFamily="34" charset="0"/>
+                <a:ea typeface="微软雅黑" pitchFamily="34" charset="-122"/>
+                <a:cs typeface="微软雅黑" pitchFamily="34" charset="-120"/>
+              </a:rPr>
+              <a:t>•  </a:t>
+            </a:r>
+            <a:pPr algn="l" indent="0" marL="0">
+              <a:lnSpc>
+                <a:spcPct val="115000"/>
+              </a:lnSpc>
+              <a:buNone/>
+            </a:pPr>
+            <a:r>
+              <a:rPr lang="en-US" sz="1600" dirty="0">
+                <a:solidFill>
+                  <a:srgbClr val="000000"/>
+                </a:solidFill>
+              </a:rPr>
+              <a:t>循环三要素：初始化、条件、更新，缺一不可</a:t>
+            </a:r>
+            <a:endParaRPr lang="en-US" sz="1600" dirty="0"/>
+          </a:p>
+        </p:txBody>
+      </p:sp>
+    </p:spTree>
+  </p:cSld>
+  <p:clrMapOvr>
+    <a:masterClrMapping/>
+  </p:clrMapOvr>
+</p:sld>
+</file>
+
+<file path=ppt/slides/slide18.xml><?xml version="1.0" encoding="utf-8"?>
+<p:sld xmlns:a="http://schemas.openxmlformats.org/drawingml/2006/main" xmlns:r="http://schemas.openxmlformats.org/officeDocument/2006/relationships" xmlns:p="http://schemas.openxmlformats.org/presentationml/2006/main">
+  <p:cSld name="Slide 18">
+    <p:bg>
+      <p:bgPr>
+        <a:blipFill dpi="0" rotWithShape="1">
+          <a:blip r:embed="rId1">
+            <a:lum/>
+          </a:blip>
+          <a:srcRect/>
+          <a:stretch>
+            <a:fillRect/>
+          </a:stretch>
+        </a:blipFill>
+        <a:effectLst/>
+      </p:bgPr>
+    </p:bg>
+    <p:spTree>
+      <p:nvGrpSpPr>
+        <p:cNvPr id="1" name=""/>
+        <p:cNvGrpSpPr/>
+        <p:nvPr/>
+      </p:nvGrpSpPr>
+      <p:grpSpPr>
+        <a:xfrm>
+          <a:off x="0" y="0"/>
+          <a:ext cx="0" cy="0"/>
+          <a:chOff x="0" y="0"/>
+          <a:chExt cx="0" cy="0"/>
+        </a:xfrm>
+      </p:grpSpPr>
+      <p:sp>
+        <p:nvSpPr>
+          <p:cNvPr id="2" name="Text 0"/>
+          <p:cNvSpPr/>
+          <p:nvPr/>
+        </p:nvSpPr>
+        <p:spPr>
+          <a:xfrm>
+            <a:off x="10362895" y="6016752"/>
+            <a:ext cx="1463040" cy="320040"/>
+          </a:xfrm>
+          <a:prstGeom prst="rect">
+            <a:avLst/>
+          </a:prstGeom>
+          <a:noFill/>
+          <a:ln/>
+        </p:spPr>
+        <p:txBody>
+          <a:bodyPr wrap="square" rtlCol="0" anchor="ctr"/>
+          <a:lstStyle/>
+          <a:p>
+            <a:pPr algn="r" indent="0" marL="0">
+              <a:buNone/>
+            </a:pPr>
+            <a:r>
+              <a:rPr lang="en-US" sz="1000" dirty="0">
+                <a:solidFill>
+                  <a:srgbClr val="8A9099"/>
+                </a:solidFill>
+                <a:latin typeface="微软雅黑" pitchFamily="34" charset="0"/>
+                <a:ea typeface="微软雅黑" pitchFamily="34" charset="-122"/>
+                <a:cs typeface="微软雅黑" pitchFamily="34" charset="-120"/>
+              </a:rPr>
+              <a:t>18 / 18</a:t>
+            </a:r>
+            <a:endParaRPr lang="en-US" sz="1000" dirty="0"/>
+          </a:p>
+        </p:txBody>
+      </p:sp>
+      <p:sp>
+        <p:nvSpPr>
+          <p:cNvPr id="3" name="Text 1"/>
+          <p:cNvSpPr/>
+          <p:nvPr/>
+        </p:nvSpPr>
+        <p:spPr>
+          <a:xfrm>
+            <a:off x="822960" y="960120"/>
+            <a:ext cx="10545775" cy="365760"/>
+          </a:xfrm>
+          <a:prstGeom prst="rect">
+            <a:avLst/>
+          </a:prstGeom>
+          <a:noFill/>
+          <a:ln/>
+        </p:spPr>
+        <p:txBody>
+          <a:bodyPr wrap="square" rtlCol="0" anchor="ctr"/>
+          <a:lstStyle/>
+          <a:p>
+            <a:pPr algn="l" indent="0" marL="0">
+              <a:buNone/>
+            </a:pPr>
+            <a:r>
+              <a:rPr lang="en-US" sz="1400" b="1" dirty="0">
+                <a:solidFill>
+                  <a:srgbClr val="1F4E9C"/>
+                </a:solidFill>
+                <a:latin typeface="微软雅黑" pitchFamily="34" charset="0"/>
+                <a:ea typeface="微软雅黑" pitchFamily="34" charset="-122"/>
+                <a:cs typeface="微软雅黑" pitchFamily="34" charset="-120"/>
+              </a:rPr>
+              <a:t>参考答案 · 模仿题</a:t>
+            </a:r>
+            <a:endParaRPr lang="en-US" sz="1400" dirty="0"/>
+          </a:p>
+        </p:txBody>
+      </p:sp>
+      <p:sp>
+        <p:nvSpPr>
+          <p:cNvPr id="4" name="Text 2"/>
+          <p:cNvSpPr/>
+          <p:nvPr/>
+        </p:nvSpPr>
+        <p:spPr>
+          <a:xfrm>
+            <a:off x="822960" y="1344168"/>
+            <a:ext cx="10545775" cy="731520"/>
+          </a:xfrm>
+          <a:prstGeom prst="rect">
+            <a:avLst/>
+          </a:prstGeom>
+          <a:noFill/>
+          <a:ln/>
+        </p:spPr>
+        <p:txBody>
+          <a:bodyPr wrap="square" rtlCol="0" anchor="ctr"/>
+          <a:lstStyle/>
+          <a:p>
+            <a:pPr algn="l" indent="0" marL="0">
+              <a:buNone/>
+            </a:pPr>
+            <a:r>
+              <a:rPr lang="en-US" sz="2800" b="1" dirty="0">
+                <a:solidFill>
+                  <a:srgbClr val="1F2329"/>
+                </a:solidFill>
+                <a:latin typeface="微软雅黑" pitchFamily="34" charset="0"/>
+                <a:ea typeface="微软雅黑" pitchFamily="34" charset="-122"/>
+                <a:cs typeface="微软雅黑" pitchFamily="34" charset="-120"/>
+              </a:rPr>
+              <a:t>模仿题参考答案（自行对照）</a:t>
+            </a:r>
+            <a:endParaRPr lang="en-US" sz="2800" dirty="0"/>
+          </a:p>
+        </p:txBody>
+      </p:sp>
+      <p:sp>
+        <p:nvSpPr>
+          <p:cNvPr id="5" name="Shape 3"/>
+          <p:cNvSpPr/>
+          <p:nvPr/>
+        </p:nvSpPr>
+        <p:spPr>
+          <a:xfrm>
+            <a:off x="822960" y="2395728"/>
+            <a:ext cx="10545775" cy="2459736"/>
+          </a:xfrm>
+          <a:prstGeom prst="rect">
+            <a:avLst/>
+          </a:prstGeom>
+          <a:solidFill>
+            <a:srgbClr val="F7F9FC"/>
+          </a:solidFill>
+          <a:ln/>
+        </p:spPr>
+      </p:sp>
+      <p:sp>
+        <p:nvSpPr>
+          <p:cNvPr id="6" name="Shape 4"/>
+          <p:cNvSpPr/>
+          <p:nvPr/>
+        </p:nvSpPr>
+        <p:spPr>
+          <a:xfrm>
+            <a:off x="822960" y="2395728"/>
+            <a:ext cx="50292" cy="2459736"/>
+          </a:xfrm>
+          <a:prstGeom prst="rect">
+            <a:avLst/>
+          </a:prstGeom>
+          <a:solidFill>
+            <a:srgbClr val="1F4E9C"/>
+          </a:solidFill>
+          <a:ln/>
+        </p:spPr>
+      </p:sp>
+      <p:sp>
+        <p:nvSpPr>
+          <p:cNvPr id="7" name="Text 5"/>
+          <p:cNvSpPr/>
+          <p:nvPr/>
+        </p:nvSpPr>
+        <p:spPr>
+          <a:xfrm>
+            <a:off x="1078992" y="2505456"/>
+            <a:ext cx="10033711" cy="2240280"/>
+          </a:xfrm>
+          <a:prstGeom prst="rect">
+            <a:avLst/>
+          </a:prstGeom>
+          <a:noFill/>
+          <a:ln/>
+        </p:spPr>
+        <p:txBody>
+          <a:bodyPr wrap="square" rtlCol="0" anchor="t"/>
+          <a:lstStyle/>
+          <a:p>
+            <a:pPr algn="l" indent="0" marL="0">
+              <a:lnSpc>
+                <a:spcPct val="125000"/>
+              </a:lnSpc>
+              <a:buNone/>
+            </a:pPr>
+            <a:r>
+              <a:rPr lang="en-US" sz="1400" dirty="0">
+                <a:solidFill>
+                  <a:srgbClr val="1F2329"/>
+                </a:solidFill>
+                <a:latin typeface="Consolas" pitchFamily="34" charset="0"/>
+                <a:ea typeface="Consolas" pitchFamily="34" charset="-122"/>
+                <a:cs typeface="Consolas" pitchFamily="34" charset="-120"/>
+              </a:rPr>
+              <a:t>#include &lt;stdio.h&gt;
+int main(){
+    int score;
+    scanf("%d", &amp;score);
+    if(score % 2 == 0) printf("偶数\n");
+    else printf("奇数\n");
+    return 0;
+}
+</a:t>
+            </a:r>
+            <a:endParaRPr lang="en-US" sz="1400" dirty="0"/>
+          </a:p>
+        </p:txBody>
+      </p:sp>
+      <p:sp>
+        <p:nvSpPr>
+          <p:cNvPr id="8" name="Text 6"/>
+          <p:cNvSpPr/>
+          <p:nvPr/>
+        </p:nvSpPr>
+        <p:spPr>
+          <a:xfrm>
+            <a:off x="896112" y="5056632"/>
+            <a:ext cx="10454335" cy="397764"/>
+          </a:xfrm>
+          <a:prstGeom prst="rect">
+            <a:avLst/>
+          </a:prstGeom>
+          <a:noFill/>
+          <a:ln/>
+        </p:spPr>
+        <p:txBody>
+          <a:bodyPr wrap="square" rtlCol="0" anchor="t"/>
+          <a:lstStyle/>
+          <a:p>
+            <a:pPr algn="l" indent="0" marL="0">
+              <a:lnSpc>
+                <a:spcPct val="115000"/>
+              </a:lnSpc>
+              <a:buNone/>
+            </a:pPr>
+            <a:r>
+              <a:rPr lang="en-US" sz="1800" b="1" dirty="0">
+                <a:solidFill>
+                  <a:srgbClr val="1F4E9C"/>
+                </a:solidFill>
+                <a:latin typeface="微软雅黑" pitchFamily="34" charset="0"/>
+                <a:ea typeface="微软雅黑" pitchFamily="34" charset="-122"/>
+                <a:cs typeface="微软雅黑" pitchFamily="34" charset="-120"/>
+              </a:rPr>
+              <a:t>•  </a:t>
+            </a:r>
+            <a:pPr algn="l" indent="0" marL="0">
+              <a:lnSpc>
+                <a:spcPct val="115000"/>
+              </a:lnSpc>
+              <a:buNone/>
+            </a:pPr>
+            <a:r>
+              <a:rPr lang="en-US" sz="1800" dirty="0">
+                <a:solidFill>
+                  <a:srgbClr val="000000"/>
+                </a:solidFill>
+              </a:rPr>
+              <a:t>读入 score，用 score 对 2 取余是否为 0 判偶数，否则为奇数</a:t>
+            </a:r>
+            <a:endParaRPr lang="en-US" sz="1800" dirty="0"/>
+          </a:p>
+        </p:txBody>
+      </p:sp>
+      <p:sp>
+        <p:nvSpPr>
+          <p:cNvPr id="9" name="Text 7"/>
+          <p:cNvSpPr/>
+          <p:nvPr/>
+        </p:nvSpPr>
+        <p:spPr>
+          <a:xfrm>
+            <a:off x="896112" y="5527548"/>
+            <a:ext cx="10454335" cy="397764"/>
+          </a:xfrm>
+          <a:prstGeom prst="rect">
+            <a:avLst/>
+          </a:prstGeom>
+          <a:noFill/>
+          <a:ln/>
+        </p:spPr>
+        <p:txBody>
+          <a:bodyPr wrap="square" rtlCol="0" anchor="t"/>
+          <a:lstStyle/>
+          <a:p>
+            <a:pPr algn="l" indent="0" marL="0">
+              <a:lnSpc>
+                <a:spcPct val="115000"/>
+              </a:lnSpc>
+              <a:buNone/>
+            </a:pPr>
+            <a:r>
+              <a:rPr lang="en-US" sz="1800" b="1" dirty="0">
+                <a:solidFill>
+                  <a:srgbClr val="1F4E9C"/>
+                </a:solidFill>
+                <a:latin typeface="微软雅黑" pitchFamily="34" charset="0"/>
+                <a:ea typeface="微软雅黑" pitchFamily="34" charset="-122"/>
+                <a:cs typeface="微软雅黑" pitchFamily="34" charset="-120"/>
+              </a:rPr>
+              <a:t>•  </a:t>
+            </a:r>
+            <a:pPr algn="l" indent="0" marL="0">
+              <a:lnSpc>
+                <a:spcPct val="115000"/>
+              </a:lnSpc>
+              <a:buNone/>
+            </a:pPr>
+            <a:r>
+              <a:rPr lang="en-US" sz="1800" dirty="0">
+                <a:solidFill>
+                  <a:srgbClr val="000000"/>
+                </a:solidFill>
+              </a:rPr>
+              <a:t>判奇偶就是看除以 2 的余数；if 与 else 两条分支互斥</a:t>
+            </a:r>
+            <a:endParaRPr lang="en-US" sz="1800" dirty="0"/>
           </a:p>
         </p:txBody>
       </p:sp>
@@ -5039,7 +5995,7 @@
                 <a:ea typeface="微软雅黑" pitchFamily="34" charset="-122"/>
                 <a:cs typeface="微软雅黑" pitchFamily="34" charset="-120"/>
               </a:rPr>
-              <a:t>2 / 16</a:t>
+              <a:t>2 / 18</a:t>
             </a:r>
             <a:endParaRPr lang="en-US" sz="1000" dirty="0"/>
           </a:p>
@@ -5204,19 +6160,34 @@
             <a:avLst/>
           </a:prstGeom>
           <a:solidFill>
-            <a:srgbClr val="F5F6F7"/>
+            <a:srgbClr val="F7F9FC"/>
           </a:solidFill>
-          <a:ln w="9525">
-            <a:solidFill>
-              <a:srgbClr val="D8DBE0"/>
-            </a:solidFill>
-            <a:prstDash val="solid"/>
-          </a:ln>
-        </p:spPr>
-      </p:sp>
-      <p:sp>
-        <p:nvSpPr>
-          <p:cNvPr id="8" name="Text 6"/>
+          <a:ln/>
+        </p:spPr>
+      </p:sp>
+      <p:sp>
+        <p:nvSpPr>
+          <p:cNvPr id="8" name="Shape 6"/>
+          <p:cNvSpPr/>
+          <p:nvPr/>
+        </p:nvSpPr>
+        <p:spPr>
+          <a:xfrm>
+            <a:off x="822960" y="2395728"/>
+            <a:ext cx="50292" cy="1033272"/>
+          </a:xfrm>
+          <a:prstGeom prst="rect">
+            <a:avLst/>
+          </a:prstGeom>
+          <a:solidFill>
+            <a:srgbClr val="1F4E9C"/>
+          </a:solidFill>
+          <a:ln/>
+        </p:spPr>
+      </p:sp>
+      <p:sp>
+        <p:nvSpPr>
+          <p:cNvPr id="9" name="Text 7"/>
           <p:cNvSpPr/>
           <p:nvPr/>
         </p:nvSpPr>
@@ -5260,7 +6231,7 @@
       </p:sp>
       <p:sp>
         <p:nvSpPr>
-          <p:cNvPr id="9" name="Text 7"/>
+          <p:cNvPr id="10" name="Text 8"/>
           <p:cNvSpPr/>
           <p:nvPr/>
         </p:nvSpPr>
@@ -5344,7 +6315,7 @@
       </p:sp>
       <p:sp>
         <p:nvSpPr>
-          <p:cNvPr id="10" name="Text 8"/>
+          <p:cNvPr id="11" name="Text 9"/>
           <p:cNvSpPr/>
           <p:nvPr/>
         </p:nvSpPr>
@@ -5428,7 +6399,7 @@
       </p:sp>
       <p:sp>
         <p:nvSpPr>
-          <p:cNvPr id="11" name="Text 9"/>
+          <p:cNvPr id="12" name="Text 10"/>
           <p:cNvSpPr/>
           <p:nvPr/>
         </p:nvSpPr>
@@ -5512,7 +6483,7 @@
       </p:sp>
       <p:sp>
         <p:nvSpPr>
-          <p:cNvPr id="12" name="Text 10"/>
+          <p:cNvPr id="13" name="Text 11"/>
           <p:cNvSpPr/>
           <p:nvPr/>
         </p:nvSpPr>
@@ -5652,7 +6623,7 @@
                 <a:ea typeface="微软雅黑" pitchFamily="34" charset="-122"/>
                 <a:cs typeface="微软雅黑" pitchFamily="34" charset="-120"/>
               </a:rPr>
-              <a:t>3 / 16</a:t>
+              <a:t>3 / 18</a:t>
             </a:r>
             <a:endParaRPr lang="en-US" sz="1000" dirty="0"/>
           </a:p>
@@ -5751,19 +6722,34 @@
             <a:avLst/>
           </a:prstGeom>
           <a:solidFill>
-            <a:srgbClr val="F5F6F7"/>
+            <a:srgbClr val="F7F9FC"/>
           </a:solidFill>
-          <a:ln w="9525">
-            <a:solidFill>
-              <a:srgbClr val="D8DBE0"/>
-            </a:solidFill>
-            <a:prstDash val="solid"/>
-          </a:ln>
-        </p:spPr>
-      </p:sp>
-      <p:sp>
-        <p:nvSpPr>
-          <p:cNvPr id="6" name="Text 4"/>
+          <a:ln/>
+        </p:spPr>
+      </p:sp>
+      <p:sp>
+        <p:nvSpPr>
+          <p:cNvPr id="6" name="Shape 4"/>
+          <p:cNvSpPr/>
+          <p:nvPr/>
+        </p:nvSpPr>
+        <p:spPr>
+          <a:xfrm>
+            <a:off x="822960" y="2395728"/>
+            <a:ext cx="50292" cy="1271016"/>
+          </a:xfrm>
+          <a:prstGeom prst="rect">
+            <a:avLst/>
+          </a:prstGeom>
+          <a:solidFill>
+            <a:srgbClr val="1F4E9C"/>
+          </a:solidFill>
+          <a:ln/>
+        </p:spPr>
+      </p:sp>
+      <p:sp>
+        <p:nvSpPr>
+          <p:cNvPr id="7" name="Text 5"/>
           <p:cNvSpPr/>
           <p:nvPr/>
         </p:nvSpPr>
@@ -5808,7 +6794,7 @@
       </p:sp>
       <p:sp>
         <p:nvSpPr>
-          <p:cNvPr id="7" name="Text 5"/>
+          <p:cNvPr id="8" name="Text 6"/>
           <p:cNvSpPr/>
           <p:nvPr/>
         </p:nvSpPr>
@@ -5920,7 +6906,7 @@
       </p:sp>
       <p:sp>
         <p:nvSpPr>
-          <p:cNvPr id="8" name="Text 6"/>
+          <p:cNvPr id="9" name="Text 7"/>
           <p:cNvSpPr/>
           <p:nvPr/>
         </p:nvSpPr>
@@ -5976,7 +6962,7 @@
       </p:sp>
       <p:sp>
         <p:nvSpPr>
-          <p:cNvPr id="9" name="Text 7"/>
+          <p:cNvPr id="10" name="Text 8"/>
           <p:cNvSpPr/>
           <p:nvPr/>
         </p:nvSpPr>
@@ -6046,7 +7032,7 @@
       </p:sp>
       <p:sp>
         <p:nvSpPr>
-          <p:cNvPr id="10" name="Text 8"/>
+          <p:cNvPr id="11" name="Text 9"/>
           <p:cNvSpPr/>
           <p:nvPr/>
         </p:nvSpPr>
@@ -6172,7 +7158,7 @@
                 <a:ea typeface="微软雅黑" pitchFamily="34" charset="-122"/>
                 <a:cs typeface="微软雅黑" pitchFamily="34" charset="-120"/>
               </a:rPr>
-              <a:t>4 / 16</a:t>
+              <a:t>4 / 18</a:t>
             </a:r>
             <a:endParaRPr lang="en-US" sz="1000" dirty="0"/>
           </a:p>
@@ -6271,19 +7257,34 @@
             <a:avLst/>
           </a:prstGeom>
           <a:solidFill>
-            <a:srgbClr val="F5F6F7"/>
+            <a:srgbClr val="F7F9FC"/>
           </a:solidFill>
-          <a:ln w="9525">
-            <a:solidFill>
-              <a:srgbClr val="D8DBE0"/>
-            </a:solidFill>
-            <a:prstDash val="solid"/>
-          </a:ln>
-        </p:spPr>
-      </p:sp>
-      <p:sp>
-        <p:nvSpPr>
-          <p:cNvPr id="6" name="Text 4"/>
+          <a:ln/>
+        </p:spPr>
+      </p:sp>
+      <p:sp>
+        <p:nvSpPr>
+          <p:cNvPr id="6" name="Shape 4"/>
+          <p:cNvSpPr/>
+          <p:nvPr/>
+        </p:nvSpPr>
+        <p:spPr>
+          <a:xfrm>
+            <a:off x="822960" y="2395728"/>
+            <a:ext cx="50292" cy="1746504"/>
+          </a:xfrm>
+          <a:prstGeom prst="rect">
+            <a:avLst/>
+          </a:prstGeom>
+          <a:solidFill>
+            <a:srgbClr val="1F4E9C"/>
+          </a:solidFill>
+          <a:ln/>
+        </p:spPr>
+      </p:sp>
+      <p:sp>
+        <p:nvSpPr>
+          <p:cNvPr id="7" name="Text 5"/>
           <p:cNvSpPr/>
           <p:nvPr/>
         </p:nvSpPr>
@@ -6330,7 +7331,7 @@
       </p:sp>
       <p:sp>
         <p:nvSpPr>
-          <p:cNvPr id="7" name="Text 5"/>
+          <p:cNvPr id="8" name="Text 6"/>
           <p:cNvSpPr/>
           <p:nvPr/>
         </p:nvSpPr>
@@ -6400,7 +7401,7 @@
       </p:sp>
       <p:sp>
         <p:nvSpPr>
-          <p:cNvPr id="8" name="Text 6"/>
+          <p:cNvPr id="9" name="Text 7"/>
           <p:cNvSpPr/>
           <p:nvPr/>
         </p:nvSpPr>
@@ -6484,7 +7485,7 @@
       </p:sp>
       <p:sp>
         <p:nvSpPr>
-          <p:cNvPr id="9" name="Text 7"/>
+          <p:cNvPr id="10" name="Text 8"/>
           <p:cNvSpPr/>
           <p:nvPr/>
         </p:nvSpPr>
@@ -6610,7 +7611,7 @@
                 <a:ea typeface="微软雅黑" pitchFamily="34" charset="-122"/>
                 <a:cs typeface="微软雅黑" pitchFamily="34" charset="-120"/>
               </a:rPr>
-              <a:t>5 / 16</a:t>
+              <a:t>5 / 18</a:t>
             </a:r>
             <a:endParaRPr lang="en-US" sz="1000" dirty="0"/>
           </a:p>
@@ -6703,32 +7704,47 @@
         <p:spPr>
           <a:xfrm>
             <a:off x="822960" y="2395728"/>
-            <a:ext cx="10545775" cy="2221992"/>
+            <a:ext cx="10545775" cy="2152085"/>
           </a:xfrm>
           <a:prstGeom prst="rect">
             <a:avLst/>
           </a:prstGeom>
           <a:solidFill>
-            <a:srgbClr val="F5F6F7"/>
+            <a:srgbClr val="F7F9FC"/>
           </a:solidFill>
-          <a:ln w="9525">
-            <a:solidFill>
-              <a:srgbClr val="D8DBE0"/>
-            </a:solidFill>
-            <a:prstDash val="solid"/>
-          </a:ln>
-        </p:spPr>
-      </p:sp>
-      <p:sp>
-        <p:nvSpPr>
-          <p:cNvPr id="6" name="Text 4"/>
+          <a:ln/>
+        </p:spPr>
+      </p:sp>
+      <p:sp>
+        <p:nvSpPr>
+          <p:cNvPr id="6" name="Shape 4"/>
+          <p:cNvSpPr/>
+          <p:nvPr/>
+        </p:nvSpPr>
+        <p:spPr>
+          <a:xfrm>
+            <a:off x="822960" y="2395728"/>
+            <a:ext cx="50292" cy="2152085"/>
+          </a:xfrm>
+          <a:prstGeom prst="rect">
+            <a:avLst/>
+          </a:prstGeom>
+          <a:solidFill>
+            <a:srgbClr val="1F4E9C"/>
+          </a:solidFill>
+          <a:ln/>
+        </p:spPr>
+      </p:sp>
+      <p:sp>
+        <p:nvSpPr>
+          <p:cNvPr id="7" name="Text 5"/>
           <p:cNvSpPr/>
           <p:nvPr/>
         </p:nvSpPr>
         <p:spPr>
           <a:xfrm>
             <a:off x="1078992" y="2505456"/>
-            <a:ext cx="10033711" cy="2002536"/>
+            <a:ext cx="10033711" cy="1932629"/>
           </a:xfrm>
           <a:prstGeom prst="rect">
             <a:avLst/>
@@ -6770,13 +7786,13 @@
       </p:sp>
       <p:sp>
         <p:nvSpPr>
-          <p:cNvPr id="7" name="Text 5"/>
-          <p:cNvSpPr/>
-          <p:nvPr/>
-        </p:nvSpPr>
-        <p:spPr>
-          <a:xfrm>
-            <a:off x="896112" y="4818888"/>
+          <p:cNvPr id="8" name="Text 6"/>
+          <p:cNvSpPr/>
+          <p:nvPr/>
+        </p:nvSpPr>
+        <p:spPr>
+          <a:xfrm>
+            <a:off x="896112" y="4748981"/>
             <a:ext cx="10454335" cy="378714"/>
           </a:xfrm>
           <a:prstGeom prst="rect">
@@ -6854,13 +7870,13 @@
       </p:sp>
       <p:sp>
         <p:nvSpPr>
-          <p:cNvPr id="8" name="Text 6"/>
-          <p:cNvSpPr/>
-          <p:nvPr/>
-        </p:nvSpPr>
-        <p:spPr>
-          <a:xfrm>
-            <a:off x="896112" y="5270754"/>
+          <p:cNvPr id="9" name="Text 7"/>
+          <p:cNvSpPr/>
+          <p:nvPr/>
+        </p:nvSpPr>
+        <p:spPr>
+          <a:xfrm>
+            <a:off x="896112" y="5200847"/>
             <a:ext cx="10454335" cy="378714"/>
           </a:xfrm>
           <a:prstGeom prst="rect">
@@ -6910,13 +7926,13 @@
       </p:sp>
       <p:sp>
         <p:nvSpPr>
-          <p:cNvPr id="9" name="Text 7"/>
-          <p:cNvSpPr/>
-          <p:nvPr/>
-        </p:nvSpPr>
-        <p:spPr>
-          <a:xfrm>
-            <a:off x="896112" y="5722620"/>
+          <p:cNvPr id="10" name="Text 8"/>
+          <p:cNvSpPr/>
+          <p:nvPr/>
+        </p:nvSpPr>
+        <p:spPr>
+          <a:xfrm>
+            <a:off x="896112" y="5652713"/>
             <a:ext cx="10454335" cy="378714"/>
           </a:xfrm>
           <a:prstGeom prst="rect">
@@ -7036,7 +8052,7 @@
                 <a:ea typeface="微软雅黑" pitchFamily="34" charset="-122"/>
                 <a:cs typeface="微软雅黑" pitchFamily="34" charset="-120"/>
               </a:rPr>
-              <a:t>6 / 16</a:t>
+              <a:t>6 / 18</a:t>
             </a:r>
             <a:endParaRPr lang="en-US" sz="1000" dirty="0"/>
           </a:p>
@@ -7135,19 +8151,34 @@
             <a:avLst/>
           </a:prstGeom>
           <a:solidFill>
-            <a:srgbClr val="F5F6F7"/>
+            <a:srgbClr val="F7F9FC"/>
           </a:solidFill>
-          <a:ln w="9525">
-            <a:solidFill>
-              <a:srgbClr val="D8DBE0"/>
-            </a:solidFill>
-            <a:prstDash val="solid"/>
-          </a:ln>
-        </p:spPr>
-      </p:sp>
-      <p:sp>
-        <p:nvSpPr>
-          <p:cNvPr id="6" name="Text 4"/>
+          <a:ln/>
+        </p:spPr>
+      </p:sp>
+      <p:sp>
+        <p:nvSpPr>
+          <p:cNvPr id="6" name="Shape 4"/>
+          <p:cNvSpPr/>
+          <p:nvPr/>
+        </p:nvSpPr>
+        <p:spPr>
+          <a:xfrm>
+            <a:off x="822960" y="2395728"/>
+            <a:ext cx="50292" cy="1746504"/>
+          </a:xfrm>
+          <a:prstGeom prst="rect">
+            <a:avLst/>
+          </a:prstGeom>
+          <a:solidFill>
+            <a:srgbClr val="1F4E9C"/>
+          </a:solidFill>
+          <a:ln/>
+        </p:spPr>
+      </p:sp>
+      <p:sp>
+        <p:nvSpPr>
+          <p:cNvPr id="7" name="Text 5"/>
           <p:cNvSpPr/>
           <p:nvPr/>
         </p:nvSpPr>
@@ -7194,7 +8225,7 @@
       </p:sp>
       <p:sp>
         <p:nvSpPr>
-          <p:cNvPr id="7" name="Text 5"/>
+          <p:cNvPr id="8" name="Text 6"/>
           <p:cNvSpPr/>
           <p:nvPr/>
         </p:nvSpPr>
@@ -7278,7 +8309,7 @@
       </p:sp>
       <p:sp>
         <p:nvSpPr>
-          <p:cNvPr id="8" name="Text 6"/>
+          <p:cNvPr id="9" name="Text 7"/>
           <p:cNvSpPr/>
           <p:nvPr/>
         </p:nvSpPr>
@@ -7362,7 +8393,7 @@
       </p:sp>
       <p:sp>
         <p:nvSpPr>
-          <p:cNvPr id="9" name="Text 7"/>
+          <p:cNvPr id="10" name="Text 8"/>
           <p:cNvSpPr/>
           <p:nvPr/>
         </p:nvSpPr>
@@ -7488,7 +8519,7 @@
                 <a:ea typeface="微软雅黑" pitchFamily="34" charset="-122"/>
                 <a:cs typeface="微软雅黑" pitchFamily="34" charset="-120"/>
               </a:rPr>
-              <a:t>7 / 16</a:t>
+              <a:t>7 / 18</a:t>
             </a:r>
             <a:endParaRPr lang="en-US" sz="1000" dirty="0"/>
           </a:p>
@@ -7587,19 +8618,34 @@
             <a:avLst/>
           </a:prstGeom>
           <a:solidFill>
-            <a:srgbClr val="F5F6F7"/>
+            <a:srgbClr val="F7F9FC"/>
           </a:solidFill>
-          <a:ln w="9525">
-            <a:solidFill>
-              <a:srgbClr val="D8DBE0"/>
-            </a:solidFill>
-            <a:prstDash val="solid"/>
-          </a:ln>
-        </p:spPr>
-      </p:sp>
-      <p:sp>
-        <p:nvSpPr>
-          <p:cNvPr id="6" name="Text 4"/>
+          <a:ln/>
+        </p:spPr>
+      </p:sp>
+      <p:sp>
+        <p:nvSpPr>
+          <p:cNvPr id="6" name="Shape 4"/>
+          <p:cNvSpPr/>
+          <p:nvPr/>
+        </p:nvSpPr>
+        <p:spPr>
+          <a:xfrm>
+            <a:off x="822960" y="2395728"/>
+            <a:ext cx="50292" cy="1271016"/>
+          </a:xfrm>
+          <a:prstGeom prst="rect">
+            <a:avLst/>
+          </a:prstGeom>
+          <a:solidFill>
+            <a:srgbClr val="1F4E9C"/>
+          </a:solidFill>
+          <a:ln/>
+        </p:spPr>
+      </p:sp>
+      <p:sp>
+        <p:nvSpPr>
+          <p:cNvPr id="7" name="Text 5"/>
           <p:cNvSpPr/>
           <p:nvPr/>
         </p:nvSpPr>
@@ -7644,7 +8690,7 @@
       </p:sp>
       <p:sp>
         <p:nvSpPr>
-          <p:cNvPr id="7" name="Text 5"/>
+          <p:cNvPr id="8" name="Text 6"/>
           <p:cNvSpPr/>
           <p:nvPr/>
         </p:nvSpPr>
@@ -7700,7 +8746,7 @@
       </p:sp>
       <p:sp>
         <p:nvSpPr>
-          <p:cNvPr id="8" name="Text 6"/>
+          <p:cNvPr id="9" name="Text 7"/>
           <p:cNvSpPr/>
           <p:nvPr/>
         </p:nvSpPr>
@@ -7770,7 +8816,7 @@
       </p:sp>
       <p:sp>
         <p:nvSpPr>
-          <p:cNvPr id="9" name="Text 7"/>
+          <p:cNvPr id="10" name="Text 8"/>
           <p:cNvSpPr/>
           <p:nvPr/>
         </p:nvSpPr>
@@ -7896,7 +8942,7 @@
                 <a:ea typeface="微软雅黑" pitchFamily="34" charset="-122"/>
                 <a:cs typeface="微软雅黑" pitchFamily="34" charset="-120"/>
               </a:rPr>
-              <a:t>8 / 16</a:t>
+              <a:t>8 / 18</a:t>
             </a:r>
             <a:endParaRPr lang="en-US" sz="1000" dirty="0"/>
           </a:p>
@@ -7995,19 +9041,34 @@
             <a:avLst/>
           </a:prstGeom>
           <a:solidFill>
-            <a:srgbClr val="F5F6F7"/>
+            <a:srgbClr val="F7F9FC"/>
           </a:solidFill>
-          <a:ln w="9525">
-            <a:solidFill>
-              <a:srgbClr val="D8DBE0"/>
-            </a:solidFill>
-            <a:prstDash val="solid"/>
-          </a:ln>
-        </p:spPr>
-      </p:sp>
-      <p:sp>
-        <p:nvSpPr>
-          <p:cNvPr id="6" name="Text 4"/>
+          <a:ln/>
+        </p:spPr>
+      </p:sp>
+      <p:sp>
+        <p:nvSpPr>
+          <p:cNvPr id="6" name="Shape 4"/>
+          <p:cNvSpPr/>
+          <p:nvPr/>
+        </p:nvSpPr>
+        <p:spPr>
+          <a:xfrm>
+            <a:off x="822960" y="2395728"/>
+            <a:ext cx="50292" cy="1746504"/>
+          </a:xfrm>
+          <a:prstGeom prst="rect">
+            <a:avLst/>
+          </a:prstGeom>
+          <a:solidFill>
+            <a:srgbClr val="1F4E9C"/>
+          </a:solidFill>
+          <a:ln/>
+        </p:spPr>
+      </p:sp>
+      <p:sp>
+        <p:nvSpPr>
+          <p:cNvPr id="7" name="Text 5"/>
           <p:cNvSpPr/>
           <p:nvPr/>
         </p:nvSpPr>
@@ -8054,7 +9115,7 @@
       </p:sp>
       <p:sp>
         <p:nvSpPr>
-          <p:cNvPr id="7" name="Text 5"/>
+          <p:cNvPr id="8" name="Text 6"/>
           <p:cNvSpPr/>
           <p:nvPr/>
         </p:nvSpPr>
@@ -8124,7 +9185,7 @@
       </p:sp>
       <p:sp>
         <p:nvSpPr>
-          <p:cNvPr id="8" name="Text 6"/>
+          <p:cNvPr id="9" name="Text 7"/>
           <p:cNvSpPr/>
           <p:nvPr/>
         </p:nvSpPr>
@@ -8180,7 +9241,7 @@
       </p:sp>
       <p:sp>
         <p:nvSpPr>
-          <p:cNvPr id="9" name="Text 7"/>
+          <p:cNvPr id="10" name="Text 8"/>
           <p:cNvSpPr/>
           <p:nvPr/>
         </p:nvSpPr>
@@ -8306,7 +9367,7 @@
                 <a:ea typeface="微软雅黑" pitchFamily="34" charset="-122"/>
                 <a:cs typeface="微软雅黑" pitchFamily="34" charset="-120"/>
               </a:rPr>
-              <a:t>9 / 16</a:t>
+              <a:t>9 / 18</a:t>
             </a:r>
             <a:endParaRPr lang="en-US" sz="1000" dirty="0"/>
           </a:p>
@@ -8405,19 +9466,34 @@
             <a:avLst/>
           </a:prstGeom>
           <a:solidFill>
-            <a:srgbClr val="F5F6F7"/>
+            <a:srgbClr val="F7F9FC"/>
           </a:solidFill>
-          <a:ln w="9525">
-            <a:solidFill>
-              <a:srgbClr val="D8DBE0"/>
-            </a:solidFill>
-            <a:prstDash val="solid"/>
-          </a:ln>
-        </p:spPr>
-      </p:sp>
-      <p:sp>
-        <p:nvSpPr>
-          <p:cNvPr id="6" name="Text 4"/>
+          <a:ln/>
+        </p:spPr>
+      </p:sp>
+      <p:sp>
+        <p:nvSpPr>
+          <p:cNvPr id="6" name="Shape 4"/>
+          <p:cNvSpPr/>
+          <p:nvPr/>
+        </p:nvSpPr>
+        <p:spPr>
+          <a:xfrm>
+            <a:off x="822960" y="2395728"/>
+            <a:ext cx="50292" cy="1746504"/>
+          </a:xfrm>
+          <a:prstGeom prst="rect">
+            <a:avLst/>
+          </a:prstGeom>
+          <a:solidFill>
+            <a:srgbClr val="1F4E9C"/>
+          </a:solidFill>
+          <a:ln/>
+        </p:spPr>
+      </p:sp>
+      <p:sp>
+        <p:nvSpPr>
+          <p:cNvPr id="7" name="Text 5"/>
           <p:cNvSpPr/>
           <p:nvPr/>
         </p:nvSpPr>
@@ -8464,7 +9540,7 @@
       </p:sp>
       <p:sp>
         <p:nvSpPr>
-          <p:cNvPr id="7" name="Text 5"/>
+          <p:cNvPr id="8" name="Text 6"/>
           <p:cNvSpPr/>
           <p:nvPr/>
         </p:nvSpPr>
@@ -8534,7 +9610,7 @@
       </p:sp>
       <p:sp>
         <p:nvSpPr>
-          <p:cNvPr id="8" name="Text 6"/>
+          <p:cNvPr id="9" name="Text 7"/>
           <p:cNvSpPr/>
           <p:nvPr/>
         </p:nvSpPr>
@@ -8590,7 +9666,7 @@
       </p:sp>
       <p:sp>
         <p:nvSpPr>
-          <p:cNvPr id="9" name="Text 7"/>
+          <p:cNvPr id="10" name="Text 8"/>
           <p:cNvSpPr/>
           <p:nvPr/>
         </p:nvSpPr>
